--- a/25-08-2026/ppt8.pptx
+++ b/25-08-2026/ppt8.pptx
@@ -50,7 +50,6 @@
     <p:sldId id="295" r:id="rId44"/>
     <p:sldId id="300" r:id="rId45"/>
     <p:sldId id="301" r:id="rId46"/>
-    <p:sldId id="302" r:id="rId47"/>
   </p:sldIdLst>
   <p:sldSz cx="9144000" cy="6858000" type="screen4x3"/>
   <p:notesSz cx="6858000" cy="9144000"/>
@@ -149,6 +148,22 @@
       </a:defRPr>
     </a:lvl9pPr>
   </p:defaultTextStyle>
+  <p:extLst>
+    <p:ext uri="{EFAFB233-063F-42B5-8137-9DF3F51BA10A}">
+      <p15:sldGuideLst xmlns:p15="http://schemas.microsoft.com/office/powerpoint/2012/main">
+        <p15:guide id="1" orient="horz" pos="2160">
+          <p15:clr>
+            <a:srgbClr val="A4A3A4"/>
+          </p15:clr>
+        </p15:guide>
+        <p15:guide id="2" pos="2880">
+          <p15:clr>
+            <a:srgbClr val="A4A3A4"/>
+          </p15:clr>
+        </p15:guide>
+      </p15:sldGuideLst>
+    </p:ext>
+  </p:extLst>
 </p:presentation>
 </file>
 
@@ -195,10 +210,9 @@
           </a:lstStyle>
           <a:p>
             <a:r>
-              <a:rPr kumimoji="0" lang="en-US" smtClean="0"/>
+              <a:rPr kumimoji="0" lang="en-US"/>
               <a:t>Click to edit Master title style</a:t>
             </a:r>
-            <a:endParaRPr kumimoji="0" lang="en-US"/>
           </a:p>
         </p:txBody>
       </p:sp>
@@ -260,10 +274,9 @@
           </a:lstStyle>
           <a:p>
             <a:r>
-              <a:rPr kumimoji="0" lang="en-US" smtClean="0"/>
+              <a:rPr kumimoji="0" lang="en-US"/>
               <a:t>Click to edit Master subtitle style</a:t>
             </a:r>
-            <a:endParaRPr kumimoji="0" lang="en-US"/>
           </a:p>
         </p:txBody>
       </p:sp>
@@ -280,14 +293,12 @@
         <p:spPr/>
         <p:txBody>
           <a:bodyPr/>
-          <a:lstStyle>
-            <a:extLst/>
-          </a:lstStyle>
+          <a:lstStyle/>
           <a:p>
             <a:fld id="{1D8BD707-D9CF-40AE-B4C6-C98DA3205C09}" type="datetimeFigureOut">
               <a:rPr lang="en-US" smtClean="0"/>
               <a:pPr/>
-              <a:t>8/25/2026</a:t>
+              <a:t>9/17/2026</a:t>
             </a:fld>
             <a:endParaRPr lang="en-US"/>
           </a:p>
@@ -306,9 +317,7 @@
         <p:spPr/>
         <p:txBody>
           <a:bodyPr/>
-          <a:lstStyle>
-            <a:extLst/>
-          </a:lstStyle>
+          <a:lstStyle/>
           <a:p>
             <a:endParaRPr lang="en-US"/>
           </a:p>
@@ -327,9 +336,7 @@
         <p:spPr/>
         <p:txBody>
           <a:bodyPr/>
-          <a:lstStyle>
-            <a:extLst/>
-          </a:lstStyle>
+          <a:lstStyle/>
           <a:p>
             <a:fld id="{B6F15528-21DE-4FAA-801E-634DDDAF4B2B}" type="slidenum">
               <a:rPr lang="en-US" smtClean="0"/>
@@ -418,9 +425,7 @@
         </p:style>
         <p:txBody>
           <a:bodyPr anchor="ctr"/>
-          <a:lstStyle>
-            <a:extLst/>
-          </a:lstStyle>
+          <a:lstStyle/>
           <a:p>
             <a:pPr algn="ctr" eaLnBrk="1" latinLnBrk="0" hangingPunct="1"/>
             <a:endParaRPr kumimoji="0" lang="en-US"/>
@@ -469,9 +474,7 @@
         </p:style>
         <p:txBody>
           <a:bodyPr anchor="ctr"/>
-          <a:lstStyle>
-            <a:extLst/>
-          </a:lstStyle>
+          <a:lstStyle/>
           <a:p>
             <a:pPr algn="ctr" eaLnBrk="1" latinLnBrk="0" hangingPunct="1"/>
             <a:endParaRPr kumimoji="0" lang="en-US"/>
@@ -516,15 +519,12 @@
         <p:spPr/>
         <p:txBody>
           <a:bodyPr/>
-          <a:lstStyle>
-            <a:extLst/>
-          </a:lstStyle>
-          <a:p>
-            <a:r>
-              <a:rPr kumimoji="0" lang="en-US" smtClean="0"/>
+          <a:lstStyle/>
+          <a:p>
+            <a:r>
+              <a:rPr kumimoji="0" lang="en-US"/>
               <a:t>Click to edit Master title style</a:t>
             </a:r>
-            <a:endParaRPr kumimoji="0" lang="en-US"/>
           </a:p>
         </p:txBody>
       </p:sp>
@@ -541,41 +541,39 @@
         <p:spPr/>
         <p:txBody>
           <a:bodyPr vert="eaVert"/>
-          <a:lstStyle>
-            <a:extLst/>
-          </a:lstStyle>
+          <a:lstStyle/>
           <a:p>
             <a:pPr lvl="0" eaLnBrk="1" latinLnBrk="0" hangingPunct="1"/>
             <a:r>
-              <a:rPr lang="en-US" smtClean="0"/>
+              <a:rPr lang="en-US"/>
               <a:t>Click to edit Master text styles</a:t>
             </a:r>
           </a:p>
           <a:p>
             <a:pPr lvl="1" eaLnBrk="1" latinLnBrk="0" hangingPunct="1"/>
             <a:r>
-              <a:rPr lang="en-US" smtClean="0"/>
+              <a:rPr lang="en-US"/>
               <a:t>Second level</a:t>
             </a:r>
           </a:p>
           <a:p>
             <a:pPr lvl="2" eaLnBrk="1" latinLnBrk="0" hangingPunct="1"/>
             <a:r>
-              <a:rPr lang="en-US" smtClean="0"/>
+              <a:rPr lang="en-US"/>
               <a:t>Third level</a:t>
             </a:r>
           </a:p>
           <a:p>
             <a:pPr lvl="3" eaLnBrk="1" latinLnBrk="0" hangingPunct="1"/>
             <a:r>
-              <a:rPr lang="en-US" smtClean="0"/>
+              <a:rPr lang="en-US"/>
               <a:t>Fourth level</a:t>
             </a:r>
           </a:p>
           <a:p>
             <a:pPr lvl="4" eaLnBrk="1" latinLnBrk="0" hangingPunct="1"/>
             <a:r>
-              <a:rPr lang="en-US" smtClean="0"/>
+              <a:rPr lang="en-US"/>
               <a:t>Fifth level</a:t>
             </a:r>
             <a:endParaRPr kumimoji="0" lang="en-US"/>
@@ -595,14 +593,12 @@
         <p:spPr/>
         <p:txBody>
           <a:bodyPr/>
-          <a:lstStyle>
-            <a:extLst/>
-          </a:lstStyle>
+          <a:lstStyle/>
           <a:p>
             <a:fld id="{1D8BD707-D9CF-40AE-B4C6-C98DA3205C09}" type="datetimeFigureOut">
               <a:rPr lang="en-US" smtClean="0"/>
               <a:pPr/>
-              <a:t>8/25/2026</a:t>
+              <a:t>9/17/2026</a:t>
             </a:fld>
             <a:endParaRPr lang="en-US"/>
           </a:p>
@@ -621,9 +617,7 @@
         <p:spPr/>
         <p:txBody>
           <a:bodyPr/>
-          <a:lstStyle>
-            <a:extLst/>
-          </a:lstStyle>
+          <a:lstStyle/>
           <a:p>
             <a:endParaRPr lang="en-US"/>
           </a:p>
@@ -642,9 +636,7 @@
         <p:spPr/>
         <p:txBody>
           <a:bodyPr/>
-          <a:lstStyle>
-            <a:extLst/>
-          </a:lstStyle>
+          <a:lstStyle/>
           <a:p>
             <a:fld id="{B6F15528-21DE-4FAA-801E-634DDDAF4B2B}" type="slidenum">
               <a:rPr lang="en-US" smtClean="0"/>
@@ -698,15 +690,12 @@
         </p:spPr>
         <p:txBody>
           <a:bodyPr vert="eaVert"/>
-          <a:lstStyle>
-            <a:extLst/>
-          </a:lstStyle>
-          <a:p>
-            <a:r>
-              <a:rPr kumimoji="0" lang="en-US" smtClean="0"/>
+          <a:lstStyle/>
+          <a:p>
+            <a:r>
+              <a:rPr kumimoji="0" lang="en-US"/>
               <a:t>Click to edit Master title style</a:t>
             </a:r>
-            <a:endParaRPr kumimoji="0" lang="en-US"/>
           </a:p>
         </p:txBody>
       </p:sp>
@@ -728,41 +717,39 @@
         </p:spPr>
         <p:txBody>
           <a:bodyPr vert="eaVert"/>
-          <a:lstStyle>
-            <a:extLst/>
-          </a:lstStyle>
+          <a:lstStyle/>
           <a:p>
             <a:pPr lvl="0" eaLnBrk="1" latinLnBrk="0" hangingPunct="1"/>
             <a:r>
-              <a:rPr lang="en-US" smtClean="0"/>
+              <a:rPr lang="en-US"/>
               <a:t>Click to edit Master text styles</a:t>
             </a:r>
           </a:p>
           <a:p>
             <a:pPr lvl="1" eaLnBrk="1" latinLnBrk="0" hangingPunct="1"/>
             <a:r>
-              <a:rPr lang="en-US" smtClean="0"/>
+              <a:rPr lang="en-US"/>
               <a:t>Second level</a:t>
             </a:r>
           </a:p>
           <a:p>
             <a:pPr lvl="2" eaLnBrk="1" latinLnBrk="0" hangingPunct="1"/>
             <a:r>
-              <a:rPr lang="en-US" smtClean="0"/>
+              <a:rPr lang="en-US"/>
               <a:t>Third level</a:t>
             </a:r>
           </a:p>
           <a:p>
             <a:pPr lvl="3" eaLnBrk="1" latinLnBrk="0" hangingPunct="1"/>
             <a:r>
-              <a:rPr lang="en-US" smtClean="0"/>
+              <a:rPr lang="en-US"/>
               <a:t>Fourth level</a:t>
             </a:r>
           </a:p>
           <a:p>
             <a:pPr lvl="4" eaLnBrk="1" latinLnBrk="0" hangingPunct="1"/>
             <a:r>
-              <a:rPr lang="en-US" smtClean="0"/>
+              <a:rPr lang="en-US"/>
               <a:t>Fifth level</a:t>
             </a:r>
             <a:endParaRPr kumimoji="0" lang="en-US"/>
@@ -782,14 +769,12 @@
         <p:spPr/>
         <p:txBody>
           <a:bodyPr/>
-          <a:lstStyle>
-            <a:extLst/>
-          </a:lstStyle>
+          <a:lstStyle/>
           <a:p>
             <a:fld id="{1D8BD707-D9CF-40AE-B4C6-C98DA3205C09}" type="datetimeFigureOut">
               <a:rPr lang="en-US" smtClean="0"/>
               <a:pPr/>
-              <a:t>8/25/2026</a:t>
+              <a:t>9/17/2026</a:t>
             </a:fld>
             <a:endParaRPr lang="en-US"/>
           </a:p>
@@ -808,9 +793,7 @@
         <p:spPr/>
         <p:txBody>
           <a:bodyPr/>
-          <a:lstStyle>
-            <a:extLst/>
-          </a:lstStyle>
+          <a:lstStyle/>
           <a:p>
             <a:endParaRPr lang="en-US"/>
           </a:p>
@@ -829,9 +812,7 @@
         <p:spPr/>
         <p:txBody>
           <a:bodyPr/>
-          <a:lstStyle>
-            <a:extLst/>
-          </a:lstStyle>
+          <a:lstStyle/>
           <a:p>
             <a:fld id="{B6F15528-21DE-4FAA-801E-634DDDAF4B2B}" type="slidenum">
               <a:rPr lang="en-US" smtClean="0"/>
@@ -880,15 +861,12 @@
         <p:spPr/>
         <p:txBody>
           <a:bodyPr/>
-          <a:lstStyle>
-            <a:extLst/>
-          </a:lstStyle>
-          <a:p>
-            <a:r>
-              <a:rPr kumimoji="0" lang="en-US" smtClean="0"/>
+          <a:lstStyle/>
+          <a:p>
+            <a:r>
+              <a:rPr kumimoji="0" lang="en-US"/>
               <a:t>Click to edit Master title style</a:t>
             </a:r>
-            <a:endParaRPr kumimoji="0" lang="en-US"/>
           </a:p>
         </p:txBody>
       </p:sp>
@@ -905,41 +883,39 @@
         <p:spPr/>
         <p:txBody>
           <a:bodyPr/>
-          <a:lstStyle>
-            <a:extLst/>
-          </a:lstStyle>
+          <a:lstStyle/>
           <a:p>
             <a:pPr lvl="0" eaLnBrk="1" latinLnBrk="0" hangingPunct="1"/>
             <a:r>
-              <a:rPr lang="en-US" smtClean="0"/>
+              <a:rPr lang="en-US"/>
               <a:t>Click to edit Master text styles</a:t>
             </a:r>
           </a:p>
           <a:p>
             <a:pPr lvl="1" eaLnBrk="1" latinLnBrk="0" hangingPunct="1"/>
             <a:r>
-              <a:rPr lang="en-US" smtClean="0"/>
+              <a:rPr lang="en-US"/>
               <a:t>Second level</a:t>
             </a:r>
           </a:p>
           <a:p>
             <a:pPr lvl="2" eaLnBrk="1" latinLnBrk="0" hangingPunct="1"/>
             <a:r>
-              <a:rPr lang="en-US" smtClean="0"/>
+              <a:rPr lang="en-US"/>
               <a:t>Third level</a:t>
             </a:r>
           </a:p>
           <a:p>
             <a:pPr lvl="3" eaLnBrk="1" latinLnBrk="0" hangingPunct="1"/>
             <a:r>
-              <a:rPr lang="en-US" smtClean="0"/>
+              <a:rPr lang="en-US"/>
               <a:t>Fourth level</a:t>
             </a:r>
           </a:p>
           <a:p>
             <a:pPr lvl="4" eaLnBrk="1" latinLnBrk="0" hangingPunct="1"/>
             <a:r>
-              <a:rPr lang="en-US" smtClean="0"/>
+              <a:rPr lang="en-US"/>
               <a:t>Fifth level</a:t>
             </a:r>
             <a:endParaRPr kumimoji="0" lang="en-US"/>
@@ -959,14 +935,12 @@
         <p:spPr/>
         <p:txBody>
           <a:bodyPr/>
-          <a:lstStyle>
-            <a:extLst/>
-          </a:lstStyle>
+          <a:lstStyle/>
           <a:p>
             <a:fld id="{1D8BD707-D9CF-40AE-B4C6-C98DA3205C09}" type="datetimeFigureOut">
               <a:rPr lang="en-US" smtClean="0"/>
               <a:pPr/>
-              <a:t>8/25/2026</a:t>
+              <a:t>9/17/2026</a:t>
             </a:fld>
             <a:endParaRPr lang="en-US"/>
           </a:p>
@@ -985,9 +959,7 @@
         <p:spPr/>
         <p:txBody>
           <a:bodyPr/>
-          <a:lstStyle>
-            <a:extLst/>
-          </a:lstStyle>
+          <a:lstStyle/>
           <a:p>
             <a:endParaRPr lang="en-US"/>
           </a:p>
@@ -1006,9 +978,7 @@
         <p:spPr/>
         <p:txBody>
           <a:bodyPr/>
-          <a:lstStyle>
-            <a:extLst/>
-          </a:lstStyle>
+          <a:lstStyle/>
           <a:p>
             <a:fld id="{B6F15528-21DE-4FAA-801E-634DDDAF4B2B}" type="slidenum">
               <a:rPr lang="en-US" smtClean="0"/>
@@ -1083,9 +1053,7 @@
         </p:style>
         <p:txBody>
           <a:bodyPr anchor="ctr"/>
-          <a:lstStyle>
-            <a:extLst/>
-          </a:lstStyle>
+          <a:lstStyle/>
           <a:p>
             <a:pPr algn="ctr" eaLnBrk="1" latinLnBrk="0" hangingPunct="1"/>
             <a:endParaRPr kumimoji="0" lang="en-US"/>
@@ -1122,10 +1090,9 @@
           </a:lstStyle>
           <a:p>
             <a:r>
-              <a:rPr kumimoji="0" lang="en-US" smtClean="0"/>
+              <a:rPr kumimoji="0" lang="en-US"/>
               <a:t>Click to edit Master title style</a:t>
             </a:r>
-            <a:endParaRPr kumimoji="0" lang="en-US"/>
           </a:p>
         </p:txBody>
       </p:sp>
@@ -1210,7 +1177,7 @@
           <a:p>
             <a:pPr lvl="0" eaLnBrk="1" latinLnBrk="0" hangingPunct="1"/>
             <a:r>
-              <a:rPr kumimoji="0" lang="en-US" smtClean="0"/>
+              <a:rPr kumimoji="0" lang="en-US"/>
               <a:t>Click to edit Master text styles</a:t>
             </a:r>
           </a:p>
@@ -1229,14 +1196,12 @@
         <p:spPr/>
         <p:txBody>
           <a:bodyPr/>
-          <a:lstStyle>
-            <a:extLst/>
-          </a:lstStyle>
+          <a:lstStyle/>
           <a:p>
             <a:fld id="{1D8BD707-D9CF-40AE-B4C6-C98DA3205C09}" type="datetimeFigureOut">
               <a:rPr lang="en-US" smtClean="0"/>
               <a:pPr/>
-              <a:t>8/25/2026</a:t>
+              <a:t>9/17/2026</a:t>
             </a:fld>
             <a:endParaRPr lang="en-US"/>
           </a:p>
@@ -1255,9 +1220,7 @@
         <p:spPr/>
         <p:txBody>
           <a:bodyPr/>
-          <a:lstStyle>
-            <a:extLst/>
-          </a:lstStyle>
+          <a:lstStyle/>
           <a:p>
             <a:endParaRPr lang="en-US"/>
           </a:p>
@@ -1276,9 +1239,7 @@
         <p:spPr/>
         <p:txBody>
           <a:bodyPr/>
-          <a:lstStyle>
-            <a:extLst/>
-          </a:lstStyle>
+          <a:lstStyle/>
           <a:p>
             <a:fld id="{B6F15528-21DE-4FAA-801E-634DDDAF4B2B}" type="slidenum">
               <a:rPr lang="en-US" smtClean="0"/>
@@ -1336,9 +1297,7 @@
         </p:style>
         <p:txBody>
           <a:bodyPr anchor="ctr"/>
-          <a:lstStyle>
-            <a:extLst/>
-          </a:lstStyle>
+          <a:lstStyle/>
           <a:p>
             <a:pPr algn="ctr" eaLnBrk="1" latinLnBrk="0" hangingPunct="1"/>
             <a:endParaRPr kumimoji="0" lang="en-US"/>
@@ -1423,9 +1382,7 @@
         </p:style>
         <p:txBody>
           <a:bodyPr anchor="ctr"/>
-          <a:lstStyle>
-            <a:extLst/>
-          </a:lstStyle>
+          <a:lstStyle/>
           <a:p>
             <a:pPr algn="ctr" eaLnBrk="1" latinLnBrk="0" hangingPunct="1"/>
             <a:endParaRPr kumimoji="0" lang="en-US"/>
@@ -1474,9 +1431,7 @@
         </p:style>
         <p:txBody>
           <a:bodyPr anchor="ctr"/>
-          <a:lstStyle>
-            <a:extLst/>
-          </a:lstStyle>
+          <a:lstStyle/>
           <a:p>
             <a:pPr algn="ctr" eaLnBrk="1" latinLnBrk="0" hangingPunct="1"/>
             <a:endParaRPr kumimoji="0" lang="en-US"/>
@@ -1526,15 +1481,12 @@
         </p:spPr>
         <p:txBody>
           <a:bodyPr/>
-          <a:lstStyle>
-            <a:extLst/>
-          </a:lstStyle>
-          <a:p>
-            <a:r>
-              <a:rPr kumimoji="0" lang="en-US" smtClean="0"/>
+          <a:lstStyle/>
+          <a:p>
+            <a:r>
+              <a:rPr kumimoji="0" lang="en-US"/>
               <a:t>Click to edit Master title style</a:t>
             </a:r>
-            <a:endParaRPr kumimoji="0" lang="en-US"/>
           </a:p>
         </p:txBody>
       </p:sp>
@@ -1577,35 +1529,35 @@
           <a:p>
             <a:pPr lvl="0" eaLnBrk="1" latinLnBrk="0" hangingPunct="1"/>
             <a:r>
-              <a:rPr lang="en-US" smtClean="0"/>
+              <a:rPr lang="en-US"/>
               <a:t>Click to edit Master text styles</a:t>
             </a:r>
           </a:p>
           <a:p>
             <a:pPr lvl="1" eaLnBrk="1" latinLnBrk="0" hangingPunct="1"/>
             <a:r>
-              <a:rPr lang="en-US" smtClean="0"/>
+              <a:rPr lang="en-US"/>
               <a:t>Second level</a:t>
             </a:r>
           </a:p>
           <a:p>
             <a:pPr lvl="2" eaLnBrk="1" latinLnBrk="0" hangingPunct="1"/>
             <a:r>
-              <a:rPr lang="en-US" smtClean="0"/>
+              <a:rPr lang="en-US"/>
               <a:t>Third level</a:t>
             </a:r>
           </a:p>
           <a:p>
             <a:pPr lvl="3" eaLnBrk="1" latinLnBrk="0" hangingPunct="1"/>
             <a:r>
-              <a:rPr lang="en-US" smtClean="0"/>
+              <a:rPr lang="en-US"/>
               <a:t>Fourth level</a:t>
             </a:r>
           </a:p>
           <a:p>
             <a:pPr lvl="4" eaLnBrk="1" latinLnBrk="0" hangingPunct="1"/>
             <a:r>
-              <a:rPr lang="en-US" smtClean="0"/>
+              <a:rPr lang="en-US"/>
               <a:t>Fifth level</a:t>
             </a:r>
             <a:endParaRPr kumimoji="0" lang="en-US"/>
@@ -1651,35 +1603,35 @@
           <a:p>
             <a:pPr lvl="0" eaLnBrk="1" latinLnBrk="0" hangingPunct="1"/>
             <a:r>
-              <a:rPr lang="en-US" smtClean="0"/>
+              <a:rPr lang="en-US"/>
               <a:t>Click to edit Master text styles</a:t>
             </a:r>
           </a:p>
           <a:p>
             <a:pPr lvl="1" eaLnBrk="1" latinLnBrk="0" hangingPunct="1"/>
             <a:r>
-              <a:rPr lang="en-US" smtClean="0"/>
+              <a:rPr lang="en-US"/>
               <a:t>Second level</a:t>
             </a:r>
           </a:p>
           <a:p>
             <a:pPr lvl="2" eaLnBrk="1" latinLnBrk="0" hangingPunct="1"/>
             <a:r>
-              <a:rPr lang="en-US" smtClean="0"/>
+              <a:rPr lang="en-US"/>
               <a:t>Third level</a:t>
             </a:r>
           </a:p>
           <a:p>
             <a:pPr lvl="3" eaLnBrk="1" latinLnBrk="0" hangingPunct="1"/>
             <a:r>
-              <a:rPr lang="en-US" smtClean="0"/>
+              <a:rPr lang="en-US"/>
               <a:t>Fourth level</a:t>
             </a:r>
           </a:p>
           <a:p>
             <a:pPr lvl="4" eaLnBrk="1" latinLnBrk="0" hangingPunct="1"/>
             <a:r>
-              <a:rPr lang="en-US" smtClean="0"/>
+              <a:rPr lang="en-US"/>
               <a:t>Fifth level</a:t>
             </a:r>
             <a:endParaRPr kumimoji="0" lang="en-US"/>
@@ -1699,14 +1651,12 @@
         <p:spPr/>
         <p:txBody>
           <a:bodyPr/>
-          <a:lstStyle>
-            <a:extLst/>
-          </a:lstStyle>
+          <a:lstStyle/>
           <a:p>
             <a:fld id="{1D8BD707-D9CF-40AE-B4C6-C98DA3205C09}" type="datetimeFigureOut">
               <a:rPr lang="en-US" smtClean="0"/>
               <a:pPr/>
-              <a:t>8/25/2026</a:t>
+              <a:t>9/17/2026</a:t>
             </a:fld>
             <a:endParaRPr lang="en-US"/>
           </a:p>
@@ -1725,9 +1675,7 @@
         <p:spPr/>
         <p:txBody>
           <a:bodyPr/>
-          <a:lstStyle>
-            <a:extLst/>
-          </a:lstStyle>
+          <a:lstStyle/>
           <a:p>
             <a:endParaRPr lang="en-US"/>
           </a:p>
@@ -1746,9 +1694,7 @@
         <p:spPr/>
         <p:txBody>
           <a:bodyPr/>
-          <a:lstStyle>
-            <a:extLst/>
-          </a:lstStyle>
+          <a:lstStyle/>
           <a:p>
             <a:fld id="{B6F15528-21DE-4FAA-801E-634DDDAF4B2B}" type="slidenum">
               <a:rPr lang="en-US" smtClean="0"/>
@@ -1810,10 +1756,9 @@
           </a:lstStyle>
           <a:p>
             <a:r>
-              <a:rPr kumimoji="0" lang="en-US" smtClean="0"/>
+              <a:rPr kumimoji="0" lang="en-US"/>
               <a:t>Click to edit Master title style</a:t>
             </a:r>
-            <a:endParaRPr kumimoji="0" lang="en-US"/>
           </a:p>
         </p:txBody>
       </p:sp>
@@ -1880,7 +1825,7 @@
           <a:p>
             <a:pPr lvl="0" eaLnBrk="1" latinLnBrk="0" hangingPunct="1"/>
             <a:r>
-              <a:rPr kumimoji="0" lang="en-US" smtClean="0"/>
+              <a:rPr kumimoji="0" lang="en-US"/>
               <a:t>Click to edit Master text styles</a:t>
             </a:r>
           </a:p>
@@ -1949,7 +1894,7 @@
           <a:p>
             <a:pPr lvl="0" eaLnBrk="1" latinLnBrk="0" hangingPunct="1"/>
             <a:r>
-              <a:rPr kumimoji="0" lang="en-US" smtClean="0"/>
+              <a:rPr kumimoji="0" lang="en-US"/>
               <a:t>Click to edit Master text styles</a:t>
             </a:r>
           </a:p>
@@ -2031,35 +1976,35 @@
           <a:p>
             <a:pPr lvl="0" eaLnBrk="1" latinLnBrk="0" hangingPunct="1"/>
             <a:r>
-              <a:rPr lang="en-US" smtClean="0"/>
+              <a:rPr lang="en-US"/>
               <a:t>Click to edit Master text styles</a:t>
             </a:r>
           </a:p>
           <a:p>
             <a:pPr lvl="1" eaLnBrk="1" latinLnBrk="0" hangingPunct="1"/>
             <a:r>
-              <a:rPr lang="en-US" smtClean="0"/>
+              <a:rPr lang="en-US"/>
               <a:t>Second level</a:t>
             </a:r>
           </a:p>
           <a:p>
             <a:pPr lvl="2" eaLnBrk="1" latinLnBrk="0" hangingPunct="1"/>
             <a:r>
-              <a:rPr lang="en-US" smtClean="0"/>
+              <a:rPr lang="en-US"/>
               <a:t>Third level</a:t>
             </a:r>
           </a:p>
           <a:p>
             <a:pPr lvl="3" eaLnBrk="1" latinLnBrk="0" hangingPunct="1"/>
             <a:r>
-              <a:rPr lang="en-US" smtClean="0"/>
+              <a:rPr lang="en-US"/>
               <a:t>Fourth level</a:t>
             </a:r>
           </a:p>
           <a:p>
             <a:pPr lvl="4" eaLnBrk="1" latinLnBrk="0" hangingPunct="1"/>
             <a:r>
-              <a:rPr lang="en-US" smtClean="0"/>
+              <a:rPr lang="en-US"/>
               <a:t>Fifth level</a:t>
             </a:r>
             <a:endParaRPr kumimoji="0" lang="en-US"/>
@@ -2142,35 +2087,35 @@
           <a:p>
             <a:pPr lvl="0" eaLnBrk="1" latinLnBrk="0" hangingPunct="1"/>
             <a:r>
-              <a:rPr lang="en-US" smtClean="0"/>
+              <a:rPr lang="en-US"/>
               <a:t>Click to edit Master text styles</a:t>
             </a:r>
           </a:p>
           <a:p>
             <a:pPr lvl="1" eaLnBrk="1" latinLnBrk="0" hangingPunct="1"/>
             <a:r>
-              <a:rPr lang="en-US" smtClean="0"/>
+              <a:rPr lang="en-US"/>
               <a:t>Second level</a:t>
             </a:r>
           </a:p>
           <a:p>
             <a:pPr lvl="2" eaLnBrk="1" latinLnBrk="0" hangingPunct="1"/>
             <a:r>
-              <a:rPr lang="en-US" smtClean="0"/>
+              <a:rPr lang="en-US"/>
               <a:t>Third level</a:t>
             </a:r>
           </a:p>
           <a:p>
             <a:pPr lvl="3" eaLnBrk="1" latinLnBrk="0" hangingPunct="1"/>
             <a:r>
-              <a:rPr lang="en-US" smtClean="0"/>
+              <a:rPr lang="en-US"/>
               <a:t>Fourth level</a:t>
             </a:r>
           </a:p>
           <a:p>
             <a:pPr lvl="4" eaLnBrk="1" latinLnBrk="0" hangingPunct="1"/>
             <a:r>
-              <a:rPr lang="en-US" smtClean="0"/>
+              <a:rPr lang="en-US"/>
               <a:t>Fifth level</a:t>
             </a:r>
             <a:endParaRPr kumimoji="0" lang="en-US"/>
@@ -2190,14 +2135,12 @@
         <p:spPr/>
         <p:txBody>
           <a:bodyPr/>
-          <a:lstStyle>
-            <a:extLst/>
-          </a:lstStyle>
+          <a:lstStyle/>
           <a:p>
             <a:fld id="{1D8BD707-D9CF-40AE-B4C6-C98DA3205C09}" type="datetimeFigureOut">
               <a:rPr lang="en-US" smtClean="0"/>
               <a:pPr/>
-              <a:t>8/25/2026</a:t>
+              <a:t>9/17/2026</a:t>
             </a:fld>
             <a:endParaRPr lang="en-US"/>
           </a:p>
@@ -2216,9 +2159,7 @@
         <p:spPr/>
         <p:txBody>
           <a:bodyPr/>
-          <a:lstStyle>
-            <a:extLst/>
-          </a:lstStyle>
+          <a:lstStyle/>
           <a:p>
             <a:endParaRPr lang="en-US"/>
           </a:p>
@@ -2237,9 +2178,7 @@
         <p:spPr/>
         <p:txBody>
           <a:bodyPr/>
-          <a:lstStyle>
-            <a:extLst/>
-          </a:lstStyle>
+          <a:lstStyle/>
           <a:p>
             <a:fld id="{B6F15528-21DE-4FAA-801E-634DDDAF4B2B}" type="slidenum">
               <a:rPr lang="en-US" smtClean="0"/>
@@ -2293,15 +2232,12 @@
         </p:spPr>
         <p:txBody>
           <a:bodyPr anchor="ctr"/>
-          <a:lstStyle>
-            <a:extLst/>
-          </a:lstStyle>
-          <a:p>
-            <a:r>
-              <a:rPr kumimoji="0" lang="en-US" smtClean="0"/>
+          <a:lstStyle/>
+          <a:p>
+            <a:r>
+              <a:rPr kumimoji="0" lang="en-US"/>
               <a:t>Click to edit Master title style</a:t>
             </a:r>
-            <a:endParaRPr kumimoji="0" lang="en-US"/>
           </a:p>
         </p:txBody>
       </p:sp>
@@ -2318,14 +2254,12 @@
         <p:spPr/>
         <p:txBody>
           <a:bodyPr/>
-          <a:lstStyle>
-            <a:extLst/>
-          </a:lstStyle>
+          <a:lstStyle/>
           <a:p>
             <a:fld id="{1D8BD707-D9CF-40AE-B4C6-C98DA3205C09}" type="datetimeFigureOut">
               <a:rPr lang="en-US" smtClean="0"/>
               <a:pPr/>
-              <a:t>8/25/2026</a:t>
+              <a:t>9/17/2026</a:t>
             </a:fld>
             <a:endParaRPr lang="en-US"/>
           </a:p>
@@ -2344,9 +2278,7 @@
         <p:spPr/>
         <p:txBody>
           <a:bodyPr/>
-          <a:lstStyle>
-            <a:extLst/>
-          </a:lstStyle>
+          <a:lstStyle/>
           <a:p>
             <a:endParaRPr lang="en-US"/>
           </a:p>
@@ -2365,9 +2297,7 @@
         <p:spPr/>
         <p:txBody>
           <a:bodyPr/>
-          <a:lstStyle>
-            <a:extLst/>
-          </a:lstStyle>
+          <a:lstStyle/>
           <a:p>
             <a:fld id="{B6F15528-21DE-4FAA-801E-634DDDAF4B2B}" type="slidenum">
               <a:rPr lang="en-US" smtClean="0"/>
@@ -2442,9 +2372,7 @@
         </p:style>
         <p:txBody>
           <a:bodyPr anchor="ctr"/>
-          <a:lstStyle>
-            <a:extLst/>
-          </a:lstStyle>
+          <a:lstStyle/>
           <a:p>
             <a:pPr algn="ctr" eaLnBrk="1" latinLnBrk="0" hangingPunct="1"/>
             <a:endParaRPr kumimoji="0" lang="en-US"/>
@@ -2464,14 +2392,12 @@
         <p:spPr/>
         <p:txBody>
           <a:bodyPr/>
-          <a:lstStyle>
-            <a:extLst/>
-          </a:lstStyle>
+          <a:lstStyle/>
           <a:p>
             <a:fld id="{1D8BD707-D9CF-40AE-B4C6-C98DA3205C09}" type="datetimeFigureOut">
               <a:rPr lang="en-US" smtClean="0"/>
               <a:pPr/>
-              <a:t>8/25/2026</a:t>
+              <a:t>9/17/2026</a:t>
             </a:fld>
             <a:endParaRPr lang="en-US"/>
           </a:p>
@@ -2490,9 +2416,7 @@
         <p:spPr/>
         <p:txBody>
           <a:bodyPr/>
-          <a:lstStyle>
-            <a:extLst/>
-          </a:lstStyle>
+          <a:lstStyle/>
           <a:p>
             <a:endParaRPr lang="en-US"/>
           </a:p>
@@ -2511,9 +2435,7 @@
         <p:spPr/>
         <p:txBody>
           <a:bodyPr/>
-          <a:lstStyle>
-            <a:extLst/>
-          </a:lstStyle>
+          <a:lstStyle/>
           <a:p>
             <a:fld id="{B6F15528-21DE-4FAA-801E-634DDDAF4B2B}" type="slidenum">
               <a:rPr lang="en-US" smtClean="0"/>
@@ -2571,9 +2493,7 @@
         </p:style>
         <p:txBody>
           <a:bodyPr anchor="ctr"/>
-          <a:lstStyle>
-            <a:extLst/>
-          </a:lstStyle>
+          <a:lstStyle/>
           <a:p>
             <a:pPr algn="ctr" eaLnBrk="1" latinLnBrk="0" hangingPunct="1"/>
             <a:endParaRPr kumimoji="0" lang="en-US"/>
@@ -2638,10 +2558,9 @@
           </a:lstStyle>
           <a:p>
             <a:r>
-              <a:rPr kumimoji="0" lang="en-US" smtClean="0"/>
+              <a:rPr kumimoji="0" lang="en-US"/>
               <a:t>Click to edit Master title style</a:t>
             </a:r>
-            <a:endParaRPr kumimoji="0" lang="en-US"/>
           </a:p>
         </p:txBody>
       </p:sp>
@@ -2695,7 +2614,7 @@
           <a:p>
             <a:pPr lvl="0" eaLnBrk="1" latinLnBrk="0" hangingPunct="1"/>
             <a:r>
-              <a:rPr kumimoji="0" lang="en-US" smtClean="0"/>
+              <a:rPr kumimoji="0" lang="en-US"/>
               <a:t>Click to edit Master text styles</a:t>
             </a:r>
           </a:p>
@@ -2740,35 +2659,35 @@
           <a:p>
             <a:pPr lvl="0" eaLnBrk="1" latinLnBrk="0" hangingPunct="1"/>
             <a:r>
-              <a:rPr lang="en-US" smtClean="0"/>
+              <a:rPr lang="en-US"/>
               <a:t>Click to edit Master text styles</a:t>
             </a:r>
           </a:p>
           <a:p>
             <a:pPr lvl="1" eaLnBrk="1" latinLnBrk="0" hangingPunct="1"/>
             <a:r>
-              <a:rPr lang="en-US" smtClean="0"/>
+              <a:rPr lang="en-US"/>
               <a:t>Second level</a:t>
             </a:r>
           </a:p>
           <a:p>
             <a:pPr lvl="2" eaLnBrk="1" latinLnBrk="0" hangingPunct="1"/>
             <a:r>
-              <a:rPr lang="en-US" smtClean="0"/>
+              <a:rPr lang="en-US"/>
               <a:t>Third level</a:t>
             </a:r>
           </a:p>
           <a:p>
             <a:pPr lvl="3" eaLnBrk="1" latinLnBrk="0" hangingPunct="1"/>
             <a:r>
-              <a:rPr lang="en-US" smtClean="0"/>
+              <a:rPr lang="en-US"/>
               <a:t>Fourth level</a:t>
             </a:r>
           </a:p>
           <a:p>
             <a:pPr lvl="4" eaLnBrk="1" latinLnBrk="0" hangingPunct="1"/>
             <a:r>
-              <a:rPr lang="en-US" smtClean="0"/>
+              <a:rPr lang="en-US"/>
               <a:t>Fifth level</a:t>
             </a:r>
             <a:endParaRPr kumimoji="0" lang="en-US"/>
@@ -2788,14 +2707,12 @@
         <p:spPr/>
         <p:txBody>
           <a:bodyPr/>
-          <a:lstStyle>
-            <a:extLst/>
-          </a:lstStyle>
+          <a:lstStyle/>
           <a:p>
             <a:fld id="{1D8BD707-D9CF-40AE-B4C6-C98DA3205C09}" type="datetimeFigureOut">
               <a:rPr lang="en-US" smtClean="0"/>
               <a:pPr/>
-              <a:t>8/25/2026</a:t>
+              <a:t>9/17/2026</a:t>
             </a:fld>
             <a:endParaRPr lang="en-US"/>
           </a:p>
@@ -2814,9 +2731,7 @@
         <p:spPr/>
         <p:txBody>
           <a:bodyPr/>
-          <a:lstStyle>
-            <a:extLst/>
-          </a:lstStyle>
+          <a:lstStyle/>
           <a:p>
             <a:endParaRPr lang="en-US"/>
           </a:p>
@@ -2835,9 +2750,7 @@
         <p:spPr/>
         <p:txBody>
           <a:bodyPr/>
-          <a:lstStyle>
-            <a:extLst/>
-          </a:lstStyle>
+          <a:lstStyle/>
           <a:p>
             <a:fld id="{B6F15528-21DE-4FAA-801E-634DDDAF4B2B}" type="slidenum">
               <a:rPr lang="en-US" smtClean="0"/>
@@ -2904,10 +2817,9 @@
           </a:lstStyle>
           <a:p>
             <a:r>
-              <a:rPr kumimoji="0" lang="en-US" smtClean="0"/>
+              <a:rPr kumimoji="0" lang="en-US"/>
               <a:t>Click to edit Master title style</a:t>
             </a:r>
-            <a:endParaRPr kumimoji="0" lang="en-US"/>
           </a:p>
         </p:txBody>
       </p:sp>
@@ -2924,14 +2836,12 @@
         <p:spPr/>
         <p:txBody>
           <a:bodyPr/>
-          <a:lstStyle>
-            <a:extLst/>
-          </a:lstStyle>
+          <a:lstStyle/>
           <a:p>
             <a:fld id="{1D8BD707-D9CF-40AE-B4C6-C98DA3205C09}" type="datetimeFigureOut">
               <a:rPr lang="en-US" smtClean="0"/>
               <a:pPr/>
-              <a:t>8/25/2026</a:t>
+              <a:t>9/17/2026</a:t>
             </a:fld>
             <a:endParaRPr lang="en-US"/>
           </a:p>
@@ -2950,9 +2860,7 @@
         <p:spPr/>
         <p:txBody>
           <a:bodyPr/>
-          <a:lstStyle>
-            <a:extLst/>
-          </a:lstStyle>
+          <a:lstStyle/>
           <a:p>
             <a:endParaRPr lang="en-US"/>
           </a:p>
@@ -2971,9 +2879,7 @@
         <p:spPr/>
         <p:txBody>
           <a:bodyPr/>
-          <a:lstStyle>
-            <a:extLst/>
-          </a:lstStyle>
+          <a:lstStyle/>
           <a:p>
             <a:fld id="{B6F15528-21DE-4FAA-801E-634DDDAF4B2B}" type="slidenum">
               <a:rPr lang="en-US" smtClean="0"/>
@@ -3031,9 +2937,7 @@
           <a:bodyPr lIns="91440" tIns="274320" rtlCol="0" anchor="t">
             <a:normAutofit/>
           </a:bodyPr>
-          <a:lstStyle>
-            <a:extLst/>
-          </a:lstStyle>
+          <a:lstStyle/>
           <a:p>
             <a:pPr marL="0" indent="-283464" algn="l" rtl="0" eaLnBrk="1" latinLnBrk="0" hangingPunct="1">
               <a:lnSpc>
@@ -3101,7 +3005,7 @@
           <a:p>
             <a:pPr marL="0" algn="l" eaLnBrk="1" latinLnBrk="0" hangingPunct="1"/>
             <a:r>
-              <a:rPr kumimoji="0" lang="en-US" smtClean="0"/>
+              <a:rPr kumimoji="0" lang="en-US"/>
               <a:t>Click icon to add picture</a:t>
             </a:r>
             <a:endParaRPr kumimoji="0" lang="en-US" dirty="0"/>
@@ -3161,9 +3065,7 @@
         </p:style>
         <p:txBody>
           <a:bodyPr anchor="ctr"/>
-          <a:lstStyle>
-            <a:extLst/>
-          </a:lstStyle>
+          <a:lstStyle/>
           <a:p>
             <a:pPr algn="ctr" eaLnBrk="1" latinLnBrk="0" hangingPunct="1"/>
             <a:endParaRPr kumimoji="0" lang="en-US"/>
@@ -3221,9 +3123,7 @@
         </p:style>
         <p:txBody>
           <a:bodyPr anchor="ctr"/>
-          <a:lstStyle>
-            <a:extLst/>
-          </a:lstStyle>
+          <a:lstStyle/>
           <a:p>
             <a:pPr algn="ctr" eaLnBrk="1" latinLnBrk="0" hangingPunct="1"/>
             <a:endParaRPr kumimoji="0" lang="en-US" dirty="0"/>
@@ -3280,7 +3180,7 @@
           <a:p>
             <a:pPr lvl="0" eaLnBrk="1" latinLnBrk="0" hangingPunct="1"/>
             <a:r>
-              <a:rPr kumimoji="0" lang="en-US" smtClean="0"/>
+              <a:rPr kumimoji="0" lang="en-US"/>
               <a:t>Click to edit Master text styles</a:t>
             </a:r>
           </a:p>
@@ -3368,9 +3268,7 @@
         </p:style>
         <p:txBody>
           <a:bodyPr anchor="ctr"/>
-          <a:lstStyle>
-            <a:extLst/>
-          </a:lstStyle>
+          <a:lstStyle/>
           <a:p>
             <a:pPr algn="ctr" eaLnBrk="1" latinLnBrk="0" hangingPunct="1"/>
             <a:endParaRPr kumimoji="0" lang="en-US"/>
@@ -3428,9 +3326,7 @@
         </p:style>
         <p:txBody>
           <a:bodyPr anchor="ctr"/>
-          <a:lstStyle>
-            <a:extLst/>
-          </a:lstStyle>
+          <a:lstStyle/>
           <a:p>
             <a:pPr algn="ctr" eaLnBrk="1" latinLnBrk="0" hangingPunct="1"/>
             <a:endParaRPr kumimoji="0" lang="en-US"/>
@@ -3520,9 +3416,7 @@
         </p:style>
         <p:txBody>
           <a:bodyPr anchor="ctr"/>
-          <a:lstStyle>
-            <a:extLst/>
-          </a:lstStyle>
+          <a:lstStyle/>
           <a:p>
             <a:pPr algn="ctr" eaLnBrk="1" latinLnBrk="0" hangingPunct="1"/>
             <a:endParaRPr kumimoji="0" lang="en-US"/>
@@ -3568,9 +3462,7 @@
         </p:style>
         <p:txBody>
           <a:bodyPr anchor="ctr"/>
-          <a:lstStyle>
-            <a:extLst/>
-          </a:lstStyle>
+          <a:lstStyle/>
           <a:p>
             <a:pPr algn="ctr" eaLnBrk="1" latinLnBrk="0" hangingPunct="1"/>
             <a:endParaRPr kumimoji="0" lang="en-US"/>
@@ -3600,15 +3492,12 @@
           <a:bodyPr anchor="ctr">
             <a:normAutofit/>
           </a:bodyPr>
-          <a:lstStyle>
-            <a:extLst/>
-          </a:lstStyle>
-          <a:p>
-            <a:r>
-              <a:rPr kumimoji="0" lang="en-US" smtClean="0"/>
+          <a:lstStyle/>
+          <a:p>
+            <a:r>
+              <a:rPr kumimoji="0" lang="en-US"/>
               <a:t>Click to edit Master title style</a:t>
             </a:r>
-            <a:endParaRPr kumimoji="0" lang="en-US"/>
           </a:p>
         </p:txBody>
       </p:sp>
@@ -3635,44 +3524,41 @@
           <a:bodyPr>
             <a:normAutofit/>
           </a:bodyPr>
-          <a:lstStyle>
-            <a:extLst/>
-          </a:lstStyle>
+          <a:lstStyle/>
           <a:p>
             <a:pPr lvl="0" eaLnBrk="1" latinLnBrk="0" hangingPunct="1"/>
             <a:r>
-              <a:rPr kumimoji="0" lang="en-US" smtClean="0"/>
+              <a:rPr kumimoji="0" lang="en-US"/>
               <a:t>Click to edit Master text styles</a:t>
             </a:r>
           </a:p>
           <a:p>
             <a:pPr lvl="1" eaLnBrk="1" latinLnBrk="0" hangingPunct="1"/>
             <a:r>
-              <a:rPr kumimoji="0" lang="en-US" smtClean="0"/>
+              <a:rPr kumimoji="0" lang="en-US"/>
               <a:t>Second level</a:t>
             </a:r>
           </a:p>
           <a:p>
             <a:pPr lvl="2" eaLnBrk="1" latinLnBrk="0" hangingPunct="1"/>
             <a:r>
-              <a:rPr kumimoji="0" lang="en-US" smtClean="0"/>
+              <a:rPr kumimoji="0" lang="en-US"/>
               <a:t>Third level</a:t>
             </a:r>
           </a:p>
           <a:p>
             <a:pPr lvl="3" eaLnBrk="1" latinLnBrk="0" hangingPunct="1"/>
             <a:r>
-              <a:rPr kumimoji="0" lang="en-US" smtClean="0"/>
+              <a:rPr kumimoji="0" lang="en-US"/>
               <a:t>Fourth level</a:t>
             </a:r>
           </a:p>
           <a:p>
             <a:pPr lvl="4" eaLnBrk="1" latinLnBrk="0" hangingPunct="1"/>
             <a:r>
-              <a:rPr kumimoji="0" lang="en-US" smtClean="0"/>
+              <a:rPr kumimoji="0" lang="en-US"/>
               <a:t>Fifth level</a:t>
             </a:r>
-            <a:endParaRPr kumimoji="0" lang="en-US"/>
           </a:p>
         </p:txBody>
       </p:sp>
@@ -3714,7 +3600,7 @@
             <a:fld id="{1D8BD707-D9CF-40AE-B4C6-C98DA3205C09}" type="datetimeFigureOut">
               <a:rPr lang="en-US" smtClean="0"/>
               <a:pPr/>
-              <a:t>8/25/2026</a:t>
+              <a:t>9/17/2026</a:t>
             </a:fld>
             <a:endParaRPr lang="en-US"/>
           </a:p>
@@ -3852,9 +3738,7 @@
         </p:style>
         <p:txBody>
           <a:bodyPr anchor="ctr"/>
-          <a:lstStyle>
-            <a:extLst/>
-          </a:lstStyle>
+          <a:lstStyle/>
           <a:p>
             <a:pPr algn="ctr" eaLnBrk="1" latinLnBrk="0" hangingPunct="1"/>
             <a:endParaRPr kumimoji="0" lang="en-US"/>
@@ -4229,18 +4113,13 @@
           <a:lstStyle/>
           <a:p>
             <a:r>
-              <a:rPr lang="en-US" sz="2800" b="1" u="sng" dirty="0" smtClean="0">
+              <a:rPr lang="en-US" sz="2800" b="1" u="sng" dirty="0">
                 <a:effectLst/>
                 <a:latin typeface="Times New Roman" pitchFamily="18" charset="0"/>
                 <a:cs typeface="Times New Roman" pitchFamily="18" charset="0"/>
               </a:rPr>
               <a:t>Session: LLM Landscape — GPT, Claude, Gemini, DeepSeek, Llama &amp; Qwen</a:t>
             </a:r>
-            <a:endParaRPr lang="en-US" sz="2800" b="1" u="sng" dirty="0">
-              <a:effectLst/>
-              <a:latin typeface="Times New Roman" pitchFamily="18" charset="0"/>
-              <a:cs typeface="Times New Roman" pitchFamily="18" charset="0"/>
-            </a:endParaRPr>
           </a:p>
         </p:txBody>
       </p:sp>
@@ -4267,36 +4146,28 @@
           <a:lstStyle/>
           <a:p>
             <a:r>
-              <a:rPr lang="en-US" sz="2400" b="1" dirty="0" smtClean="0">
+              <a:rPr lang="en-US" sz="2400" b="1" dirty="0">
                 <a:latin typeface="Times New Roman" pitchFamily="18" charset="0"/>
                 <a:cs typeface="Times New Roman" pitchFamily="18" charset="0"/>
               </a:rPr>
               <a:t>Focus: </a:t>
             </a:r>
-            <a:endParaRPr lang="en-US" sz="2400" b="1" dirty="0" smtClean="0">
-              <a:latin typeface="Times New Roman" pitchFamily="18" charset="0"/>
-              <a:cs typeface="Times New Roman" pitchFamily="18" charset="0"/>
-            </a:endParaRPr>
-          </a:p>
-          <a:p>
-            <a:r>
-              <a:rPr lang="en-US" sz="2400" b="1" smtClean="0">
+          </a:p>
+          <a:p>
+            <a:r>
+              <a:rPr lang="en-US" sz="2400" b="1">
                 <a:latin typeface="Times New Roman" pitchFamily="18" charset="0"/>
                 <a:cs typeface="Times New Roman" pitchFamily="18" charset="0"/>
               </a:rPr>
               <a:t>Understand </a:t>
             </a:r>
             <a:r>
-              <a:rPr lang="en-US" sz="2400" b="1" dirty="0" smtClean="0">
+              <a:rPr lang="en-US" sz="2400" b="1" dirty="0">
                 <a:latin typeface="Times New Roman" pitchFamily="18" charset="0"/>
                 <a:cs typeface="Times New Roman" pitchFamily="18" charset="0"/>
               </a:rPr>
               <a:t>the LLM ecosystem + compare models + practical exploration + high-temperature generation</a:t>
             </a:r>
-            <a:endParaRPr lang="en-US" sz="2400" b="1" dirty="0">
-              <a:latin typeface="Times New Roman" pitchFamily="18" charset="0"/>
-              <a:cs typeface="Times New Roman" pitchFamily="18" charset="0"/>
-            </a:endParaRPr>
           </a:p>
         </p:txBody>
       </p:sp>
@@ -4351,7 +4222,7 @@
               <a:buNone/>
             </a:pPr>
             <a:r>
-              <a:rPr lang="en-US" sz="2400" b="1" dirty="0" smtClean="0">
+              <a:rPr lang="en-US" sz="2400" b="1" dirty="0">
                 <a:latin typeface="Times New Roman" pitchFamily="18" charset="0"/>
                 <a:cs typeface="Times New Roman" pitchFamily="18" charset="0"/>
               </a:rPr>
@@ -4363,7 +4234,7 @@
               <a:buNone/>
             </a:pPr>
             <a:r>
-              <a:rPr lang="en-US" sz="2400" dirty="0" smtClean="0">
+              <a:rPr lang="en-US" sz="2400" dirty="0">
                 <a:latin typeface="Times New Roman" pitchFamily="18" charset="0"/>
                 <a:cs typeface="Times New Roman" pitchFamily="18" charset="0"/>
               </a:rPr>
@@ -4375,7 +4246,7 @@
               <a:buNone/>
             </a:pPr>
             <a:r>
-              <a:rPr lang="en-US" sz="2400" b="1" dirty="0" smtClean="0">
+              <a:rPr lang="en-US" sz="2400" b="1" dirty="0">
                 <a:latin typeface="Times New Roman" pitchFamily="18" charset="0"/>
                 <a:cs typeface="Times New Roman" pitchFamily="18" charset="0"/>
               </a:rPr>
@@ -4387,21 +4258,21 @@
               <a:buNone/>
             </a:pPr>
             <a:r>
-              <a:rPr lang="en-US" sz="2400" dirty="0" smtClean="0">
+              <a:rPr lang="en-US" sz="2400" dirty="0">
                 <a:latin typeface="Times New Roman" pitchFamily="18" charset="0"/>
                 <a:cs typeface="Times New Roman" pitchFamily="18" charset="0"/>
               </a:rPr>
               <a:t>Associated with </a:t>
             </a:r>
             <a:r>
-              <a:rPr lang="en-US" sz="2400" dirty="0" err="1" smtClean="0">
+              <a:rPr lang="en-US" sz="2400" dirty="0" err="1">
                 <a:latin typeface="Times New Roman" pitchFamily="18" charset="0"/>
                 <a:cs typeface="Times New Roman" pitchFamily="18" charset="0"/>
               </a:rPr>
               <a:t>Alibaba</a:t>
             </a:r>
             <a:r>
-              <a:rPr lang="en-US" sz="2400" dirty="0" smtClean="0">
+              <a:rPr lang="en-US" sz="2400" dirty="0">
                 <a:latin typeface="Times New Roman" pitchFamily="18" charset="0"/>
                 <a:cs typeface="Times New Roman" pitchFamily="18" charset="0"/>
               </a:rPr>
@@ -4412,52 +4283,48 @@
             <a:pPr>
               <a:buNone/>
             </a:pPr>
-            <a:endParaRPr lang="en-US" sz="2400" dirty="0" smtClean="0">
-              <a:latin typeface="Times New Roman" pitchFamily="18" charset="0"/>
-              <a:cs typeface="Times New Roman" pitchFamily="18" charset="0"/>
-            </a:endParaRPr>
-          </a:p>
-          <a:p>
-            <a:pPr>
-              <a:buNone/>
-            </a:pPr>
-            <a:r>
-              <a:rPr lang="en-US" sz="2400" b="1" dirty="0" smtClean="0">
-                <a:latin typeface="Times New Roman" pitchFamily="18" charset="0"/>
-                <a:cs typeface="Times New Roman" pitchFamily="18" charset="0"/>
-              </a:rPr>
-              <a:t>Important</a:t>
-            </a:r>
-          </a:p>
-          <a:p>
-            <a:pPr>
-              <a:buNone/>
-            </a:pPr>
-            <a:r>
-              <a:rPr lang="en-US" sz="2400" dirty="0" smtClean="0">
-                <a:latin typeface="Times New Roman" pitchFamily="18" charset="0"/>
-                <a:cs typeface="Times New Roman" pitchFamily="18" charset="0"/>
-              </a:rPr>
-              <a:t>Model families contain </a:t>
-            </a:r>
-            <a:r>
-              <a:rPr lang="en-US" sz="2400" b="1" dirty="0" smtClean="0">
-                <a:latin typeface="Times New Roman" pitchFamily="18" charset="0"/>
-                <a:cs typeface="Times New Roman" pitchFamily="18" charset="0"/>
-              </a:rPr>
-              <a:t>multiple versions and sizes</a:t>
-            </a:r>
-            <a:r>
-              <a:rPr lang="en-US" sz="2400" dirty="0" smtClean="0">
-                <a:latin typeface="Times New Roman" pitchFamily="18" charset="0"/>
-                <a:cs typeface="Times New Roman" pitchFamily="18" charset="0"/>
-              </a:rPr>
-              <a:t>. Don't think of "GPT" or "Llama" as one single model.</a:t>
-            </a:r>
             <a:endParaRPr lang="en-US" sz="2400" dirty="0">
               <a:latin typeface="Times New Roman" pitchFamily="18" charset="0"/>
               <a:cs typeface="Times New Roman" pitchFamily="18" charset="0"/>
             </a:endParaRPr>
+          </a:p>
+          <a:p>
+            <a:pPr>
+              <a:buNone/>
+            </a:pPr>
+            <a:r>
+              <a:rPr lang="en-US" sz="2400" b="1" dirty="0">
+                <a:latin typeface="Times New Roman" pitchFamily="18" charset="0"/>
+                <a:cs typeface="Times New Roman" pitchFamily="18" charset="0"/>
+              </a:rPr>
+              <a:t>Important</a:t>
+            </a:r>
+          </a:p>
+          <a:p>
+            <a:pPr>
+              <a:buNone/>
+            </a:pPr>
+            <a:r>
+              <a:rPr lang="en-US" sz="2400" dirty="0">
+                <a:latin typeface="Times New Roman" pitchFamily="18" charset="0"/>
+                <a:cs typeface="Times New Roman" pitchFamily="18" charset="0"/>
+              </a:rPr>
+              <a:t>Model families contain </a:t>
+            </a:r>
+            <a:r>
+              <a:rPr lang="en-US" sz="2400" b="1" dirty="0">
+                <a:latin typeface="Times New Roman" pitchFamily="18" charset="0"/>
+                <a:cs typeface="Times New Roman" pitchFamily="18" charset="0"/>
+              </a:rPr>
+              <a:t>multiple versions and sizes</a:t>
+            </a:r>
+            <a:r>
+              <a:rPr lang="en-US" sz="2400" dirty="0">
+                <a:latin typeface="Times New Roman" pitchFamily="18" charset="0"/>
+                <a:cs typeface="Times New Roman" pitchFamily="18" charset="0"/>
+              </a:rPr>
+              <a:t>. Don't think of "GPT" or "Llama" as one single model.</a:t>
+            </a:r>
           </a:p>
         </p:txBody>
       </p:sp>
@@ -4512,7 +4379,7 @@
               <a:buNone/>
             </a:pPr>
             <a:r>
-              <a:rPr lang="en-US" sz="2800" b="1" u="sng" dirty="0" smtClean="0">
+              <a:rPr lang="en-US" sz="2800" b="1" u="sng" dirty="0">
                 <a:latin typeface="Times New Roman" pitchFamily="18" charset="0"/>
                 <a:cs typeface="Times New Roman" pitchFamily="18" charset="0"/>
               </a:rPr>
@@ -4524,7 +4391,7 @@
               <a:buNone/>
             </a:pPr>
             <a:r>
-              <a:rPr lang="en-US" sz="2800" b="1" u="sng" dirty="0" smtClean="0">
+              <a:rPr lang="en-US" sz="2800" b="1" u="sng" dirty="0">
                 <a:latin typeface="Times New Roman" pitchFamily="18" charset="0"/>
                 <a:cs typeface="Times New Roman" pitchFamily="18" charset="0"/>
               </a:rPr>
@@ -4536,7 +4403,7 @@
               <a:buNone/>
             </a:pPr>
             <a:r>
-              <a:rPr lang="en-US" sz="2400" b="1" dirty="0" smtClean="0">
+              <a:rPr lang="en-US" sz="2400" b="1" dirty="0">
                 <a:latin typeface="Times New Roman" pitchFamily="18" charset="0"/>
                 <a:cs typeface="Times New Roman" pitchFamily="18" charset="0"/>
               </a:rPr>
@@ -4545,7 +4412,7 @@
           </a:p>
           <a:p>
             <a:r>
-              <a:rPr lang="en-US" sz="2400" dirty="0" smtClean="0">
+              <a:rPr lang="en-US" sz="2400" dirty="0">
                 <a:latin typeface="Times New Roman" pitchFamily="18" charset="0"/>
                 <a:cs typeface="Times New Roman" pitchFamily="18" charset="0"/>
               </a:rPr>
@@ -4554,7 +4421,7 @@
           </a:p>
           <a:p>
             <a:r>
-              <a:rPr lang="en-US" sz="2400" dirty="0" smtClean="0">
+              <a:rPr lang="en-US" sz="2400" dirty="0">
                 <a:latin typeface="Times New Roman" pitchFamily="18" charset="0"/>
                 <a:cs typeface="Times New Roman" pitchFamily="18" charset="0"/>
               </a:rPr>
@@ -4563,7 +4430,7 @@
           </a:p>
           <a:p>
             <a:r>
-              <a:rPr lang="en-US" sz="2400" dirty="0" smtClean="0">
+              <a:rPr lang="en-US" sz="2400" dirty="0">
                 <a:latin typeface="Times New Roman" pitchFamily="18" charset="0"/>
                 <a:cs typeface="Times New Roman" pitchFamily="18" charset="0"/>
               </a:rPr>
@@ -4572,7 +4439,7 @@
           </a:p>
           <a:p>
             <a:r>
-              <a:rPr lang="en-US" sz="2400" dirty="0" smtClean="0">
+              <a:rPr lang="en-US" sz="2400" dirty="0">
                 <a:latin typeface="Times New Roman" pitchFamily="18" charset="0"/>
                 <a:cs typeface="Times New Roman" pitchFamily="18" charset="0"/>
               </a:rPr>
@@ -4581,7 +4448,7 @@
           </a:p>
           <a:p>
             <a:r>
-              <a:rPr lang="en-US" sz="2400" dirty="0" smtClean="0">
+              <a:rPr lang="en-US" sz="2400" dirty="0">
                 <a:latin typeface="Times New Roman" pitchFamily="18" charset="0"/>
                 <a:cs typeface="Times New Roman" pitchFamily="18" charset="0"/>
               </a:rPr>
@@ -4590,7 +4457,7 @@
           </a:p>
           <a:p>
             <a:r>
-              <a:rPr lang="en-US" sz="2400" dirty="0" smtClean="0">
+              <a:rPr lang="en-US" sz="2400" dirty="0">
                 <a:latin typeface="Times New Roman" pitchFamily="18" charset="0"/>
                 <a:cs typeface="Times New Roman" pitchFamily="18" charset="0"/>
               </a:rPr>
@@ -4601,7 +4468,7 @@
             <a:pPr>
               <a:buNone/>
             </a:pPr>
-            <a:endParaRPr lang="en-US" sz="2400" b="1" dirty="0" smtClean="0">
+            <a:endParaRPr lang="en-US" sz="2400" b="1" dirty="0">
               <a:latin typeface="Times New Roman" pitchFamily="18" charset="0"/>
               <a:cs typeface="Times New Roman" pitchFamily="18" charset="0"/>
             </a:endParaRPr>
@@ -4610,7 +4477,7 @@
             <a:pPr>
               <a:buNone/>
             </a:pPr>
-            <a:endParaRPr lang="en-US" sz="2400" b="1" dirty="0" smtClean="0">
+            <a:endParaRPr lang="en-US" sz="2400" b="1" dirty="0">
               <a:latin typeface="Times New Roman" pitchFamily="18" charset="0"/>
               <a:cs typeface="Times New Roman" pitchFamily="18" charset="0"/>
             </a:endParaRPr>
@@ -4620,7 +4487,7 @@
               <a:buNone/>
             </a:pPr>
             <a:r>
-              <a:rPr lang="en-US" sz="2400" b="1" dirty="0" smtClean="0">
+              <a:rPr lang="en-US" sz="2400" b="1" dirty="0">
                 <a:latin typeface="Times New Roman" pitchFamily="18" charset="0"/>
                 <a:cs typeface="Times New Roman" pitchFamily="18" charset="0"/>
               </a:rPr>
@@ -4684,7 +4551,7 @@
               <a:buNone/>
             </a:pPr>
             <a:r>
-              <a:rPr lang="en-US" sz="2800" b="1" u="sng" dirty="0" smtClean="0">
+              <a:rPr lang="en-US" sz="2800" b="1" u="sng" dirty="0">
                 <a:latin typeface="Times New Roman" pitchFamily="18" charset="0"/>
                 <a:cs typeface="Times New Roman" pitchFamily="18" charset="0"/>
               </a:rPr>
@@ -4696,7 +4563,7 @@
               <a:buNone/>
             </a:pPr>
             <a:r>
-              <a:rPr lang="en-US" sz="2800" b="1" u="sng" dirty="0" smtClean="0">
+              <a:rPr lang="en-US" sz="2800" b="1" u="sng" dirty="0">
                 <a:latin typeface="Times New Roman" pitchFamily="18" charset="0"/>
                 <a:cs typeface="Times New Roman" pitchFamily="18" charset="0"/>
               </a:rPr>
@@ -4707,7 +4574,7 @@
             <a:pPr>
               <a:buNone/>
             </a:pPr>
-            <a:endParaRPr lang="en-US" sz="2800" b="1" u="sng" dirty="0" smtClean="0">
+            <a:endParaRPr lang="en-US" sz="2800" b="1" u="sng" dirty="0">
               <a:latin typeface="Times New Roman" pitchFamily="18" charset="0"/>
               <a:cs typeface="Times New Roman" pitchFamily="18" charset="0"/>
             </a:endParaRPr>
@@ -4717,7 +4584,7 @@
               <a:buNone/>
             </a:pPr>
             <a:r>
-              <a:rPr lang="en-US" sz="2400" dirty="0" smtClean="0">
+              <a:rPr lang="en-US" sz="2400" dirty="0">
                 <a:latin typeface="Times New Roman" pitchFamily="18" charset="0"/>
                 <a:cs typeface="Times New Roman" pitchFamily="18" charset="0"/>
               </a:rPr>
@@ -4729,13 +4596,13 @@
               <a:buNone/>
             </a:pPr>
             <a:r>
-              <a:rPr lang="en-US" sz="2400" b="1" dirty="0" err="1" smtClean="0">
+              <a:rPr lang="en-US" sz="2400" b="1" dirty="0" err="1">
                 <a:latin typeface="Times New Roman" pitchFamily="18" charset="0"/>
                 <a:cs typeface="Times New Roman" pitchFamily="18" charset="0"/>
               </a:rPr>
               <a:t>Anthropic</a:t>
             </a:r>
-            <a:endParaRPr lang="en-US" sz="2400" dirty="0" smtClean="0">
+            <a:endParaRPr lang="en-US" sz="2400" dirty="0">
               <a:latin typeface="Times New Roman" pitchFamily="18" charset="0"/>
               <a:cs typeface="Times New Roman" pitchFamily="18" charset="0"/>
             </a:endParaRPr>
@@ -4745,7 +4612,7 @@
               <a:buNone/>
             </a:pPr>
             <a:r>
-              <a:rPr lang="en-US" sz="2400" dirty="0" smtClean="0">
+              <a:rPr lang="en-US" sz="2400" dirty="0">
                 <a:latin typeface="Times New Roman" pitchFamily="18" charset="0"/>
                 <a:cs typeface="Times New Roman" pitchFamily="18" charset="0"/>
               </a:rPr>
@@ -4754,7 +4621,7 @@
           </a:p>
           <a:p>
             <a:r>
-              <a:rPr lang="en-US" sz="2400" dirty="0" smtClean="0">
+              <a:rPr lang="en-US" sz="2400" dirty="0">
                 <a:latin typeface="Times New Roman" pitchFamily="18" charset="0"/>
                 <a:cs typeface="Times New Roman" pitchFamily="18" charset="0"/>
               </a:rPr>
@@ -4763,7 +4630,7 @@
           </a:p>
           <a:p>
             <a:r>
-              <a:rPr lang="en-US" sz="2400" dirty="0" smtClean="0">
+              <a:rPr lang="en-US" sz="2400" dirty="0">
                 <a:latin typeface="Times New Roman" pitchFamily="18" charset="0"/>
                 <a:cs typeface="Times New Roman" pitchFamily="18" charset="0"/>
               </a:rPr>
@@ -4772,7 +4639,7 @@
           </a:p>
           <a:p>
             <a:r>
-              <a:rPr lang="en-US" sz="2400" dirty="0" smtClean="0">
+              <a:rPr lang="en-US" sz="2400" dirty="0">
                 <a:latin typeface="Times New Roman" pitchFamily="18" charset="0"/>
                 <a:cs typeface="Times New Roman" pitchFamily="18" charset="0"/>
               </a:rPr>
@@ -4781,7 +4648,7 @@
           </a:p>
           <a:p>
             <a:r>
-              <a:rPr lang="en-US" sz="2400" dirty="0" smtClean="0">
+              <a:rPr lang="en-US" sz="2400" dirty="0">
                 <a:latin typeface="Times New Roman" pitchFamily="18" charset="0"/>
                 <a:cs typeface="Times New Roman" pitchFamily="18" charset="0"/>
               </a:rPr>
@@ -4790,7 +4657,7 @@
           </a:p>
           <a:p>
             <a:r>
-              <a:rPr lang="en-US" sz="2400" dirty="0" smtClean="0">
+              <a:rPr lang="en-US" sz="2400" dirty="0">
                 <a:latin typeface="Times New Roman" pitchFamily="18" charset="0"/>
                 <a:cs typeface="Times New Roman" pitchFamily="18" charset="0"/>
               </a:rPr>
@@ -4799,7 +4666,7 @@
           </a:p>
           <a:p>
             <a:r>
-              <a:rPr lang="en-US" sz="2400" dirty="0" smtClean="0">
+              <a:rPr lang="en-US" sz="2400" dirty="0">
                 <a:latin typeface="Times New Roman" pitchFamily="18" charset="0"/>
                 <a:cs typeface="Times New Roman" pitchFamily="18" charset="0"/>
               </a:rPr>
@@ -4859,7 +4726,7 @@
               <a:buNone/>
             </a:pPr>
             <a:r>
-              <a:rPr lang="en-US" sz="2400" b="1" dirty="0" smtClean="0">
+              <a:rPr lang="en-US" sz="2400" b="1" dirty="0">
                 <a:latin typeface="Times New Roman" pitchFamily="18" charset="0"/>
                 <a:cs typeface="Times New Roman" pitchFamily="18" charset="0"/>
               </a:rPr>
@@ -4870,7 +4737,7 @@
             <a:pPr>
               <a:buNone/>
             </a:pPr>
-            <a:endParaRPr lang="en-US" sz="2400" b="1" dirty="0" smtClean="0">
+            <a:endParaRPr lang="en-US" sz="2400" b="1" dirty="0">
               <a:latin typeface="Times New Roman" pitchFamily="18" charset="0"/>
               <a:cs typeface="Times New Roman" pitchFamily="18" charset="0"/>
             </a:endParaRPr>
@@ -4880,7 +4747,7 @@
               <a:buNone/>
             </a:pPr>
             <a:r>
-              <a:rPr lang="en-US" sz="2400" b="1" dirty="0" smtClean="0">
+              <a:rPr lang="en-US" sz="2400" b="1" dirty="0">
                 <a:latin typeface="Times New Roman" pitchFamily="18" charset="0"/>
                 <a:cs typeface="Times New Roman" pitchFamily="18" charset="0"/>
               </a:rPr>
@@ -4891,26 +4758,22 @@
             <a:pPr>
               <a:buNone/>
             </a:pPr>
-            <a:endParaRPr lang="en-US" sz="2400" dirty="0" smtClean="0">
-              <a:latin typeface="Times New Roman" pitchFamily="18" charset="0"/>
-              <a:cs typeface="Times New Roman" pitchFamily="18" charset="0"/>
-            </a:endParaRPr>
-          </a:p>
-          <a:p>
-            <a:pPr>
-              <a:buNone/>
-            </a:pPr>
-            <a:r>
-              <a:rPr lang="en-US" sz="2400" dirty="0" smtClean="0">
-                <a:latin typeface="Times New Roman" pitchFamily="18" charset="0"/>
-                <a:cs typeface="Times New Roman" pitchFamily="18" charset="0"/>
-              </a:rPr>
-              <a:t>Compare Claude's response with another model.</a:t>
-            </a:r>
             <a:endParaRPr lang="en-US" sz="2400" dirty="0">
               <a:latin typeface="Times New Roman" pitchFamily="18" charset="0"/>
               <a:cs typeface="Times New Roman" pitchFamily="18" charset="0"/>
             </a:endParaRPr>
+          </a:p>
+          <a:p>
+            <a:pPr>
+              <a:buNone/>
+            </a:pPr>
+            <a:r>
+              <a:rPr lang="en-US" sz="2400" dirty="0">
+                <a:latin typeface="Times New Roman" pitchFamily="18" charset="0"/>
+                <a:cs typeface="Times New Roman" pitchFamily="18" charset="0"/>
+              </a:rPr>
+              <a:t>Compare Claude's response with another model.</a:t>
+            </a:r>
           </a:p>
         </p:txBody>
       </p:sp>
@@ -4965,7 +4828,7 @@
               <a:buNone/>
             </a:pPr>
             <a:r>
-              <a:rPr lang="en-US" sz="3000" b="1" u="sng" dirty="0" smtClean="0">
+              <a:rPr lang="en-US" sz="3000" b="1" u="sng" dirty="0">
                 <a:latin typeface="Times New Roman" pitchFamily="18" charset="0"/>
                 <a:cs typeface="Times New Roman" pitchFamily="18" charset="0"/>
               </a:rPr>
@@ -4977,7 +4840,7 @@
               <a:buNone/>
             </a:pPr>
             <a:r>
-              <a:rPr lang="en-US" sz="3000" b="1" u="sng" dirty="0" smtClean="0">
+              <a:rPr lang="en-US" sz="3000" b="1" u="sng" dirty="0">
                 <a:latin typeface="Times New Roman" pitchFamily="18" charset="0"/>
                 <a:cs typeface="Times New Roman" pitchFamily="18" charset="0"/>
               </a:rPr>
@@ -4989,7 +4852,7 @@
               <a:buNone/>
             </a:pPr>
             <a:r>
-              <a:rPr lang="en-US" sz="2400" dirty="0" smtClean="0">
+              <a:rPr lang="en-US" sz="2400" dirty="0">
                 <a:latin typeface="Times New Roman" pitchFamily="18" charset="0"/>
                 <a:cs typeface="Times New Roman" pitchFamily="18" charset="0"/>
               </a:rPr>
@@ -5001,13 +4864,13 @@
               <a:buNone/>
             </a:pPr>
             <a:r>
-              <a:rPr lang="en-US" sz="2400" b="1" dirty="0" smtClean="0">
+              <a:rPr lang="en-US" sz="2400" b="1" dirty="0">
                 <a:latin typeface="Times New Roman" pitchFamily="18" charset="0"/>
                 <a:cs typeface="Times New Roman" pitchFamily="18" charset="0"/>
               </a:rPr>
               <a:t>Google</a:t>
             </a:r>
-            <a:endParaRPr lang="en-US" sz="2400" dirty="0" smtClean="0">
+            <a:endParaRPr lang="en-US" sz="2400" dirty="0">
               <a:latin typeface="Times New Roman" pitchFamily="18" charset="0"/>
               <a:cs typeface="Times New Roman" pitchFamily="18" charset="0"/>
             </a:endParaRPr>
@@ -5017,7 +4880,7 @@
               <a:buNone/>
             </a:pPr>
             <a:r>
-              <a:rPr lang="en-US" sz="2400" dirty="0" smtClean="0">
+              <a:rPr lang="en-US" sz="2400" dirty="0">
                 <a:latin typeface="Times New Roman" pitchFamily="18" charset="0"/>
                 <a:cs typeface="Times New Roman" pitchFamily="18" charset="0"/>
               </a:rPr>
@@ -5028,7 +4891,7 @@
             <a:pPr>
               <a:buNone/>
             </a:pPr>
-            <a:endParaRPr lang="en-US" sz="2400" dirty="0" smtClean="0">
+            <a:endParaRPr lang="en-US" sz="2400" dirty="0">
               <a:latin typeface="Times New Roman" pitchFamily="18" charset="0"/>
               <a:cs typeface="Times New Roman" pitchFamily="18" charset="0"/>
             </a:endParaRPr>
@@ -5038,7 +4901,7 @@
               <a:buNone/>
             </a:pPr>
             <a:r>
-              <a:rPr lang="en-US" sz="2400" dirty="0" smtClean="0">
+              <a:rPr lang="en-US" sz="2400" dirty="0">
                 <a:latin typeface="Times New Roman" pitchFamily="18" charset="0"/>
                 <a:cs typeface="Times New Roman" pitchFamily="18" charset="0"/>
               </a:rPr>
@@ -5047,7 +4910,7 @@
           </a:p>
           <a:p>
             <a:r>
-              <a:rPr lang="en-US" sz="2400" dirty="0" smtClean="0">
+              <a:rPr lang="en-US" sz="2400" dirty="0">
                 <a:latin typeface="Times New Roman" pitchFamily="18" charset="0"/>
                 <a:cs typeface="Times New Roman" pitchFamily="18" charset="0"/>
               </a:rPr>
@@ -5056,7 +4919,7 @@
           </a:p>
           <a:p>
             <a:r>
-              <a:rPr lang="en-US" sz="2400" dirty="0" smtClean="0">
+              <a:rPr lang="en-US" sz="2400" dirty="0">
                 <a:latin typeface="Times New Roman" pitchFamily="18" charset="0"/>
                 <a:cs typeface="Times New Roman" pitchFamily="18" charset="0"/>
               </a:rPr>
@@ -5065,7 +4928,7 @@
           </a:p>
           <a:p>
             <a:r>
-              <a:rPr lang="en-US" sz="2400" dirty="0" smtClean="0">
+              <a:rPr lang="en-US" sz="2400" dirty="0">
                 <a:latin typeface="Times New Roman" pitchFamily="18" charset="0"/>
                 <a:cs typeface="Times New Roman" pitchFamily="18" charset="0"/>
               </a:rPr>
@@ -5074,7 +4937,7 @@
           </a:p>
           <a:p>
             <a:r>
-              <a:rPr lang="en-US" sz="2400" dirty="0" smtClean="0">
+              <a:rPr lang="en-US" sz="2400" dirty="0">
                 <a:latin typeface="Times New Roman" pitchFamily="18" charset="0"/>
                 <a:cs typeface="Times New Roman" pitchFamily="18" charset="0"/>
               </a:rPr>
@@ -5083,7 +4946,7 @@
           </a:p>
           <a:p>
             <a:r>
-              <a:rPr lang="en-US" sz="2400" dirty="0" smtClean="0">
+              <a:rPr lang="en-US" sz="2400" dirty="0">
                 <a:latin typeface="Times New Roman" pitchFamily="18" charset="0"/>
                 <a:cs typeface="Times New Roman" pitchFamily="18" charset="0"/>
               </a:rPr>
@@ -5143,7 +5006,7 @@
               <a:buNone/>
             </a:pPr>
             <a:r>
-              <a:rPr lang="en-US" sz="2400" b="1" dirty="0" smtClean="0">
+              <a:rPr lang="en-US" sz="2400" b="1" dirty="0">
                 <a:latin typeface="Times New Roman" pitchFamily="18" charset="0"/>
                 <a:cs typeface="Times New Roman" pitchFamily="18" charset="0"/>
               </a:rPr>
@@ -5154,7 +5017,7 @@
             <a:pPr>
               <a:buNone/>
             </a:pPr>
-            <a:endParaRPr lang="en-US" sz="2400" b="1" dirty="0" smtClean="0">
+            <a:endParaRPr lang="en-US" sz="2400" b="1" dirty="0">
               <a:latin typeface="Times New Roman" pitchFamily="18" charset="0"/>
               <a:cs typeface="Times New Roman" pitchFamily="18" charset="0"/>
             </a:endParaRPr>
@@ -5164,7 +5027,7 @@
               <a:buNone/>
             </a:pPr>
             <a:r>
-              <a:rPr lang="en-US" sz="2400" b="1" dirty="0" smtClean="0">
+              <a:rPr lang="en-US" sz="2400" b="1" dirty="0">
                 <a:latin typeface="Times New Roman" pitchFamily="18" charset="0"/>
                 <a:cs typeface="Times New Roman" pitchFamily="18" charset="0"/>
               </a:rPr>
@@ -5175,26 +5038,22 @@
             <a:pPr>
               <a:buNone/>
             </a:pPr>
-            <a:endParaRPr lang="en-US" sz="2400" dirty="0" smtClean="0">
-              <a:latin typeface="Times New Roman" pitchFamily="18" charset="0"/>
-              <a:cs typeface="Times New Roman" pitchFamily="18" charset="0"/>
-            </a:endParaRPr>
-          </a:p>
-          <a:p>
-            <a:pPr>
-              <a:buNone/>
-            </a:pPr>
-            <a:r>
-              <a:rPr lang="en-US" sz="2400" dirty="0" smtClean="0">
-                <a:latin typeface="Times New Roman" pitchFamily="18" charset="0"/>
-                <a:cs typeface="Times New Roman" pitchFamily="18" charset="0"/>
-              </a:rPr>
-              <a:t>Discuss the answer.</a:t>
-            </a:r>
             <a:endParaRPr lang="en-US" sz="2400" dirty="0">
               <a:latin typeface="Times New Roman" pitchFamily="18" charset="0"/>
               <a:cs typeface="Times New Roman" pitchFamily="18" charset="0"/>
             </a:endParaRPr>
+          </a:p>
+          <a:p>
+            <a:pPr>
+              <a:buNone/>
+            </a:pPr>
+            <a:r>
+              <a:rPr lang="en-US" sz="2400" dirty="0">
+                <a:latin typeface="Times New Roman" pitchFamily="18" charset="0"/>
+                <a:cs typeface="Times New Roman" pitchFamily="18" charset="0"/>
+              </a:rPr>
+              <a:t>Discuss the answer.</a:t>
+            </a:r>
           </a:p>
         </p:txBody>
       </p:sp>
@@ -5249,7 +5108,7 @@
               <a:buNone/>
             </a:pPr>
             <a:r>
-              <a:rPr lang="en-US" sz="2800" b="1" u="sng" dirty="0" smtClean="0">
+              <a:rPr lang="en-US" sz="2800" b="1" u="sng" dirty="0">
                 <a:latin typeface="Times New Roman" pitchFamily="18" charset="0"/>
                 <a:cs typeface="Times New Roman" pitchFamily="18" charset="0"/>
               </a:rPr>
@@ -5261,7 +5120,7 @@
               <a:buNone/>
             </a:pPr>
             <a:r>
-              <a:rPr lang="en-US" sz="2800" b="1" u="sng" dirty="0" smtClean="0">
+              <a:rPr lang="en-US" sz="2800" b="1" u="sng" dirty="0">
                 <a:latin typeface="Times New Roman" pitchFamily="18" charset="0"/>
                 <a:cs typeface="Times New Roman" pitchFamily="18" charset="0"/>
               </a:rPr>
@@ -5272,7 +5131,7 @@
             <a:pPr>
               <a:buNone/>
             </a:pPr>
-            <a:endParaRPr lang="en-US" sz="2800" b="1" u="sng" dirty="0" smtClean="0">
+            <a:endParaRPr lang="en-US" sz="2800" b="1" u="sng" dirty="0">
               <a:latin typeface="Times New Roman" pitchFamily="18" charset="0"/>
               <a:cs typeface="Times New Roman" pitchFamily="18" charset="0"/>
             </a:endParaRPr>
@@ -5282,7 +5141,7 @@
               <a:buNone/>
             </a:pPr>
             <a:r>
-              <a:rPr lang="en-US" sz="2400" dirty="0" smtClean="0">
+              <a:rPr lang="en-US" sz="2400" dirty="0">
                 <a:latin typeface="Times New Roman" pitchFamily="18" charset="0"/>
                 <a:cs typeface="Times New Roman" pitchFamily="18" charset="0"/>
               </a:rPr>
@@ -5291,7 +5150,7 @@
           </a:p>
           <a:p>
             <a:r>
-              <a:rPr lang="en-US" sz="2400" dirty="0" smtClean="0">
+              <a:rPr lang="en-US" sz="2400" dirty="0">
                 <a:latin typeface="Times New Roman" pitchFamily="18" charset="0"/>
                 <a:cs typeface="Times New Roman" pitchFamily="18" charset="0"/>
               </a:rPr>
@@ -5300,7 +5159,7 @@
           </a:p>
           <a:p>
             <a:r>
-              <a:rPr lang="en-US" sz="2400" dirty="0" smtClean="0">
+              <a:rPr lang="en-US" sz="2400" dirty="0">
                 <a:latin typeface="Times New Roman" pitchFamily="18" charset="0"/>
                 <a:cs typeface="Times New Roman" pitchFamily="18" charset="0"/>
               </a:rPr>
@@ -5309,7 +5168,7 @@
           </a:p>
           <a:p>
             <a:r>
-              <a:rPr lang="en-US" sz="2400" dirty="0" smtClean="0">
+              <a:rPr lang="en-US" sz="2400" dirty="0">
                 <a:latin typeface="Times New Roman" pitchFamily="18" charset="0"/>
                 <a:cs typeface="Times New Roman" pitchFamily="18" charset="0"/>
               </a:rPr>
@@ -5369,7 +5228,7 @@
               <a:buNone/>
             </a:pPr>
             <a:r>
-              <a:rPr lang="en-US" sz="2400" b="1" dirty="0" smtClean="0">
+              <a:rPr lang="en-US" sz="2400" b="1" dirty="0">
                 <a:latin typeface="Times New Roman" pitchFamily="18" charset="0"/>
                 <a:cs typeface="Times New Roman" pitchFamily="18" charset="0"/>
               </a:rPr>
@@ -5380,7 +5239,7 @@
             <a:pPr>
               <a:buNone/>
             </a:pPr>
-            <a:endParaRPr lang="en-US" sz="2400" b="1" dirty="0" smtClean="0">
+            <a:endParaRPr lang="en-US" sz="2400" b="1" dirty="0">
               <a:latin typeface="Times New Roman" pitchFamily="18" charset="0"/>
               <a:cs typeface="Times New Roman" pitchFamily="18" charset="0"/>
             </a:endParaRPr>
@@ -5390,32 +5249,18 @@
               <a:buNone/>
             </a:pPr>
             <a:r>
-              <a:rPr lang="en-US" sz="2400" b="1" dirty="0" smtClean="0">
-                <a:latin typeface="Times New Roman" pitchFamily="18" charset="0"/>
-                <a:cs typeface="Times New Roman" pitchFamily="18" charset="0"/>
-              </a:rPr>
-              <a:t>"</a:t>
-            </a:r>
-            <a:r>
-              <a:rPr lang="en-US" sz="2400" b="1" dirty="0" smtClean="0">
-                <a:latin typeface="Times New Roman" pitchFamily="18" charset="0"/>
-                <a:cs typeface="Times New Roman" pitchFamily="18" charset="0"/>
-              </a:rPr>
-              <a:t>Write a Python program that checks whether a number is Armstrong number. Explain the logic</a:t>
-            </a:r>
-            <a:r>
-              <a:rPr lang="en-US" sz="2400" b="1" dirty="0" smtClean="0">
-                <a:latin typeface="Times New Roman" pitchFamily="18" charset="0"/>
-                <a:cs typeface="Times New Roman" pitchFamily="18" charset="0"/>
-              </a:rPr>
-              <a:t>.“</a:t>
-            </a:r>
-          </a:p>
-          <a:p>
-            <a:pPr>
-              <a:buNone/>
-            </a:pPr>
-            <a:endParaRPr lang="en-US" sz="2400" dirty="0" smtClean="0">
+              <a:rPr lang="en-US" sz="2400" b="1" dirty="0">
+                <a:latin typeface="Times New Roman" pitchFamily="18" charset="0"/>
+                <a:cs typeface="Times New Roman" pitchFamily="18" charset="0"/>
+              </a:rPr>
+              <a:t>"Write a Python program that checks whether a number is Armstrong number. Explain the logic.“</a:t>
+            </a:r>
+          </a:p>
+          <a:p>
+            <a:pPr>
+              <a:buNone/>
+            </a:pPr>
+            <a:endParaRPr lang="en-US" sz="2400" dirty="0">
               <a:latin typeface="Times New Roman" pitchFamily="18" charset="0"/>
               <a:cs typeface="Times New Roman" pitchFamily="18" charset="0"/>
             </a:endParaRPr>
@@ -5425,7 +5270,7 @@
               <a:buNone/>
             </a:pPr>
             <a:r>
-              <a:rPr lang="en-US" sz="2400" dirty="0" smtClean="0">
+              <a:rPr lang="en-US" sz="2400" dirty="0">
                 <a:latin typeface="Times New Roman" pitchFamily="18" charset="0"/>
                 <a:cs typeface="Times New Roman" pitchFamily="18" charset="0"/>
               </a:rPr>
@@ -5434,7 +5279,7 @@
           </a:p>
           <a:p>
             <a:r>
-              <a:rPr lang="en-US" sz="2400" dirty="0" smtClean="0">
+              <a:rPr lang="en-US" sz="2400" dirty="0">
                 <a:latin typeface="Times New Roman" pitchFamily="18" charset="0"/>
                 <a:cs typeface="Times New Roman" pitchFamily="18" charset="0"/>
               </a:rPr>
@@ -5443,7 +5288,7 @@
           </a:p>
           <a:p>
             <a:r>
-              <a:rPr lang="en-US" sz="2400" dirty="0" smtClean="0">
+              <a:rPr lang="en-US" sz="2400" dirty="0">
                 <a:latin typeface="Times New Roman" pitchFamily="18" charset="0"/>
                 <a:cs typeface="Times New Roman" pitchFamily="18" charset="0"/>
               </a:rPr>
@@ -5452,7 +5297,7 @@
           </a:p>
           <a:p>
             <a:r>
-              <a:rPr lang="en-US" sz="2400" dirty="0" smtClean="0">
+              <a:rPr lang="en-US" sz="2400" dirty="0">
                 <a:latin typeface="Times New Roman" pitchFamily="18" charset="0"/>
                 <a:cs typeface="Times New Roman" pitchFamily="18" charset="0"/>
               </a:rPr>
@@ -5461,7 +5306,7 @@
           </a:p>
           <a:p>
             <a:r>
-              <a:rPr lang="en-US" sz="2400" dirty="0" smtClean="0">
+              <a:rPr lang="en-US" sz="2400" dirty="0">
                 <a:latin typeface="Times New Roman" pitchFamily="18" charset="0"/>
                 <a:cs typeface="Times New Roman" pitchFamily="18" charset="0"/>
               </a:rPr>
@@ -5524,7 +5369,7 @@
               <a:buNone/>
             </a:pPr>
             <a:r>
-              <a:rPr lang="en-US" sz="2800" b="1" u="sng" dirty="0" smtClean="0">
+              <a:rPr lang="en-US" sz="2800" b="1" u="sng" dirty="0">
                 <a:latin typeface="Times New Roman" pitchFamily="18" charset="0"/>
                 <a:cs typeface="Times New Roman" pitchFamily="18" charset="0"/>
               </a:rPr>
@@ -5536,7 +5381,7 @@
               <a:buNone/>
             </a:pPr>
             <a:r>
-              <a:rPr lang="en-US" sz="2800" b="1" u="sng" dirty="0" smtClean="0">
+              <a:rPr lang="en-US" sz="2800" b="1" u="sng" dirty="0">
                 <a:latin typeface="Times New Roman" pitchFamily="18" charset="0"/>
                 <a:cs typeface="Times New Roman" pitchFamily="18" charset="0"/>
               </a:rPr>
@@ -5548,7 +5393,7 @@
               <a:buNone/>
             </a:pPr>
             <a:r>
-              <a:rPr lang="en-US" sz="2400" dirty="0" smtClean="0">
+              <a:rPr lang="en-US" sz="2400" dirty="0">
                 <a:latin typeface="Times New Roman" pitchFamily="18" charset="0"/>
                 <a:cs typeface="Times New Roman" pitchFamily="18" charset="0"/>
               </a:rPr>
@@ -5560,13 +5405,13 @@
               <a:buNone/>
             </a:pPr>
             <a:r>
-              <a:rPr lang="en-US" sz="2400" b="1" dirty="0" smtClean="0">
+              <a:rPr lang="en-US" sz="2400" b="1" dirty="0">
                 <a:latin typeface="Times New Roman" pitchFamily="18" charset="0"/>
                 <a:cs typeface="Times New Roman" pitchFamily="18" charset="0"/>
               </a:rPr>
               <a:t>Meta</a:t>
             </a:r>
-            <a:endParaRPr lang="en-US" sz="2400" dirty="0" smtClean="0">
+            <a:endParaRPr lang="en-US" sz="2400" dirty="0">
               <a:latin typeface="Times New Roman" pitchFamily="18" charset="0"/>
               <a:cs typeface="Times New Roman" pitchFamily="18" charset="0"/>
             </a:endParaRPr>
@@ -5576,7 +5421,7 @@
               <a:buNone/>
             </a:pPr>
             <a:r>
-              <a:rPr lang="en-US" sz="2400" dirty="0" smtClean="0">
+              <a:rPr lang="en-US" sz="2400" dirty="0">
                 <a:latin typeface="Times New Roman" pitchFamily="18" charset="0"/>
                 <a:cs typeface="Times New Roman" pitchFamily="18" charset="0"/>
               </a:rPr>
@@ -5588,7 +5433,7 @@
               <a:buNone/>
             </a:pPr>
             <a:r>
-              <a:rPr lang="en-US" sz="2400" b="1" dirty="0" smtClean="0">
+              <a:rPr lang="en-US" sz="2400" b="1" dirty="0">
                 <a:latin typeface="Times New Roman" pitchFamily="18" charset="0"/>
                 <a:cs typeface="Times New Roman" pitchFamily="18" charset="0"/>
               </a:rPr>
@@ -5600,26 +5445,19 @@
               <a:buNone/>
             </a:pPr>
             <a:r>
-              <a:rPr lang="en-US" sz="2400" dirty="0" smtClean="0">
-                <a:latin typeface="Times New Roman" pitchFamily="18" charset="0"/>
-                <a:cs typeface="Times New Roman" pitchFamily="18" charset="0"/>
-              </a:rPr>
-              <a:t>		Some </a:t>
-            </a:r>
-            <a:r>
-              <a:rPr lang="en-US" sz="2400" dirty="0" smtClean="0">
-                <a:latin typeface="Times New Roman" pitchFamily="18" charset="0"/>
-                <a:cs typeface="Times New Roman" pitchFamily="18" charset="0"/>
-              </a:rPr>
-              <a:t>Llama models can be downloaded and run using compatible infrastructure.</a:t>
-            </a:r>
-          </a:p>
-          <a:p>
-            <a:pPr>
-              <a:buNone/>
-            </a:pPr>
-            <a:r>
-              <a:rPr lang="en-US" sz="2400" dirty="0" smtClean="0">
+              <a:rPr lang="en-US" sz="2400" dirty="0">
+                <a:latin typeface="Times New Roman" pitchFamily="18" charset="0"/>
+                <a:cs typeface="Times New Roman" pitchFamily="18" charset="0"/>
+              </a:rPr>
+              <a:t>		Some Llama models can be downloaded and run using compatible infrastructure.</a:t>
+            </a:r>
+          </a:p>
+          <a:p>
+            <a:pPr>
+              <a:buNone/>
+            </a:pPr>
+            <a:r>
+              <a:rPr lang="en-US" sz="2400" dirty="0">
                 <a:latin typeface="Times New Roman" pitchFamily="18" charset="0"/>
                 <a:cs typeface="Times New Roman" pitchFamily="18" charset="0"/>
               </a:rPr>
@@ -5629,7 +5467,7 @@
           <a:p>
             <a:pPr lvl="1"/>
             <a:r>
-              <a:rPr lang="en-US" sz="2400" dirty="0" smtClean="0">
+              <a:rPr lang="en-US" sz="2400" dirty="0">
                 <a:latin typeface="Times New Roman" pitchFamily="18" charset="0"/>
                 <a:cs typeface="Times New Roman" pitchFamily="18" charset="0"/>
               </a:rPr>
@@ -5639,7 +5477,7 @@
           <a:p>
             <a:pPr lvl="1"/>
             <a:r>
-              <a:rPr lang="en-US" sz="2400" dirty="0" smtClean="0">
+              <a:rPr lang="en-US" sz="2400" dirty="0">
                 <a:latin typeface="Times New Roman" pitchFamily="18" charset="0"/>
                 <a:cs typeface="Times New Roman" pitchFamily="18" charset="0"/>
               </a:rPr>
@@ -5649,7 +5487,7 @@
           <a:p>
             <a:pPr lvl="1"/>
             <a:r>
-              <a:rPr lang="en-US" sz="2400" dirty="0" smtClean="0">
+              <a:rPr lang="en-US" sz="2400" dirty="0">
                 <a:latin typeface="Times New Roman" pitchFamily="18" charset="0"/>
                 <a:cs typeface="Times New Roman" pitchFamily="18" charset="0"/>
               </a:rPr>
@@ -5659,7 +5497,7 @@
           <a:p>
             <a:pPr lvl="1"/>
             <a:r>
-              <a:rPr lang="en-US" sz="2400" dirty="0" smtClean="0">
+              <a:rPr lang="en-US" sz="2400" dirty="0">
                 <a:latin typeface="Times New Roman" pitchFamily="18" charset="0"/>
                 <a:cs typeface="Times New Roman" pitchFamily="18" charset="0"/>
               </a:rPr>
@@ -5669,7 +5507,7 @@
           <a:p>
             <a:pPr lvl="1"/>
             <a:r>
-              <a:rPr lang="en-US" sz="2400" dirty="0" smtClean="0">
+              <a:rPr lang="en-US" sz="2400" dirty="0">
                 <a:latin typeface="Times New Roman" pitchFamily="18" charset="0"/>
                 <a:cs typeface="Times New Roman" pitchFamily="18" charset="0"/>
               </a:rPr>
@@ -5729,7 +5567,7 @@
               <a:buNone/>
             </a:pPr>
             <a:r>
-              <a:rPr lang="en-US" sz="2400" b="1" dirty="0" smtClean="0">
+              <a:rPr lang="en-US" sz="2400" b="1" dirty="0">
                 <a:latin typeface="Times New Roman" pitchFamily="18" charset="0"/>
                 <a:cs typeface="Times New Roman" pitchFamily="18" charset="0"/>
               </a:rPr>
@@ -5740,7 +5578,7 @@
             <a:pPr>
               <a:buNone/>
             </a:pPr>
-            <a:endParaRPr lang="en-US" sz="2400" b="1" dirty="0" smtClean="0">
+            <a:endParaRPr lang="en-US" sz="2400" b="1" dirty="0">
               <a:latin typeface="Times New Roman" pitchFamily="18" charset="0"/>
               <a:cs typeface="Times New Roman" pitchFamily="18" charset="0"/>
             </a:endParaRPr>
@@ -5750,45 +5588,34 @@
               <a:buNone/>
             </a:pPr>
             <a:r>
-              <a:rPr lang="en-US" sz="2400" dirty="0" smtClean="0">
-                <a:latin typeface="Times New Roman" pitchFamily="18" charset="0"/>
-                <a:cs typeface="Times New Roman" pitchFamily="18" charset="0"/>
-              </a:rPr>
-              <a:t>Why might a company want to run an LLM locally instead of sending data to an external API</a:t>
-            </a:r>
-            <a:r>
-              <a:rPr lang="en-US" sz="2400" dirty="0" smtClean="0">
-                <a:latin typeface="Times New Roman" pitchFamily="18" charset="0"/>
-                <a:cs typeface="Times New Roman" pitchFamily="18" charset="0"/>
-              </a:rPr>
-              <a:t>?</a:t>
-            </a:r>
-          </a:p>
-          <a:p>
-            <a:pPr>
-              <a:buNone/>
-            </a:pPr>
-            <a:endParaRPr lang="en-US" sz="2400" dirty="0" smtClean="0">
+              <a:rPr lang="en-US" sz="2400" dirty="0">
+                <a:latin typeface="Times New Roman" pitchFamily="18" charset="0"/>
+                <a:cs typeface="Times New Roman" pitchFamily="18" charset="0"/>
+              </a:rPr>
+              <a:t>Why might a company want to run an LLM locally instead of sending data to an external API?</a:t>
+            </a:r>
+          </a:p>
+          <a:p>
+            <a:pPr>
+              <a:buNone/>
+            </a:pPr>
+            <a:endParaRPr lang="en-US" sz="2400" dirty="0">
               <a:latin typeface="Times New Roman" pitchFamily="18" charset="0"/>
               <a:cs typeface="Times New Roman" pitchFamily="18" charset="0"/>
             </a:endParaRPr>
           </a:p>
           <a:p>
             <a:r>
-              <a:rPr lang="en-US" sz="2400" dirty="0" smtClean="0">
+              <a:rPr lang="en-US" sz="2400" dirty="0">
                 <a:latin typeface="Times New Roman" pitchFamily="18" charset="0"/>
                 <a:cs typeface="Times New Roman" pitchFamily="18" charset="0"/>
               </a:rPr>
               <a:t>Privacy </a:t>
             </a:r>
-            <a:endParaRPr lang="en-US" sz="2400" dirty="0" smtClean="0">
-              <a:latin typeface="Times New Roman" pitchFamily="18" charset="0"/>
-              <a:cs typeface="Times New Roman" pitchFamily="18" charset="0"/>
-            </a:endParaRPr>
-          </a:p>
-          <a:p>
-            <a:r>
-              <a:rPr lang="en-US" sz="2400" dirty="0" smtClean="0">
+          </a:p>
+          <a:p>
+            <a:r>
+              <a:rPr lang="en-US" sz="2400" dirty="0">
                 <a:latin typeface="Times New Roman" pitchFamily="18" charset="0"/>
                 <a:cs typeface="Times New Roman" pitchFamily="18" charset="0"/>
               </a:rPr>
@@ -5797,7 +5624,7 @@
           </a:p>
           <a:p>
             <a:r>
-              <a:rPr lang="en-US" sz="2400" dirty="0" smtClean="0">
+              <a:rPr lang="en-US" sz="2400" dirty="0">
                 <a:latin typeface="Times New Roman" pitchFamily="18" charset="0"/>
                 <a:cs typeface="Times New Roman" pitchFamily="18" charset="0"/>
               </a:rPr>
@@ -5806,7 +5633,7 @@
           </a:p>
           <a:p>
             <a:r>
-              <a:rPr lang="en-US" sz="2400" dirty="0" smtClean="0">
+              <a:rPr lang="en-US" sz="2400" dirty="0">
                 <a:latin typeface="Times New Roman" pitchFamily="18" charset="0"/>
                 <a:cs typeface="Times New Roman" pitchFamily="18" charset="0"/>
               </a:rPr>
@@ -5815,7 +5642,7 @@
           </a:p>
           <a:p>
             <a:r>
-              <a:rPr lang="en-US" sz="2400" dirty="0" smtClean="0">
+              <a:rPr lang="en-US" sz="2400" dirty="0">
                 <a:latin typeface="Times New Roman" pitchFamily="18" charset="0"/>
                 <a:cs typeface="Times New Roman" pitchFamily="18" charset="0"/>
               </a:rPr>
@@ -5875,7 +5702,7 @@
           <a:lstStyle/>
           <a:p>
             <a:r>
-              <a:rPr lang="en-IN" dirty="0" smtClean="0">
+              <a:rPr lang="en-IN" dirty="0">
                 <a:latin typeface="Times New Roman" pitchFamily="18" charset="0"/>
                 <a:cs typeface="Times New Roman" pitchFamily="18" charset="0"/>
               </a:rPr>
@@ -5884,7 +5711,7 @@
           </a:p>
           <a:p>
             <a:r>
-              <a:rPr lang="en-IN" dirty="0" smtClean="0">
+              <a:rPr lang="en-IN" dirty="0">
                 <a:latin typeface="Times New Roman" pitchFamily="18" charset="0"/>
                 <a:cs typeface="Times New Roman" pitchFamily="18" charset="0"/>
               </a:rPr>
@@ -5893,7 +5720,7 @@
           </a:p>
           <a:p>
             <a:r>
-              <a:rPr lang="en-IN" dirty="0" smtClean="0">
+              <a:rPr lang="en-IN" dirty="0">
                 <a:latin typeface="Times New Roman" pitchFamily="18" charset="0"/>
                 <a:cs typeface="Times New Roman" pitchFamily="18" charset="0"/>
               </a:rPr>
@@ -5902,7 +5729,7 @@
           </a:p>
           <a:p>
             <a:r>
-              <a:rPr lang="en-IN" dirty="0" smtClean="0">
+              <a:rPr lang="en-IN" dirty="0">
                 <a:latin typeface="Times New Roman" pitchFamily="18" charset="0"/>
                 <a:cs typeface="Times New Roman" pitchFamily="18" charset="0"/>
               </a:rPr>
@@ -5911,7 +5738,7 @@
           </a:p>
           <a:p>
             <a:r>
-              <a:rPr lang="en-IN" dirty="0" smtClean="0">
+              <a:rPr lang="en-IN" dirty="0">
                 <a:latin typeface="Times New Roman" pitchFamily="18" charset="0"/>
                 <a:cs typeface="Times New Roman" pitchFamily="18" charset="0"/>
               </a:rPr>
@@ -5975,7 +5802,7 @@
               <a:buNone/>
             </a:pPr>
             <a:r>
-              <a:rPr lang="en-US" sz="2800" b="1" u="sng" dirty="0" smtClean="0">
+              <a:rPr lang="en-US" sz="2800" b="1" u="sng" dirty="0">
                 <a:latin typeface="Times New Roman" pitchFamily="18" charset="0"/>
                 <a:cs typeface="Times New Roman" pitchFamily="18" charset="0"/>
               </a:rPr>
@@ -5987,7 +5814,7 @@
               <a:buNone/>
             </a:pPr>
             <a:r>
-              <a:rPr lang="en-US" sz="2800" b="1" u="sng" dirty="0" smtClean="0">
+              <a:rPr lang="en-US" sz="2800" b="1" u="sng" dirty="0">
                 <a:latin typeface="Times New Roman" pitchFamily="18" charset="0"/>
                 <a:cs typeface="Times New Roman" pitchFamily="18" charset="0"/>
               </a:rPr>
@@ -5998,7 +5825,7 @@
             <a:pPr>
               <a:buNone/>
             </a:pPr>
-            <a:endParaRPr lang="en-US" sz="2800" b="1" u="sng" dirty="0" smtClean="0">
+            <a:endParaRPr lang="en-US" sz="2800" b="1" u="sng" dirty="0">
               <a:latin typeface="Times New Roman" pitchFamily="18" charset="0"/>
               <a:cs typeface="Times New Roman" pitchFamily="18" charset="0"/>
             </a:endParaRPr>
@@ -6008,7 +5835,7 @@
               <a:buNone/>
             </a:pPr>
             <a:r>
-              <a:rPr lang="en-US" sz="2400" dirty="0" smtClean="0">
+              <a:rPr lang="en-US" sz="2400" dirty="0">
                 <a:latin typeface="Times New Roman" pitchFamily="18" charset="0"/>
                 <a:cs typeface="Times New Roman" pitchFamily="18" charset="0"/>
               </a:rPr>
@@ -6020,20 +5847,20 @@
               <a:buNone/>
             </a:pPr>
             <a:r>
-              <a:rPr lang="en-US" sz="2400" b="1" dirty="0" err="1" smtClean="0">
+              <a:rPr lang="en-US" sz="2400" b="1" dirty="0" err="1">
                 <a:latin typeface="Times New Roman" pitchFamily="18" charset="0"/>
                 <a:cs typeface="Times New Roman" pitchFamily="18" charset="0"/>
               </a:rPr>
               <a:t>Alibaba</a:t>
             </a:r>
             <a:r>
-              <a:rPr lang="en-US" sz="2400" b="1" dirty="0" smtClean="0">
+              <a:rPr lang="en-US" sz="2400" b="1" dirty="0">
                 <a:latin typeface="Times New Roman" pitchFamily="18" charset="0"/>
                 <a:cs typeface="Times New Roman" pitchFamily="18" charset="0"/>
               </a:rPr>
               <a:t> Cloud</a:t>
             </a:r>
-            <a:endParaRPr lang="en-US" sz="2400" dirty="0" smtClean="0">
+            <a:endParaRPr lang="en-US" sz="2400" dirty="0">
               <a:latin typeface="Times New Roman" pitchFamily="18" charset="0"/>
               <a:cs typeface="Times New Roman" pitchFamily="18" charset="0"/>
             </a:endParaRPr>
@@ -6043,32 +5870,25 @@
               <a:buNone/>
             </a:pPr>
             <a:r>
-              <a:rPr lang="en-US" sz="2400" dirty="0" smtClean="0">
-                <a:latin typeface="Times New Roman" pitchFamily="18" charset="0"/>
-                <a:cs typeface="Times New Roman" pitchFamily="18" charset="0"/>
-              </a:rPr>
-              <a:t>Qwen is a family of models covering tasks such as</a:t>
-            </a:r>
-            <a:r>
-              <a:rPr lang="en-US" sz="2400" dirty="0" smtClean="0">
-                <a:latin typeface="Times New Roman" pitchFamily="18" charset="0"/>
-                <a:cs typeface="Times New Roman" pitchFamily="18" charset="0"/>
-              </a:rPr>
-              <a:t>:</a:t>
-            </a:r>
-          </a:p>
-          <a:p>
-            <a:pPr>
-              <a:buNone/>
-            </a:pPr>
-            <a:endParaRPr lang="en-US" sz="2400" dirty="0" smtClean="0">
+              <a:rPr lang="en-US" sz="2400" dirty="0">
+                <a:latin typeface="Times New Roman" pitchFamily="18" charset="0"/>
+                <a:cs typeface="Times New Roman" pitchFamily="18" charset="0"/>
+              </a:rPr>
+              <a:t>Qwen is a family of models covering tasks such as:</a:t>
+            </a:r>
+          </a:p>
+          <a:p>
+            <a:pPr>
+              <a:buNone/>
+            </a:pPr>
+            <a:endParaRPr lang="en-US" sz="2400" dirty="0">
               <a:latin typeface="Times New Roman" pitchFamily="18" charset="0"/>
               <a:cs typeface="Times New Roman" pitchFamily="18" charset="0"/>
             </a:endParaRPr>
           </a:p>
           <a:p>
             <a:r>
-              <a:rPr lang="en-US" sz="2400" dirty="0" smtClean="0">
+              <a:rPr lang="en-US" sz="2400" dirty="0">
                 <a:latin typeface="Times New Roman" pitchFamily="18" charset="0"/>
                 <a:cs typeface="Times New Roman" pitchFamily="18" charset="0"/>
               </a:rPr>
@@ -6077,7 +5897,7 @@
           </a:p>
           <a:p>
             <a:r>
-              <a:rPr lang="en-US" sz="2400" dirty="0" smtClean="0">
+              <a:rPr lang="en-US" sz="2400" dirty="0">
                 <a:latin typeface="Times New Roman" pitchFamily="18" charset="0"/>
                 <a:cs typeface="Times New Roman" pitchFamily="18" charset="0"/>
               </a:rPr>
@@ -6086,7 +5906,7 @@
           </a:p>
           <a:p>
             <a:r>
-              <a:rPr lang="en-US" sz="2400" dirty="0" smtClean="0">
+              <a:rPr lang="en-US" sz="2400" dirty="0">
                 <a:latin typeface="Times New Roman" pitchFamily="18" charset="0"/>
                 <a:cs typeface="Times New Roman" pitchFamily="18" charset="0"/>
               </a:rPr>
@@ -6095,7 +5915,7 @@
           </a:p>
           <a:p>
             <a:r>
-              <a:rPr lang="en-US" sz="2400" dirty="0" smtClean="0">
+              <a:rPr lang="en-US" sz="2400" dirty="0">
                 <a:latin typeface="Times New Roman" pitchFamily="18" charset="0"/>
                 <a:cs typeface="Times New Roman" pitchFamily="18" charset="0"/>
               </a:rPr>
@@ -6104,7 +5924,7 @@
           </a:p>
           <a:p>
             <a:r>
-              <a:rPr lang="en-US" sz="2400" dirty="0" smtClean="0">
+              <a:rPr lang="en-US" sz="2400" dirty="0">
                 <a:latin typeface="Times New Roman" pitchFamily="18" charset="0"/>
                 <a:cs typeface="Times New Roman" pitchFamily="18" charset="0"/>
               </a:rPr>
@@ -6164,7 +5984,7 @@
               <a:buNone/>
             </a:pPr>
             <a:r>
-              <a:rPr lang="en-US" sz="2400" b="1" dirty="0" smtClean="0">
+              <a:rPr lang="en-US" sz="2400" b="1" dirty="0">
                 <a:latin typeface="Times New Roman" pitchFamily="18" charset="0"/>
                 <a:cs typeface="Times New Roman" pitchFamily="18" charset="0"/>
               </a:rPr>
@@ -6175,7 +5995,7 @@
             <a:pPr>
               <a:buNone/>
             </a:pPr>
-            <a:endParaRPr lang="en-US" sz="2400" b="1" dirty="0" smtClean="0">
+            <a:endParaRPr lang="en-US" sz="2400" b="1" dirty="0">
               <a:latin typeface="Times New Roman" pitchFamily="18" charset="0"/>
               <a:cs typeface="Times New Roman" pitchFamily="18" charset="0"/>
             </a:endParaRPr>
@@ -6185,32 +6005,18 @@
               <a:buNone/>
             </a:pPr>
             <a:r>
-              <a:rPr lang="en-US" sz="2400" b="1" dirty="0" smtClean="0">
-                <a:latin typeface="Times New Roman" pitchFamily="18" charset="0"/>
-                <a:cs typeface="Times New Roman" pitchFamily="18" charset="0"/>
-              </a:rPr>
-              <a:t>"</a:t>
-            </a:r>
-            <a:r>
-              <a:rPr lang="en-US" sz="2400" b="1" dirty="0" smtClean="0">
-                <a:latin typeface="Times New Roman" pitchFamily="18" charset="0"/>
-                <a:cs typeface="Times New Roman" pitchFamily="18" charset="0"/>
-              </a:rPr>
-              <a:t>Explain Python functions to a beginner using an Indian classroom example</a:t>
-            </a:r>
-            <a:r>
-              <a:rPr lang="en-US" sz="2400" b="1" dirty="0" smtClean="0">
-                <a:latin typeface="Times New Roman" pitchFamily="18" charset="0"/>
-                <a:cs typeface="Times New Roman" pitchFamily="18" charset="0"/>
-              </a:rPr>
-              <a:t>.“</a:t>
-            </a:r>
-          </a:p>
-          <a:p>
-            <a:pPr>
-              <a:buNone/>
-            </a:pPr>
-            <a:endParaRPr lang="en-US" sz="2400" b="1" dirty="0" smtClean="0">
+              <a:rPr lang="en-US" sz="2400" b="1" dirty="0">
+                <a:latin typeface="Times New Roman" pitchFamily="18" charset="0"/>
+                <a:cs typeface="Times New Roman" pitchFamily="18" charset="0"/>
+              </a:rPr>
+              <a:t>"Explain Python functions to a beginner using an Indian classroom example.“</a:t>
+            </a:r>
+          </a:p>
+          <a:p>
+            <a:pPr>
+              <a:buNone/>
+            </a:pPr>
+            <a:endParaRPr lang="en-US" sz="2400" b="1" dirty="0">
               <a:latin typeface="Times New Roman" pitchFamily="18" charset="0"/>
               <a:cs typeface="Times New Roman" pitchFamily="18" charset="0"/>
             </a:endParaRPr>
@@ -6220,16 +6026,12 @@
               <a:buNone/>
             </a:pPr>
             <a:r>
-              <a:rPr lang="en-US" sz="2400" dirty="0" smtClean="0">
+              <a:rPr lang="en-US" sz="2400" dirty="0">
                 <a:latin typeface="Times New Roman" pitchFamily="18" charset="0"/>
                 <a:cs typeface="Times New Roman" pitchFamily="18" charset="0"/>
               </a:rPr>
               <a:t>Then compare the explanation with another model.</a:t>
             </a:r>
-            <a:endParaRPr lang="en-US" sz="2400" dirty="0">
-              <a:latin typeface="Times New Roman" pitchFamily="18" charset="0"/>
-              <a:cs typeface="Times New Roman" pitchFamily="18" charset="0"/>
-            </a:endParaRPr>
           </a:p>
         </p:txBody>
       </p:sp>
@@ -6284,7 +6086,7 @@
               <a:buNone/>
             </a:pPr>
             <a:r>
-              <a:rPr lang="en-US" sz="2800" b="1" u="sng" dirty="0" smtClean="0">
+              <a:rPr lang="en-US" sz="2800" b="1" u="sng" dirty="0">
                 <a:latin typeface="Times New Roman" pitchFamily="18" charset="0"/>
                 <a:cs typeface="Times New Roman" pitchFamily="18" charset="0"/>
               </a:rPr>
@@ -6296,25 +6098,18 @@
               <a:buNone/>
             </a:pPr>
             <a:r>
-              <a:rPr lang="en-US" sz="2800" b="1" u="sng" dirty="0" smtClean="0">
-                <a:latin typeface="Times New Roman" pitchFamily="18" charset="0"/>
-                <a:cs typeface="Times New Roman" pitchFamily="18" charset="0"/>
-              </a:rPr>
-              <a:t>Slide 11 — Closed vs </a:t>
-            </a:r>
-            <a:r>
-              <a:rPr lang="en-US" sz="2800" b="1" u="sng" dirty="0" smtClean="0">
-                <a:latin typeface="Times New Roman" pitchFamily="18" charset="0"/>
-                <a:cs typeface="Times New Roman" pitchFamily="18" charset="0"/>
-              </a:rPr>
-              <a:t>Open-Weight</a:t>
-            </a:r>
-          </a:p>
-          <a:p>
-            <a:pPr>
-              <a:buNone/>
-            </a:pPr>
-            <a:endParaRPr lang="en-US" sz="2800" b="1" u="sng" dirty="0" smtClean="0">
+              <a:rPr lang="en-US" sz="2800" b="1" u="sng" dirty="0">
+                <a:latin typeface="Times New Roman" pitchFamily="18" charset="0"/>
+                <a:cs typeface="Times New Roman" pitchFamily="18" charset="0"/>
+              </a:rPr>
+              <a:t>Slide 11 — Closed vs Open-Weight</a:t>
+            </a:r>
+          </a:p>
+          <a:p>
+            <a:pPr>
+              <a:buNone/>
+            </a:pPr>
+            <a:endParaRPr lang="en-US" sz="2800" b="1" u="sng" dirty="0">
               <a:latin typeface="Times New Roman" pitchFamily="18" charset="0"/>
               <a:cs typeface="Times New Roman" pitchFamily="18" charset="0"/>
             </a:endParaRPr>
@@ -6324,7 +6119,7 @@
               <a:buNone/>
             </a:pPr>
             <a:r>
-              <a:rPr lang="en-US" sz="2400" b="1" dirty="0" smtClean="0">
+              <a:rPr lang="en-US" sz="2400" b="1" dirty="0">
                 <a:latin typeface="Times New Roman" pitchFamily="18" charset="0"/>
                 <a:cs typeface="Times New Roman" pitchFamily="18" charset="0"/>
               </a:rPr>
@@ -6336,7 +6131,7 @@
               <a:buNone/>
             </a:pPr>
             <a:r>
-              <a:rPr lang="en-US" sz="2400" dirty="0" smtClean="0">
+              <a:rPr lang="en-US" sz="2400" dirty="0">
                 <a:latin typeface="Times New Roman" pitchFamily="18" charset="0"/>
                 <a:cs typeface="Times New Roman" pitchFamily="18" charset="0"/>
               </a:rPr>
@@ -6345,7 +6140,7 @@
           </a:p>
           <a:p>
             <a:r>
-              <a:rPr lang="en-US" sz="2400" dirty="0" smtClean="0">
+              <a:rPr lang="en-US" sz="2400" dirty="0">
                 <a:latin typeface="Times New Roman" pitchFamily="18" charset="0"/>
                 <a:cs typeface="Times New Roman" pitchFamily="18" charset="0"/>
               </a:rPr>
@@ -6354,7 +6149,7 @@
           </a:p>
           <a:p>
             <a:r>
-              <a:rPr lang="en-US" sz="2400" dirty="0" smtClean="0">
+              <a:rPr lang="en-US" sz="2400" dirty="0">
                 <a:latin typeface="Times New Roman" pitchFamily="18" charset="0"/>
                 <a:cs typeface="Times New Roman" pitchFamily="18" charset="0"/>
               </a:rPr>
@@ -6363,13 +6158,18 @@
           </a:p>
           <a:p>
             <a:r>
-              <a:rPr lang="en-US" sz="2400" dirty="0" smtClean="0">
+              <a:rPr lang="en-US" sz="2400" dirty="0">
                 <a:latin typeface="Times New Roman" pitchFamily="18" charset="0"/>
                 <a:cs typeface="Times New Roman" pitchFamily="18" charset="0"/>
               </a:rPr>
               <a:t>Managed services </a:t>
             </a:r>
-            <a:endParaRPr lang="en-US" sz="2400" dirty="0" smtClean="0">
+          </a:p>
+          <a:p>
+            <a:pPr>
+              <a:buNone/>
+            </a:pPr>
+            <a:endParaRPr lang="en-US" sz="2400" dirty="0">
               <a:latin typeface="Times New Roman" pitchFamily="18" charset="0"/>
               <a:cs typeface="Times New Roman" pitchFamily="18" charset="0"/>
             </a:endParaRPr>
@@ -6378,33 +6178,13 @@
             <a:pPr>
               <a:buNone/>
             </a:pPr>
-            <a:endParaRPr lang="en-US" sz="2400" dirty="0" smtClean="0">
-              <a:latin typeface="Times New Roman" pitchFamily="18" charset="0"/>
-              <a:cs typeface="Times New Roman" pitchFamily="18" charset="0"/>
-            </a:endParaRPr>
-          </a:p>
-          <a:p>
-            <a:pPr>
-              <a:buNone/>
-            </a:pPr>
-            <a:r>
-              <a:rPr lang="en-US" sz="2400" dirty="0" smtClean="0">
-                <a:latin typeface="Times New Roman" pitchFamily="18" charset="0"/>
-                <a:cs typeface="Times New Roman" pitchFamily="18" charset="0"/>
-              </a:rPr>
-              <a:t>Examples include many commercial model offerings</a:t>
-            </a:r>
-            <a:r>
-              <a:rPr lang="en-US" sz="2400" dirty="0" smtClean="0">
-                <a:latin typeface="Times New Roman" pitchFamily="18" charset="0"/>
-                <a:cs typeface="Times New Roman" pitchFamily="18" charset="0"/>
-              </a:rPr>
-              <a:t>.</a:t>
-            </a:r>
-            <a:endParaRPr lang="en-US" sz="2400" dirty="0" smtClean="0">
-              <a:latin typeface="Times New Roman" pitchFamily="18" charset="0"/>
-              <a:cs typeface="Times New Roman" pitchFamily="18" charset="0"/>
-            </a:endParaRPr>
+            <a:r>
+              <a:rPr lang="en-US" sz="2400" dirty="0">
+                <a:latin typeface="Times New Roman" pitchFamily="18" charset="0"/>
+                <a:cs typeface="Times New Roman" pitchFamily="18" charset="0"/>
+              </a:rPr>
+              <a:t>Examples include many commercial model offerings.</a:t>
+            </a:r>
           </a:p>
         </p:txBody>
       </p:sp>
@@ -6458,7 +6238,7 @@
               <a:buNone/>
             </a:pPr>
             <a:r>
-              <a:rPr lang="en-US" sz="2400" b="1" dirty="0" smtClean="0">
+              <a:rPr lang="en-US" sz="2400" b="1" dirty="0">
                 <a:latin typeface="Times New Roman" pitchFamily="18" charset="0"/>
                 <a:cs typeface="Times New Roman" pitchFamily="18" charset="0"/>
               </a:rPr>
@@ -6470,7 +6250,7 @@
               <a:buNone/>
             </a:pPr>
             <a:r>
-              <a:rPr lang="en-US" sz="2400" dirty="0" smtClean="0">
+              <a:rPr lang="en-US" sz="2400" dirty="0">
                 <a:latin typeface="Times New Roman" pitchFamily="18" charset="0"/>
                 <a:cs typeface="Times New Roman" pitchFamily="18" charset="0"/>
               </a:rPr>
@@ -6482,7 +6262,7 @@
               <a:buNone/>
             </a:pPr>
             <a:r>
-              <a:rPr lang="en-US" sz="2400" dirty="0" smtClean="0">
+              <a:rPr lang="en-US" sz="2400" dirty="0">
                 <a:latin typeface="Times New Roman" pitchFamily="18" charset="0"/>
                 <a:cs typeface="Times New Roman" pitchFamily="18" charset="0"/>
               </a:rPr>
@@ -6495,7 +6275,7 @@
               <a:buChar char="•"/>
             </a:pPr>
             <a:r>
-              <a:rPr lang="en-US" sz="2400" dirty="0" smtClean="0">
+              <a:rPr lang="en-US" sz="2400" dirty="0">
                 <a:latin typeface="Times New Roman" pitchFamily="18" charset="0"/>
                 <a:cs typeface="Times New Roman" pitchFamily="18" charset="0"/>
               </a:rPr>
@@ -6508,7 +6288,7 @@
               <a:buChar char="•"/>
             </a:pPr>
             <a:r>
-              <a:rPr lang="en-US" sz="2400" dirty="0" smtClean="0">
+              <a:rPr lang="en-US" sz="2400" dirty="0">
                 <a:latin typeface="Times New Roman" pitchFamily="18" charset="0"/>
                 <a:cs typeface="Times New Roman" pitchFamily="18" charset="0"/>
               </a:rPr>
@@ -6521,82 +6301,67 @@
               <a:buChar char="•"/>
             </a:pPr>
             <a:r>
-              <a:rPr lang="en-US" sz="2400" dirty="0" smtClean="0">
+              <a:rPr lang="en-US" sz="2400" dirty="0">
                 <a:latin typeface="Times New Roman" pitchFamily="18" charset="0"/>
                 <a:cs typeface="Times New Roman" pitchFamily="18" charset="0"/>
               </a:rPr>
               <a:t>Some DeepSeek models </a:t>
             </a:r>
-            <a:endParaRPr lang="en-US" sz="2400" dirty="0" smtClean="0">
-              <a:latin typeface="Times New Roman" pitchFamily="18" charset="0"/>
-              <a:cs typeface="Times New Roman" pitchFamily="18" charset="0"/>
-            </a:endParaRPr>
           </a:p>
           <a:p>
             <a:pPr>
               <a:buFont typeface="Arial" pitchFamily="34" charset="0"/>
               <a:buChar char="•"/>
             </a:pPr>
-            <a:endParaRPr lang="en-US" sz="2400" dirty="0" smtClean="0">
-              <a:latin typeface="Times New Roman" pitchFamily="18" charset="0"/>
-              <a:cs typeface="Times New Roman" pitchFamily="18" charset="0"/>
-            </a:endParaRPr>
-          </a:p>
-          <a:p>
-            <a:pPr>
-              <a:buNone/>
-            </a:pPr>
-            <a:r>
-              <a:rPr lang="en-US" sz="2400" b="1" dirty="0" smtClean="0">
-                <a:latin typeface="Times New Roman" pitchFamily="18" charset="0"/>
-                <a:cs typeface="Times New Roman" pitchFamily="18" charset="0"/>
-              </a:rPr>
-              <a:t>Important</a:t>
-            </a:r>
-          </a:p>
-          <a:p>
-            <a:pPr>
-              <a:buNone/>
-            </a:pPr>
-            <a:r>
-              <a:rPr lang="en-US" sz="2400" b="1" dirty="0" smtClean="0">
-                <a:latin typeface="Times New Roman" pitchFamily="18" charset="0"/>
-                <a:cs typeface="Times New Roman" pitchFamily="18" charset="0"/>
-              </a:rPr>
-              <a:t>Open-weight does not automatically mean "completely free" or "no restrictions</a:t>
-            </a:r>
-            <a:r>
-              <a:rPr lang="en-US" sz="2400" b="1" dirty="0" smtClean="0">
-                <a:latin typeface="Times New Roman" pitchFamily="18" charset="0"/>
-                <a:cs typeface="Times New Roman" pitchFamily="18" charset="0"/>
-              </a:rPr>
-              <a:t>.“</a:t>
-            </a:r>
-          </a:p>
-          <a:p>
-            <a:pPr>
-              <a:buNone/>
-            </a:pPr>
-            <a:endParaRPr lang="en-US" sz="2400" dirty="0" smtClean="0">
-              <a:latin typeface="Times New Roman" pitchFamily="18" charset="0"/>
-              <a:cs typeface="Times New Roman" pitchFamily="18" charset="0"/>
-            </a:endParaRPr>
-          </a:p>
-          <a:p>
-            <a:pPr>
-              <a:buNone/>
-            </a:pPr>
-            <a:r>
-              <a:rPr lang="en-US" sz="2400" dirty="0" smtClean="0">
-                <a:latin typeface="Times New Roman" pitchFamily="18" charset="0"/>
-                <a:cs typeface="Times New Roman" pitchFamily="18" charset="0"/>
-              </a:rPr>
-              <a:t>Licensing matters.</a:t>
-            </a:r>
             <a:endParaRPr lang="en-US" sz="2400" dirty="0">
               <a:latin typeface="Times New Roman" pitchFamily="18" charset="0"/>
               <a:cs typeface="Times New Roman" pitchFamily="18" charset="0"/>
             </a:endParaRPr>
+          </a:p>
+          <a:p>
+            <a:pPr>
+              <a:buNone/>
+            </a:pPr>
+            <a:r>
+              <a:rPr lang="en-US" sz="2400" b="1" dirty="0">
+                <a:latin typeface="Times New Roman" pitchFamily="18" charset="0"/>
+                <a:cs typeface="Times New Roman" pitchFamily="18" charset="0"/>
+              </a:rPr>
+              <a:t>Important</a:t>
+            </a:r>
+          </a:p>
+          <a:p>
+            <a:pPr>
+              <a:buNone/>
+            </a:pPr>
+            <a:r>
+              <a:rPr lang="en-US" sz="2400" b="1" dirty="0">
+                <a:latin typeface="Times New Roman" pitchFamily="18" charset="0"/>
+                <a:cs typeface="Times New Roman" pitchFamily="18" charset="0"/>
+              </a:rPr>
+              <a:t>Open-weight does not automatically mean "completely free" or "no restrictions.“</a:t>
+            </a:r>
+          </a:p>
+          <a:p>
+            <a:pPr>
+              <a:buNone/>
+            </a:pPr>
+            <a:endParaRPr lang="en-US" sz="2400" dirty="0">
+              <a:latin typeface="Times New Roman" pitchFamily="18" charset="0"/>
+              <a:cs typeface="Times New Roman" pitchFamily="18" charset="0"/>
+            </a:endParaRPr>
+          </a:p>
+          <a:p>
+            <a:pPr>
+              <a:buNone/>
+            </a:pPr>
+            <a:r>
+              <a:rPr lang="en-US" sz="2400" dirty="0">
+                <a:latin typeface="Times New Roman" pitchFamily="18" charset="0"/>
+                <a:cs typeface="Times New Roman" pitchFamily="18" charset="0"/>
+              </a:rPr>
+              <a:t>Licensing matters.</a:t>
+            </a:r>
           </a:p>
         </p:txBody>
       </p:sp>
@@ -6651,25 +6416,18 @@
               <a:buNone/>
             </a:pPr>
             <a:r>
-              <a:rPr lang="en-US" sz="2800" b="1" u="sng" dirty="0" smtClean="0">
-                <a:latin typeface="Times New Roman" pitchFamily="18" charset="0"/>
-                <a:cs typeface="Times New Roman" pitchFamily="18" charset="0"/>
-              </a:rPr>
-              <a:t>Slide 12 — Why Does This Matter</a:t>
-            </a:r>
-            <a:r>
-              <a:rPr lang="en-US" sz="2800" b="1" u="sng" dirty="0" smtClean="0">
-                <a:latin typeface="Times New Roman" pitchFamily="18" charset="0"/>
-                <a:cs typeface="Times New Roman" pitchFamily="18" charset="0"/>
-              </a:rPr>
-              <a:t>?</a:t>
-            </a:r>
-          </a:p>
-          <a:p>
-            <a:pPr>
-              <a:buNone/>
-            </a:pPr>
-            <a:endParaRPr lang="en-US" sz="2800" b="1" u="sng" dirty="0" smtClean="0">
+              <a:rPr lang="en-US" sz="2800" b="1" u="sng" dirty="0">
+                <a:latin typeface="Times New Roman" pitchFamily="18" charset="0"/>
+                <a:cs typeface="Times New Roman" pitchFamily="18" charset="0"/>
+              </a:rPr>
+              <a:t>Slide 12 — Why Does This Matter?</a:t>
+            </a:r>
+          </a:p>
+          <a:p>
+            <a:pPr>
+              <a:buNone/>
+            </a:pPr>
+            <a:endParaRPr lang="en-US" sz="2800" b="1" u="sng" dirty="0">
               <a:latin typeface="Times New Roman" pitchFamily="18" charset="0"/>
               <a:cs typeface="Times New Roman" pitchFamily="18" charset="0"/>
             </a:endParaRPr>
@@ -6679,25 +6437,18 @@
               <a:buNone/>
             </a:pPr>
             <a:r>
-              <a:rPr lang="en-US" sz="2400" dirty="0" smtClean="0">
-                <a:latin typeface="Times New Roman" pitchFamily="18" charset="0"/>
-                <a:cs typeface="Times New Roman" pitchFamily="18" charset="0"/>
-              </a:rPr>
-              <a:t>Imagine a company has sensitive customer information</a:t>
-            </a:r>
-            <a:r>
-              <a:rPr lang="en-US" sz="2400" dirty="0" smtClean="0">
-                <a:latin typeface="Times New Roman" pitchFamily="18" charset="0"/>
-                <a:cs typeface="Times New Roman" pitchFamily="18" charset="0"/>
-              </a:rPr>
-              <a:t>.</a:t>
-            </a:r>
-          </a:p>
-          <a:p>
-            <a:pPr>
-              <a:buNone/>
-            </a:pPr>
-            <a:endParaRPr lang="en-US" sz="2400" dirty="0" smtClean="0">
+              <a:rPr lang="en-US" sz="2400" dirty="0">
+                <a:latin typeface="Times New Roman" pitchFamily="18" charset="0"/>
+                <a:cs typeface="Times New Roman" pitchFamily="18" charset="0"/>
+              </a:rPr>
+              <a:t>Imagine a company has sensitive customer information.</a:t>
+            </a:r>
+          </a:p>
+          <a:p>
+            <a:pPr>
+              <a:buNone/>
+            </a:pPr>
+            <a:endParaRPr lang="en-US" sz="2400" dirty="0">
               <a:latin typeface="Times New Roman" pitchFamily="18" charset="0"/>
               <a:cs typeface="Times New Roman" pitchFamily="18" charset="0"/>
             </a:endParaRPr>
@@ -6707,7 +6458,7 @@
               <a:buNone/>
             </a:pPr>
             <a:r>
-              <a:rPr lang="en-US" sz="2400" b="1" dirty="0" smtClean="0">
+              <a:rPr lang="en-US" sz="2400" b="1" dirty="0">
                 <a:latin typeface="Times New Roman" pitchFamily="18" charset="0"/>
                 <a:cs typeface="Times New Roman" pitchFamily="18" charset="0"/>
               </a:rPr>
@@ -6719,25 +6470,18 @@
               <a:buNone/>
             </a:pPr>
             <a:r>
-              <a:rPr lang="en-US" sz="2400" dirty="0" smtClean="0">
-                <a:latin typeface="Times New Roman" pitchFamily="18" charset="0"/>
-                <a:cs typeface="Times New Roman" pitchFamily="18" charset="0"/>
-              </a:rPr>
-              <a:t>Send everything to an external AI API</a:t>
-            </a:r>
-            <a:r>
-              <a:rPr lang="en-US" sz="2400" dirty="0" smtClean="0">
-                <a:latin typeface="Times New Roman" pitchFamily="18" charset="0"/>
-                <a:cs typeface="Times New Roman" pitchFamily="18" charset="0"/>
-              </a:rPr>
-              <a:t>.</a:t>
-            </a:r>
-          </a:p>
-          <a:p>
-            <a:pPr>
-              <a:buNone/>
-            </a:pPr>
-            <a:endParaRPr lang="en-US" sz="2400" dirty="0" smtClean="0">
+              <a:rPr lang="en-US" sz="2400" dirty="0">
+                <a:latin typeface="Times New Roman" pitchFamily="18" charset="0"/>
+                <a:cs typeface="Times New Roman" pitchFamily="18" charset="0"/>
+              </a:rPr>
+              <a:t>Send everything to an external AI API.</a:t>
+            </a:r>
+          </a:p>
+          <a:p>
+            <a:pPr>
+              <a:buNone/>
+            </a:pPr>
+            <a:endParaRPr lang="en-US" sz="2400" dirty="0">
               <a:latin typeface="Times New Roman" pitchFamily="18" charset="0"/>
               <a:cs typeface="Times New Roman" pitchFamily="18" charset="0"/>
             </a:endParaRPr>
@@ -6747,7 +6491,7 @@
               <a:buNone/>
             </a:pPr>
             <a:r>
-              <a:rPr lang="en-US" sz="2400" b="1" dirty="0" smtClean="0">
+              <a:rPr lang="en-US" sz="2400" b="1" dirty="0">
                 <a:latin typeface="Times New Roman" pitchFamily="18" charset="0"/>
                 <a:cs typeface="Times New Roman" pitchFamily="18" charset="0"/>
               </a:rPr>
@@ -6759,23 +6503,12 @@
               <a:buNone/>
             </a:pPr>
             <a:r>
-              <a:rPr lang="en-US" sz="2400" dirty="0" smtClean="0">
-                <a:latin typeface="Times New Roman" pitchFamily="18" charset="0"/>
-                <a:cs typeface="Times New Roman" pitchFamily="18" charset="0"/>
-              </a:rPr>
-              <a:t>Run a suitable model within controlled infrastructure</a:t>
-            </a:r>
-            <a:r>
-              <a:rPr lang="en-US" sz="2400" dirty="0" smtClean="0">
-                <a:latin typeface="Times New Roman" pitchFamily="18" charset="0"/>
-                <a:cs typeface="Times New Roman" pitchFamily="18" charset="0"/>
-              </a:rPr>
-              <a:t>.</a:t>
-            </a:r>
-            <a:endParaRPr lang="en-US" sz="2400" dirty="0" smtClean="0">
-              <a:latin typeface="Times New Roman" pitchFamily="18" charset="0"/>
-              <a:cs typeface="Times New Roman" pitchFamily="18" charset="0"/>
-            </a:endParaRPr>
+              <a:rPr lang="en-US" sz="2400" dirty="0">
+                <a:latin typeface="Times New Roman" pitchFamily="18" charset="0"/>
+                <a:cs typeface="Times New Roman" pitchFamily="18" charset="0"/>
+              </a:rPr>
+              <a:t>Run a suitable model within controlled infrastructure.</a:t>
+            </a:r>
           </a:p>
         </p:txBody>
       </p:sp>
@@ -6830,23 +6563,16 @@
               <a:buNone/>
             </a:pPr>
             <a:r>
-              <a:rPr lang="en-US" sz="2400" dirty="0" smtClean="0">
-                <a:latin typeface="Times New Roman" pitchFamily="18" charset="0"/>
-                <a:cs typeface="Times New Roman" pitchFamily="18" charset="0"/>
-              </a:rPr>
-              <a:t>Which </a:t>
-            </a:r>
-            <a:r>
-              <a:rPr lang="en-US" sz="2400" dirty="0" smtClean="0">
-                <a:latin typeface="Times New Roman" pitchFamily="18" charset="0"/>
-                <a:cs typeface="Times New Roman" pitchFamily="18" charset="0"/>
-              </a:rPr>
-              <a:t>would you consider for:</a:t>
-            </a:r>
-          </a:p>
-          <a:p>
-            <a:r>
-              <a:rPr lang="en-US" sz="2400" dirty="0" smtClean="0">
+              <a:rPr lang="en-US" sz="2400" dirty="0">
+                <a:latin typeface="Times New Roman" pitchFamily="18" charset="0"/>
+                <a:cs typeface="Times New Roman" pitchFamily="18" charset="0"/>
+              </a:rPr>
+              <a:t>Which would you consider for:</a:t>
+            </a:r>
+          </a:p>
+          <a:p>
+            <a:r>
+              <a:rPr lang="en-US" sz="2400" dirty="0">
                 <a:latin typeface="Times New Roman" pitchFamily="18" charset="0"/>
                 <a:cs typeface="Times New Roman" pitchFamily="18" charset="0"/>
               </a:rPr>
@@ -6855,7 +6581,7 @@
           </a:p>
           <a:p>
             <a:r>
-              <a:rPr lang="en-US" sz="2400" dirty="0" smtClean="0">
+              <a:rPr lang="en-US" sz="2400" dirty="0">
                 <a:latin typeface="Times New Roman" pitchFamily="18" charset="0"/>
                 <a:cs typeface="Times New Roman" pitchFamily="18" charset="0"/>
               </a:rPr>
@@ -6864,7 +6590,7 @@
           </a:p>
           <a:p>
             <a:r>
-              <a:rPr lang="en-US" sz="2400" dirty="0" smtClean="0">
+              <a:rPr lang="en-US" sz="2400" dirty="0">
                 <a:latin typeface="Times New Roman" pitchFamily="18" charset="0"/>
                 <a:cs typeface="Times New Roman" pitchFamily="18" charset="0"/>
               </a:rPr>
@@ -6873,7 +6599,7 @@
           </a:p>
           <a:p>
             <a:r>
-              <a:rPr lang="en-US" sz="2400" dirty="0" smtClean="0">
+              <a:rPr lang="en-US" sz="2400" dirty="0">
                 <a:latin typeface="Times New Roman" pitchFamily="18" charset="0"/>
                 <a:cs typeface="Times New Roman" pitchFamily="18" charset="0"/>
               </a:rPr>
@@ -6884,7 +6610,7 @@
             <a:pPr>
               <a:buNone/>
             </a:pPr>
-            <a:endParaRPr lang="en-US" sz="2400" dirty="0" smtClean="0">
+            <a:endParaRPr lang="en-US" sz="2400" dirty="0">
               <a:latin typeface="Times New Roman" pitchFamily="18" charset="0"/>
               <a:cs typeface="Times New Roman" pitchFamily="18" charset="0"/>
             </a:endParaRPr>
@@ -6894,26 +6620,19 @@
               <a:buNone/>
             </a:pPr>
             <a:r>
-              <a:rPr lang="en-US" sz="2400" dirty="0" smtClean="0">
-                <a:latin typeface="Times New Roman" pitchFamily="18" charset="0"/>
-                <a:cs typeface="Times New Roman" pitchFamily="18" charset="0"/>
-              </a:rPr>
-              <a:t>There </a:t>
-            </a:r>
-            <a:r>
-              <a:rPr lang="en-US" sz="2400" dirty="0" smtClean="0">
-                <a:latin typeface="Times New Roman" pitchFamily="18" charset="0"/>
-                <a:cs typeface="Times New Roman" pitchFamily="18" charset="0"/>
-              </a:rPr>
-              <a:t>is no single correct answer.</a:t>
-            </a:r>
-          </a:p>
-          <a:p>
-            <a:pPr>
-              <a:buNone/>
-            </a:pPr>
-            <a:r>
-              <a:rPr lang="en-US" sz="2400" dirty="0" smtClean="0">
+              <a:rPr lang="en-US" sz="2400" dirty="0">
+                <a:latin typeface="Times New Roman" pitchFamily="18" charset="0"/>
+                <a:cs typeface="Times New Roman" pitchFamily="18" charset="0"/>
+              </a:rPr>
+              <a:t>There is no single correct answer.</a:t>
+            </a:r>
+          </a:p>
+          <a:p>
+            <a:pPr>
+              <a:buNone/>
+            </a:pPr>
+            <a:r>
+              <a:rPr lang="en-US" sz="2400" dirty="0">
                 <a:latin typeface="Times New Roman" pitchFamily="18" charset="0"/>
                 <a:cs typeface="Times New Roman" pitchFamily="18" charset="0"/>
               </a:rPr>
@@ -6922,7 +6641,7 @@
           </a:p>
           <a:p>
             <a:r>
-              <a:rPr lang="en-US" sz="2400" dirty="0" smtClean="0">
+              <a:rPr lang="en-US" sz="2400" dirty="0">
                 <a:latin typeface="Times New Roman" pitchFamily="18" charset="0"/>
                 <a:cs typeface="Times New Roman" pitchFamily="18" charset="0"/>
               </a:rPr>
@@ -6931,7 +6650,7 @@
           </a:p>
           <a:p>
             <a:r>
-              <a:rPr lang="en-US" sz="2400" dirty="0" smtClean="0">
+              <a:rPr lang="en-US" sz="2400" dirty="0">
                 <a:latin typeface="Times New Roman" pitchFamily="18" charset="0"/>
                 <a:cs typeface="Times New Roman" pitchFamily="18" charset="0"/>
               </a:rPr>
@@ -6940,7 +6659,7 @@
           </a:p>
           <a:p>
             <a:r>
-              <a:rPr lang="en-US" sz="2400" dirty="0" smtClean="0">
+              <a:rPr lang="en-US" sz="2400" dirty="0">
                 <a:latin typeface="Times New Roman" pitchFamily="18" charset="0"/>
                 <a:cs typeface="Times New Roman" pitchFamily="18" charset="0"/>
               </a:rPr>
@@ -6949,7 +6668,7 @@
           </a:p>
           <a:p>
             <a:r>
-              <a:rPr lang="en-US" sz="2400" dirty="0" smtClean="0">
+              <a:rPr lang="en-US" sz="2400" dirty="0">
                 <a:latin typeface="Times New Roman" pitchFamily="18" charset="0"/>
                 <a:cs typeface="Times New Roman" pitchFamily="18" charset="0"/>
               </a:rPr>
@@ -6958,7 +6677,7 @@
           </a:p>
           <a:p>
             <a:r>
-              <a:rPr lang="en-US" sz="2400" dirty="0" smtClean="0">
+              <a:rPr lang="en-US" sz="2400" dirty="0">
                 <a:latin typeface="Times New Roman" pitchFamily="18" charset="0"/>
                 <a:cs typeface="Times New Roman" pitchFamily="18" charset="0"/>
               </a:rPr>
@@ -6967,7 +6686,7 @@
           </a:p>
           <a:p>
             <a:r>
-              <a:rPr lang="en-US" sz="2400" dirty="0" smtClean="0">
+              <a:rPr lang="en-US" sz="2400" dirty="0">
                 <a:latin typeface="Times New Roman" pitchFamily="18" charset="0"/>
                 <a:cs typeface="Times New Roman" pitchFamily="18" charset="0"/>
               </a:rPr>
@@ -6976,7 +6695,7 @@
           </a:p>
           <a:p>
             <a:r>
-              <a:rPr lang="en-US" sz="2400" dirty="0" smtClean="0">
+              <a:rPr lang="en-US" sz="2400" dirty="0">
                 <a:latin typeface="Times New Roman" pitchFamily="18" charset="0"/>
                 <a:cs typeface="Times New Roman" pitchFamily="18" charset="0"/>
               </a:rPr>
@@ -7045,7 +6764,7 @@
               <a:buNone/>
             </a:pPr>
             <a:r>
-              <a:rPr lang="en-US" sz="3800" b="1" u="sng" dirty="0" smtClean="0">
+              <a:rPr lang="en-US" sz="3800" b="1" u="sng" dirty="0">
                 <a:latin typeface="Times New Roman" pitchFamily="18" charset="0"/>
                 <a:cs typeface="Times New Roman" pitchFamily="18" charset="0"/>
               </a:rPr>
@@ -7057,7 +6776,7 @@
               <a:buNone/>
             </a:pPr>
             <a:r>
-              <a:rPr lang="en-US" sz="3800" b="1" u="sng" dirty="0" smtClean="0">
+              <a:rPr lang="en-US" sz="3800" b="1" u="sng" dirty="0">
                 <a:latin typeface="Times New Roman" pitchFamily="18" charset="0"/>
                 <a:cs typeface="Times New Roman" pitchFamily="18" charset="0"/>
               </a:rPr>
@@ -7069,7 +6788,7 @@
               <a:buNone/>
             </a:pPr>
             <a:r>
-              <a:rPr lang="en-US" sz="3800" dirty="0" smtClean="0">
+              <a:rPr lang="en-US" sz="3800" dirty="0">
                 <a:latin typeface="Times New Roman" pitchFamily="18" charset="0"/>
                 <a:cs typeface="Times New Roman" pitchFamily="18" charset="0"/>
               </a:rPr>
@@ -7081,26 +6800,19 @@
               <a:buNone/>
             </a:pPr>
             <a:r>
-              <a:rPr lang="en-US" sz="3800" b="1" dirty="0" smtClean="0">
-                <a:latin typeface="Times New Roman" pitchFamily="18" charset="0"/>
-                <a:cs typeface="Times New Roman" pitchFamily="18" charset="0"/>
-              </a:rPr>
-              <a:t>	Best </a:t>
-            </a:r>
-            <a:r>
-              <a:rPr lang="en-US" sz="3800" b="1" dirty="0" smtClean="0">
-                <a:latin typeface="Times New Roman" pitchFamily="18" charset="0"/>
-                <a:cs typeface="Times New Roman" pitchFamily="18" charset="0"/>
-              </a:rPr>
-              <a:t>for WHAT?</a:t>
-            </a:r>
-          </a:p>
-          <a:p>
-            <a:pPr>
-              <a:buNone/>
-            </a:pPr>
-            <a:r>
-              <a:rPr lang="en-US" sz="3800" dirty="0" smtClean="0">
+              <a:rPr lang="en-US" sz="3800" b="1" dirty="0">
+                <a:latin typeface="Times New Roman" pitchFamily="18" charset="0"/>
+                <a:cs typeface="Times New Roman" pitchFamily="18" charset="0"/>
+              </a:rPr>
+              <a:t>	Best for WHAT?</a:t>
+            </a:r>
+          </a:p>
+          <a:p>
+            <a:pPr>
+              <a:buNone/>
+            </a:pPr>
+            <a:r>
+              <a:rPr lang="en-US" sz="3800" dirty="0">
                 <a:latin typeface="Times New Roman" pitchFamily="18" charset="0"/>
                 <a:cs typeface="Times New Roman" pitchFamily="18" charset="0"/>
               </a:rPr>
@@ -7109,7 +6821,7 @@
           </a:p>
           <a:p>
             <a:r>
-              <a:rPr lang="en-US" sz="3800" dirty="0" smtClean="0">
+              <a:rPr lang="en-US" sz="3800" dirty="0">
                 <a:latin typeface="Times New Roman" pitchFamily="18" charset="0"/>
                 <a:cs typeface="Times New Roman" pitchFamily="18" charset="0"/>
               </a:rPr>
@@ -7118,7 +6830,7 @@
           </a:p>
           <a:p>
             <a:r>
-              <a:rPr lang="en-US" sz="3800" dirty="0" smtClean="0">
+              <a:rPr lang="en-US" sz="3800" dirty="0">
                 <a:latin typeface="Times New Roman" pitchFamily="18" charset="0"/>
                 <a:cs typeface="Times New Roman" pitchFamily="18" charset="0"/>
               </a:rPr>
@@ -7127,7 +6839,7 @@
           </a:p>
           <a:p>
             <a:r>
-              <a:rPr lang="en-US" sz="3800" dirty="0" smtClean="0">
+              <a:rPr lang="en-US" sz="3800" dirty="0">
                 <a:latin typeface="Times New Roman" pitchFamily="18" charset="0"/>
                 <a:cs typeface="Times New Roman" pitchFamily="18" charset="0"/>
               </a:rPr>
@@ -7136,7 +6848,7 @@
           </a:p>
           <a:p>
             <a:r>
-              <a:rPr lang="en-US" sz="3800" dirty="0" smtClean="0">
+              <a:rPr lang="en-US" sz="3800" dirty="0">
                 <a:latin typeface="Times New Roman" pitchFamily="18" charset="0"/>
                 <a:cs typeface="Times New Roman" pitchFamily="18" charset="0"/>
               </a:rPr>
@@ -7145,7 +6857,7 @@
           </a:p>
           <a:p>
             <a:r>
-              <a:rPr lang="en-US" sz="3800" dirty="0" smtClean="0">
+              <a:rPr lang="en-US" sz="3800" dirty="0">
                 <a:latin typeface="Times New Roman" pitchFamily="18" charset="0"/>
                 <a:cs typeface="Times New Roman" pitchFamily="18" charset="0"/>
               </a:rPr>
@@ -7154,7 +6866,7 @@
           </a:p>
           <a:p>
             <a:r>
-              <a:rPr lang="en-US" sz="3800" dirty="0" smtClean="0">
+              <a:rPr lang="en-US" sz="3800" dirty="0">
                 <a:latin typeface="Times New Roman" pitchFamily="18" charset="0"/>
                 <a:cs typeface="Times New Roman" pitchFamily="18" charset="0"/>
               </a:rPr>
@@ -7163,7 +6875,7 @@
           </a:p>
           <a:p>
             <a:r>
-              <a:rPr lang="en-US" sz="3800" dirty="0" smtClean="0">
+              <a:rPr lang="en-US" sz="3800" dirty="0">
                 <a:latin typeface="Times New Roman" pitchFamily="18" charset="0"/>
                 <a:cs typeface="Times New Roman" pitchFamily="18" charset="0"/>
               </a:rPr>
@@ -7172,7 +6884,7 @@
           </a:p>
           <a:p>
             <a:r>
-              <a:rPr lang="en-US" sz="3800" dirty="0" smtClean="0">
+              <a:rPr lang="en-US" sz="3800" dirty="0">
                 <a:latin typeface="Times New Roman" pitchFamily="18" charset="0"/>
                 <a:cs typeface="Times New Roman" pitchFamily="18" charset="0"/>
               </a:rPr>
@@ -7181,7 +6893,7 @@
           </a:p>
           <a:p>
             <a:r>
-              <a:rPr lang="en-US" sz="3800" dirty="0" smtClean="0">
+              <a:rPr lang="en-US" sz="3800" dirty="0">
                 <a:latin typeface="Times New Roman" pitchFamily="18" charset="0"/>
                 <a:cs typeface="Times New Roman" pitchFamily="18" charset="0"/>
               </a:rPr>
@@ -7190,7 +6902,7 @@
           </a:p>
           <a:p>
             <a:r>
-              <a:rPr lang="en-US" sz="3800" dirty="0" smtClean="0">
+              <a:rPr lang="en-US" sz="3800" dirty="0">
                 <a:latin typeface="Times New Roman" pitchFamily="18" charset="0"/>
                 <a:cs typeface="Times New Roman" pitchFamily="18" charset="0"/>
               </a:rPr>
@@ -7202,7 +6914,7 @@
               <a:buNone/>
             </a:pPr>
             <a:r>
-              <a:rPr lang="en-US" sz="3800" b="1" dirty="0" smtClean="0">
+              <a:rPr lang="en-US" sz="3800" b="1" dirty="0">
                 <a:latin typeface="Times New Roman" pitchFamily="18" charset="0"/>
                 <a:cs typeface="Times New Roman" pitchFamily="18" charset="0"/>
               </a:rPr>
@@ -7214,18 +6926,11 @@
               <a:buNone/>
             </a:pPr>
             <a:r>
-              <a:rPr lang="en-US" sz="3800" b="1" dirty="0" smtClean="0">
-                <a:latin typeface="Times New Roman" pitchFamily="18" charset="0"/>
-                <a:cs typeface="Times New Roman" pitchFamily="18" charset="0"/>
-              </a:rPr>
-              <a:t>		There </a:t>
-            </a:r>
-            <a:r>
-              <a:rPr lang="en-US" sz="3800" b="1" dirty="0" smtClean="0">
-                <a:latin typeface="Times New Roman" pitchFamily="18" charset="0"/>
-                <a:cs typeface="Times New Roman" pitchFamily="18" charset="0"/>
-              </a:rPr>
-              <a:t>is no universally best LLM. There is a model that is appropriate for a particular task and constraint.</a:t>
+              <a:rPr lang="en-US" sz="3800" b="1" dirty="0">
+                <a:latin typeface="Times New Roman" pitchFamily="18" charset="0"/>
+                <a:cs typeface="Times New Roman" pitchFamily="18" charset="0"/>
+              </a:rPr>
+              <a:t>		There is no universally best LLM. There is a model that is appropriate for a particular task and constraint.</a:t>
             </a:r>
             <a:endParaRPr lang="en-US" sz="3800" dirty="0">
               <a:latin typeface="Times New Roman" pitchFamily="18" charset="0"/>
@@ -7283,7 +6988,7 @@
               <a:buNone/>
             </a:pPr>
             <a:r>
-              <a:rPr lang="en-US" sz="2800" b="1" dirty="0" smtClean="0">
+              <a:rPr lang="en-US" sz="2800" b="1" dirty="0">
                 <a:latin typeface="Times New Roman" pitchFamily="18" charset="0"/>
                 <a:cs typeface="Times New Roman" pitchFamily="18" charset="0"/>
               </a:rPr>
@@ -7317,10 +7022,34 @@
                 <a:tableStyleId>{5C22544A-7EE6-4342-B048-85BDC9FD1C3A}</a:tableStyleId>
               </a:tblPr>
               <a:tblGrid>
-                <a:gridCol w="1962150"/>
-                <a:gridCol w="1962150"/>
-                <a:gridCol w="1962150"/>
-                <a:gridCol w="1962150"/>
+                <a:gridCol w="1962150">
+                  <a:extLst>
+                    <a:ext uri="{9D8B030D-6E8A-4147-A177-3AD203B41FA5}">
+                      <a16:colId xmlns:a16="http://schemas.microsoft.com/office/drawing/2014/main" val="20000"/>
+                    </a:ext>
+                  </a:extLst>
+                </a:gridCol>
+                <a:gridCol w="1962150">
+                  <a:extLst>
+                    <a:ext uri="{9D8B030D-6E8A-4147-A177-3AD203B41FA5}">
+                      <a16:colId xmlns:a16="http://schemas.microsoft.com/office/drawing/2014/main" val="20001"/>
+                    </a:ext>
+                  </a:extLst>
+                </a:gridCol>
+                <a:gridCol w="1962150">
+                  <a:extLst>
+                    <a:ext uri="{9D8B030D-6E8A-4147-A177-3AD203B41FA5}">
+                      <a16:colId xmlns:a16="http://schemas.microsoft.com/office/drawing/2014/main" val="20002"/>
+                    </a:ext>
+                  </a:extLst>
+                </a:gridCol>
+                <a:gridCol w="1962150">
+                  <a:extLst>
+                    <a:ext uri="{9D8B030D-6E8A-4147-A177-3AD203B41FA5}">
+                      <a16:colId xmlns:a16="http://schemas.microsoft.com/office/drawing/2014/main" val="20003"/>
+                    </a:ext>
+                  </a:extLst>
+                </a:gridCol>
               </a:tblGrid>
               <a:tr h="545322">
                 <a:tc>
@@ -7387,6 +7116,11 @@
                   </a:txBody>
                   <a:tcPr anchor="ctr"/>
                 </a:tc>
+                <a:extLst>
+                  <a:ext uri="{0D108BD9-81ED-4DB2-BD59-A6C34878D82A}">
+                    <a16:rowId xmlns:a16="http://schemas.microsoft.com/office/drawing/2014/main" val="10000"/>
+                  </a:ext>
+                </a:extLst>
               </a:tr>
               <a:tr h="545322">
                 <a:tc>
@@ -7444,6 +7178,11 @@
                   </a:txBody>
                   <a:tcPr anchor="ctr"/>
                 </a:tc>
+                <a:extLst>
+                  <a:ext uri="{0D108BD9-81ED-4DB2-BD59-A6C34878D82A}">
+                    <a16:rowId xmlns:a16="http://schemas.microsoft.com/office/drawing/2014/main" val="10001"/>
+                  </a:ext>
+                </a:extLst>
               </a:tr>
               <a:tr h="545322">
                 <a:tc>
@@ -7501,6 +7240,11 @@
                   </a:txBody>
                   <a:tcPr anchor="ctr"/>
                 </a:tc>
+                <a:extLst>
+                  <a:ext uri="{0D108BD9-81ED-4DB2-BD59-A6C34878D82A}">
+                    <a16:rowId xmlns:a16="http://schemas.microsoft.com/office/drawing/2014/main" val="10002"/>
+                  </a:ext>
+                </a:extLst>
               </a:tr>
               <a:tr h="545322">
                 <a:tc>
@@ -7558,6 +7302,11 @@
                   </a:txBody>
                   <a:tcPr anchor="ctr"/>
                 </a:tc>
+                <a:extLst>
+                  <a:ext uri="{0D108BD9-81ED-4DB2-BD59-A6C34878D82A}">
+                    <a16:rowId xmlns:a16="http://schemas.microsoft.com/office/drawing/2014/main" val="10003"/>
+                  </a:ext>
+                </a:extLst>
               </a:tr>
               <a:tr h="545322">
                 <a:tc>
@@ -7615,6 +7364,11 @@
                   </a:txBody>
                   <a:tcPr anchor="ctr"/>
                 </a:tc>
+                <a:extLst>
+                  <a:ext uri="{0D108BD9-81ED-4DB2-BD59-A6C34878D82A}">
+                    <a16:rowId xmlns:a16="http://schemas.microsoft.com/office/drawing/2014/main" val="10004"/>
+                  </a:ext>
+                </a:extLst>
               </a:tr>
               <a:tr h="545322">
                 <a:tc>
@@ -7672,6 +7426,11 @@
                   </a:txBody>
                   <a:tcPr anchor="ctr"/>
                 </a:tc>
+                <a:extLst>
+                  <a:ext uri="{0D108BD9-81ED-4DB2-BD59-A6C34878D82A}">
+                    <a16:rowId xmlns:a16="http://schemas.microsoft.com/office/drawing/2014/main" val="10005"/>
+                  </a:ext>
+                </a:extLst>
               </a:tr>
               <a:tr h="545322">
                 <a:tc>
@@ -7729,6 +7488,11 @@
                   </a:txBody>
                   <a:tcPr anchor="ctr"/>
                 </a:tc>
+                <a:extLst>
+                  <a:ext uri="{0D108BD9-81ED-4DB2-BD59-A6C34878D82A}">
+                    <a16:rowId xmlns:a16="http://schemas.microsoft.com/office/drawing/2014/main" val="10006"/>
+                  </a:ext>
+                </a:extLst>
               </a:tr>
               <a:tr h="545322">
                 <a:tc>
@@ -7786,6 +7550,11 @@
                   </a:txBody>
                   <a:tcPr anchor="ctr"/>
                 </a:tc>
+                <a:extLst>
+                  <a:ext uri="{0D108BD9-81ED-4DB2-BD59-A6C34878D82A}">
+                    <a16:rowId xmlns:a16="http://schemas.microsoft.com/office/drawing/2014/main" val="10007"/>
+                  </a:ext>
+                </a:extLst>
               </a:tr>
               <a:tr h="981581">
                 <a:tc>
@@ -7843,6 +7612,11 @@
                   </a:txBody>
                   <a:tcPr anchor="ctr"/>
                 </a:tc>
+                <a:extLst>
+                  <a:ext uri="{0D108BD9-81ED-4DB2-BD59-A6C34878D82A}">
+                    <a16:rowId xmlns:a16="http://schemas.microsoft.com/office/drawing/2014/main" val="10008"/>
+                  </a:ext>
+                </a:extLst>
               </a:tr>
             </a:tbl>
           </a:graphicData>
@@ -7870,7 +7644,7 @@
           <a:lstStyle/>
           <a:p>
             <a:r>
-              <a:rPr lang="en-US" sz="2400" b="1" dirty="0" smtClean="0">
+              <a:rPr lang="en-US" sz="2400" b="1" dirty="0">
                 <a:latin typeface="Times New Roman" pitchFamily="18" charset="0"/>
                 <a:cs typeface="Times New Roman" pitchFamily="18" charset="0"/>
               </a:rPr>
@@ -7879,51 +7653,12 @@
           </a:p>
           <a:p>
             <a:r>
-              <a:rPr lang="en-US" sz="2400" dirty="0" smtClean="0">
-                <a:latin typeface="Times New Roman" pitchFamily="18" charset="0"/>
-                <a:cs typeface="Times New Roman" pitchFamily="18" charset="0"/>
-              </a:rPr>
-              <a:t>fill </a:t>
-            </a:r>
-            <a:r>
-              <a:rPr lang="en-US" sz="2400" dirty="0" smtClean="0">
-                <a:latin typeface="Times New Roman" pitchFamily="18" charset="0"/>
-                <a:cs typeface="Times New Roman" pitchFamily="18" charset="0"/>
-              </a:rPr>
-              <a:t>it using </a:t>
-            </a:r>
-            <a:r>
-              <a:rPr lang="en-US" sz="2400" dirty="0" smtClean="0">
-                <a:latin typeface="Times New Roman" pitchFamily="18" charset="0"/>
-                <a:cs typeface="Times New Roman" pitchFamily="18" charset="0"/>
-              </a:rPr>
-              <a:t>you</a:t>
-            </a:r>
-            <a:r>
-              <a:rPr lang="en-US" sz="2400" dirty="0" smtClean="0">
-                <a:latin typeface="Times New Roman" pitchFamily="18" charset="0"/>
-                <a:cs typeface="Times New Roman" pitchFamily="18" charset="0"/>
-              </a:rPr>
-              <a:t>r </a:t>
-            </a:r>
-            <a:r>
-              <a:rPr lang="en-US" sz="2400" dirty="0" smtClean="0">
-                <a:latin typeface="Times New Roman" pitchFamily="18" charset="0"/>
-                <a:cs typeface="Times New Roman" pitchFamily="18" charset="0"/>
-              </a:rPr>
-              <a:t>own experiments</a:t>
-            </a:r>
-            <a:r>
-              <a:rPr lang="en-US" sz="2400" dirty="0" smtClean="0">
-                <a:latin typeface="Times New Roman" pitchFamily="18" charset="0"/>
-                <a:cs typeface="Times New Roman" pitchFamily="18" charset="0"/>
-              </a:rPr>
-              <a:t>.</a:t>
-            </a:r>
-            <a:endParaRPr lang="en-US" sz="2400" dirty="0" smtClean="0">
-              <a:latin typeface="Times New Roman" pitchFamily="18" charset="0"/>
-              <a:cs typeface="Times New Roman" pitchFamily="18" charset="0"/>
-            </a:endParaRPr>
+              <a:rPr lang="en-US" sz="2400" dirty="0">
+                <a:latin typeface="Times New Roman" pitchFamily="18" charset="0"/>
+                <a:cs typeface="Times New Roman" pitchFamily="18" charset="0"/>
+              </a:rPr>
+              <a:t>fill it using your own experiments.</a:t>
+            </a:r>
           </a:p>
         </p:txBody>
       </p:sp>
@@ -7978,7 +7713,7 @@
               <a:buNone/>
             </a:pPr>
             <a:r>
-              <a:rPr lang="en-US" sz="2800" b="1" u="sng" dirty="0" smtClean="0">
+              <a:rPr lang="en-US" sz="2800" b="1" u="sng" dirty="0">
                 <a:latin typeface="Times New Roman" pitchFamily="18" charset="0"/>
                 <a:cs typeface="Times New Roman" pitchFamily="18" charset="0"/>
               </a:rPr>
@@ -7990,7 +7725,7 @@
               <a:buNone/>
             </a:pPr>
             <a:r>
-              <a:rPr lang="en-US" sz="2800" b="1" u="sng" dirty="0" smtClean="0">
+              <a:rPr lang="en-US" sz="2800" b="1" u="sng" dirty="0">
                 <a:latin typeface="Times New Roman" pitchFamily="18" charset="0"/>
                 <a:cs typeface="Times New Roman" pitchFamily="18" charset="0"/>
               </a:rPr>
@@ -8002,7 +7737,7 @@
               <a:buNone/>
             </a:pPr>
             <a:r>
-              <a:rPr lang="en-US" sz="2400" b="1" dirty="0" smtClean="0">
+              <a:rPr lang="en-US" sz="2400" b="1" dirty="0">
                 <a:latin typeface="Times New Roman" pitchFamily="18" charset="0"/>
                 <a:cs typeface="Times New Roman" pitchFamily="18" charset="0"/>
               </a:rPr>
@@ -8014,20 +7749,13 @@
               <a:buNone/>
             </a:pPr>
             <a:r>
-              <a:rPr lang="en-US" sz="2400" b="1" dirty="0" smtClean="0">
-                <a:latin typeface="Times New Roman" pitchFamily="18" charset="0"/>
-                <a:cs typeface="Times New Roman" pitchFamily="18" charset="0"/>
-              </a:rPr>
-              <a:t>			"</a:t>
-            </a:r>
-            <a:r>
-              <a:rPr lang="en-US" sz="2400" b="1" dirty="0" smtClean="0">
-                <a:latin typeface="Times New Roman" pitchFamily="18" charset="0"/>
-                <a:cs typeface="Times New Roman" pitchFamily="18" charset="0"/>
-              </a:rPr>
-              <a:t>Explain Artificial Intelligence to a BCA 3rd-year student in exactly 100 words using a real-world example."</a:t>
-            </a:r>
-            <a:endParaRPr lang="en-US" sz="2400" dirty="0" smtClean="0">
+              <a:rPr lang="en-US" sz="2400" b="1" dirty="0">
+                <a:latin typeface="Times New Roman" pitchFamily="18" charset="0"/>
+                <a:cs typeface="Times New Roman" pitchFamily="18" charset="0"/>
+              </a:rPr>
+              <a:t>			"Explain Artificial Intelligence to a BCA 3rd-year student in exactly 100 words using a real-world example."</a:t>
+            </a:r>
+            <a:endParaRPr lang="en-US" sz="2400" dirty="0">
               <a:latin typeface="Times New Roman" pitchFamily="18" charset="0"/>
               <a:cs typeface="Times New Roman" pitchFamily="18" charset="0"/>
             </a:endParaRPr>
@@ -8037,7 +7765,7 @@
               <a:buNone/>
             </a:pPr>
             <a:r>
-              <a:rPr lang="en-US" sz="2400" dirty="0" smtClean="0">
+              <a:rPr lang="en-US" sz="2400" dirty="0">
                 <a:latin typeface="Times New Roman" pitchFamily="18" charset="0"/>
                 <a:cs typeface="Times New Roman" pitchFamily="18" charset="0"/>
               </a:rPr>
@@ -8046,7 +7774,7 @@
           </a:p>
           <a:p>
             <a:r>
-              <a:rPr lang="en-US" sz="2400" dirty="0" smtClean="0">
+              <a:rPr lang="en-US" sz="2400" dirty="0">
                 <a:latin typeface="Times New Roman" pitchFamily="18" charset="0"/>
                 <a:cs typeface="Times New Roman" pitchFamily="18" charset="0"/>
               </a:rPr>
@@ -8055,7 +7783,7 @@
           </a:p>
           <a:p>
             <a:r>
-              <a:rPr lang="en-US" sz="2400" dirty="0" smtClean="0">
+              <a:rPr lang="en-US" sz="2400" dirty="0">
                 <a:latin typeface="Times New Roman" pitchFamily="18" charset="0"/>
                 <a:cs typeface="Times New Roman" pitchFamily="18" charset="0"/>
               </a:rPr>
@@ -8064,7 +7792,7 @@
           </a:p>
           <a:p>
             <a:r>
-              <a:rPr lang="en-US" sz="2400" dirty="0" smtClean="0">
+              <a:rPr lang="en-US" sz="2400" dirty="0">
                 <a:latin typeface="Times New Roman" pitchFamily="18" charset="0"/>
                 <a:cs typeface="Times New Roman" pitchFamily="18" charset="0"/>
               </a:rPr>
@@ -8073,7 +7801,7 @@
           </a:p>
           <a:p>
             <a:r>
-              <a:rPr lang="en-US" sz="2400" dirty="0" smtClean="0">
+              <a:rPr lang="en-US" sz="2400" dirty="0">
                 <a:latin typeface="Times New Roman" pitchFamily="18" charset="0"/>
                 <a:cs typeface="Times New Roman" pitchFamily="18" charset="0"/>
               </a:rPr>
@@ -8082,7 +7810,7 @@
           </a:p>
           <a:p>
             <a:r>
-              <a:rPr lang="en-US" sz="2400" dirty="0" smtClean="0">
+              <a:rPr lang="en-US" sz="2400" dirty="0">
                 <a:latin typeface="Times New Roman" pitchFamily="18" charset="0"/>
                 <a:cs typeface="Times New Roman" pitchFamily="18" charset="0"/>
               </a:rPr>
@@ -8091,13 +7819,13 @@
           </a:p>
           <a:p>
             <a:r>
-              <a:rPr lang="en-US" sz="2400" dirty="0" smtClean="0">
+              <a:rPr lang="en-US" sz="2400" dirty="0">
                 <a:latin typeface="Times New Roman" pitchFamily="18" charset="0"/>
                 <a:cs typeface="Times New Roman" pitchFamily="18" charset="0"/>
               </a:rPr>
               <a:t>Qwen </a:t>
             </a:r>
-            <a:endParaRPr lang="en-US" sz="2600" dirty="0" smtClean="0">
+            <a:endParaRPr lang="en-US" sz="2600" dirty="0">
               <a:latin typeface="Times New Roman" pitchFamily="18" charset="0"/>
               <a:cs typeface="Times New Roman" pitchFamily="18" charset="0"/>
             </a:endParaRPr>
@@ -8155,7 +7883,7 @@
               <a:buNone/>
             </a:pPr>
             <a:r>
-              <a:rPr lang="en-US" sz="2400" dirty="0" smtClean="0">
+              <a:rPr lang="en-US" sz="2400" dirty="0">
                 <a:latin typeface="Times New Roman" pitchFamily="18" charset="0"/>
                 <a:cs typeface="Times New Roman" pitchFamily="18" charset="0"/>
               </a:rPr>
@@ -8164,7 +7892,7 @@
           </a:p>
           <a:p>
             <a:r>
-              <a:rPr lang="en-US" sz="2400" dirty="0" smtClean="0">
+              <a:rPr lang="en-US" sz="2400" dirty="0">
                 <a:latin typeface="Times New Roman" pitchFamily="18" charset="0"/>
                 <a:cs typeface="Times New Roman" pitchFamily="18" charset="0"/>
               </a:rPr>
@@ -8173,7 +7901,7 @@
           </a:p>
           <a:p>
             <a:r>
-              <a:rPr lang="en-US" sz="2400" dirty="0" smtClean="0">
+              <a:rPr lang="en-US" sz="2400" dirty="0">
                 <a:latin typeface="Times New Roman" pitchFamily="18" charset="0"/>
                 <a:cs typeface="Times New Roman" pitchFamily="18" charset="0"/>
               </a:rPr>
@@ -8182,7 +7910,7 @@
           </a:p>
           <a:p>
             <a:r>
-              <a:rPr lang="en-US" sz="2400" dirty="0" smtClean="0">
+              <a:rPr lang="en-US" sz="2400" dirty="0">
                 <a:latin typeface="Times New Roman" pitchFamily="18" charset="0"/>
                 <a:cs typeface="Times New Roman" pitchFamily="18" charset="0"/>
               </a:rPr>
@@ -8191,7 +7919,7 @@
           </a:p>
           <a:p>
             <a:r>
-              <a:rPr lang="en-US" sz="2400" dirty="0" smtClean="0">
+              <a:rPr lang="en-US" sz="2400" dirty="0">
                 <a:latin typeface="Times New Roman" pitchFamily="18" charset="0"/>
                 <a:cs typeface="Times New Roman" pitchFamily="18" charset="0"/>
               </a:rPr>
@@ -8200,16 +7928,12 @@
           </a:p>
           <a:p>
             <a:r>
-              <a:rPr lang="en-US" sz="2400" dirty="0" smtClean="0">
+              <a:rPr lang="en-US" sz="2400" dirty="0">
                 <a:latin typeface="Times New Roman" pitchFamily="18" charset="0"/>
                 <a:cs typeface="Times New Roman" pitchFamily="18" charset="0"/>
               </a:rPr>
               <a:t>Structure</a:t>
             </a:r>
-            <a:endParaRPr lang="en-US" sz="2400" dirty="0">
-              <a:latin typeface="Times New Roman" pitchFamily="18" charset="0"/>
-              <a:cs typeface="Times New Roman" pitchFamily="18" charset="0"/>
-            </a:endParaRPr>
           </a:p>
         </p:txBody>
       </p:sp>
@@ -8264,7 +7988,7 @@
               <a:buNone/>
             </a:pPr>
             <a:r>
-              <a:rPr lang="en-US" b="1" u="sng" dirty="0" smtClean="0">
+              <a:rPr lang="en-US" b="1" u="sng" dirty="0">
                 <a:latin typeface="Times New Roman" pitchFamily="18" charset="0"/>
                 <a:cs typeface="Times New Roman" pitchFamily="18" charset="0"/>
               </a:rPr>
@@ -8276,7 +8000,7 @@
               <a:buNone/>
             </a:pPr>
             <a:r>
-              <a:rPr lang="en-US" b="1" u="sng" dirty="0" smtClean="0">
+              <a:rPr lang="en-US" b="1" u="sng" dirty="0">
                 <a:latin typeface="Times New Roman" pitchFamily="18" charset="0"/>
                 <a:cs typeface="Times New Roman" pitchFamily="18" charset="0"/>
               </a:rPr>
@@ -8287,7 +8011,7 @@
             <a:pPr>
               <a:buNone/>
             </a:pPr>
-            <a:endParaRPr lang="en-US" b="1" u="sng" dirty="0" smtClean="0">
+            <a:endParaRPr lang="en-US" b="1" u="sng" dirty="0">
               <a:latin typeface="Times New Roman" pitchFamily="18" charset="0"/>
               <a:cs typeface="Times New Roman" pitchFamily="18" charset="0"/>
             </a:endParaRPr>
@@ -8297,7 +8021,7 @@
               <a:buNone/>
             </a:pPr>
             <a:r>
-              <a:rPr lang="en-US" sz="2400" dirty="0" smtClean="0">
+              <a:rPr lang="en-US" sz="2400" dirty="0">
                 <a:latin typeface="Times New Roman" pitchFamily="18" charset="0"/>
                 <a:cs typeface="Times New Roman" pitchFamily="18" charset="0"/>
               </a:rPr>
@@ -8307,7 +8031,7 @@
           <a:p>
             <a:pPr lvl="1"/>
             <a:r>
-              <a:rPr lang="en-US" sz="2400" dirty="0" smtClean="0">
+              <a:rPr lang="en-US" sz="2400" dirty="0">
                 <a:latin typeface="Times New Roman" pitchFamily="18" charset="0"/>
                 <a:cs typeface="Times New Roman" pitchFamily="18" charset="0"/>
               </a:rPr>
@@ -8317,7 +8041,7 @@
           <a:p>
             <a:pPr lvl="1"/>
             <a:r>
-              <a:rPr lang="en-US" sz="2400" dirty="0" smtClean="0">
+              <a:rPr lang="en-US" sz="2400" dirty="0">
                 <a:latin typeface="Times New Roman" pitchFamily="18" charset="0"/>
                 <a:cs typeface="Times New Roman" pitchFamily="18" charset="0"/>
               </a:rPr>
@@ -8327,7 +8051,7 @@
           <a:p>
             <a:pPr lvl="1"/>
             <a:r>
-              <a:rPr lang="en-US" sz="2400" dirty="0" smtClean="0">
+              <a:rPr lang="en-US" sz="2400" dirty="0">
                 <a:latin typeface="Times New Roman" pitchFamily="18" charset="0"/>
                 <a:cs typeface="Times New Roman" pitchFamily="18" charset="0"/>
               </a:rPr>
@@ -8337,7 +8061,7 @@
           <a:p>
             <a:pPr lvl="1"/>
             <a:r>
-              <a:rPr lang="en-US" sz="2400" dirty="0" smtClean="0">
+              <a:rPr lang="en-US" sz="2400" dirty="0">
                 <a:latin typeface="Times New Roman" pitchFamily="18" charset="0"/>
                 <a:cs typeface="Times New Roman" pitchFamily="18" charset="0"/>
               </a:rPr>
@@ -8347,7 +8071,7 @@
           <a:p>
             <a:pPr lvl="1"/>
             <a:r>
-              <a:rPr lang="en-US" sz="2400" dirty="0" smtClean="0">
+              <a:rPr lang="en-US" sz="2400" dirty="0">
                 <a:latin typeface="Times New Roman" pitchFamily="18" charset="0"/>
                 <a:cs typeface="Times New Roman" pitchFamily="18" charset="0"/>
               </a:rPr>
@@ -8357,7 +8081,7 @@
           <a:p>
             <a:pPr lvl="1"/>
             <a:r>
-              <a:rPr lang="en-US" sz="2400" dirty="0" smtClean="0">
+              <a:rPr lang="en-US" sz="2400" dirty="0">
                 <a:latin typeface="Times New Roman" pitchFamily="18" charset="0"/>
                 <a:cs typeface="Times New Roman" pitchFamily="18" charset="0"/>
               </a:rPr>
@@ -8415,7 +8139,7 @@
               <a:buNone/>
             </a:pPr>
             <a:r>
-              <a:rPr lang="en-US" sz="2800" b="1" u="sng" dirty="0" smtClean="0">
+              <a:rPr lang="en-US" sz="2800" b="1" u="sng" dirty="0">
                 <a:latin typeface="Times New Roman" pitchFamily="18" charset="0"/>
                 <a:cs typeface="Times New Roman" pitchFamily="18" charset="0"/>
               </a:rPr>
@@ -8427,21 +8151,21 @@
               <a:buNone/>
             </a:pPr>
             <a:r>
-              <a:rPr lang="en-US" sz="2400" dirty="0" smtClean="0">
+              <a:rPr lang="en-US" sz="2400" dirty="0">
                 <a:latin typeface="Times New Roman" pitchFamily="18" charset="0"/>
                 <a:cs typeface="Times New Roman" pitchFamily="18" charset="0"/>
               </a:rPr>
               <a:t>Give every model a score from </a:t>
             </a:r>
             <a:r>
-              <a:rPr lang="en-US" sz="2400" b="1" dirty="0" smtClean="0">
+              <a:rPr lang="en-US" sz="2400" b="1" dirty="0">
                 <a:latin typeface="Times New Roman" pitchFamily="18" charset="0"/>
                 <a:cs typeface="Times New Roman" pitchFamily="18" charset="0"/>
               </a:rPr>
               <a:t>1–5</a:t>
             </a:r>
             <a:r>
-              <a:rPr lang="en-US" sz="2400" dirty="0" smtClean="0">
+              <a:rPr lang="en-US" sz="2400" dirty="0">
                 <a:latin typeface="Times New Roman" pitchFamily="18" charset="0"/>
                 <a:cs typeface="Times New Roman" pitchFamily="18" charset="0"/>
               </a:rPr>
@@ -8475,11 +8199,41 @@
                 <a:tableStyleId>{5C22544A-7EE6-4342-B048-85BDC9FD1C3A}</a:tableStyleId>
               </a:tblPr>
               <a:tblGrid>
-                <a:gridCol w="1630680"/>
-                <a:gridCol w="1630680"/>
-                <a:gridCol w="1630680"/>
-                <a:gridCol w="1630680"/>
-                <a:gridCol w="1630680"/>
+                <a:gridCol w="1630680">
+                  <a:extLst>
+                    <a:ext uri="{9D8B030D-6E8A-4147-A177-3AD203B41FA5}">
+                      <a16:colId xmlns:a16="http://schemas.microsoft.com/office/drawing/2014/main" val="20000"/>
+                    </a:ext>
+                  </a:extLst>
+                </a:gridCol>
+                <a:gridCol w="1630680">
+                  <a:extLst>
+                    <a:ext uri="{9D8B030D-6E8A-4147-A177-3AD203B41FA5}">
+                      <a16:colId xmlns:a16="http://schemas.microsoft.com/office/drawing/2014/main" val="20001"/>
+                    </a:ext>
+                  </a:extLst>
+                </a:gridCol>
+                <a:gridCol w="1630680">
+                  <a:extLst>
+                    <a:ext uri="{9D8B030D-6E8A-4147-A177-3AD203B41FA5}">
+                      <a16:colId xmlns:a16="http://schemas.microsoft.com/office/drawing/2014/main" val="20002"/>
+                    </a:ext>
+                  </a:extLst>
+                </a:gridCol>
+                <a:gridCol w="1630680">
+                  <a:extLst>
+                    <a:ext uri="{9D8B030D-6E8A-4147-A177-3AD203B41FA5}">
+                      <a16:colId xmlns:a16="http://schemas.microsoft.com/office/drawing/2014/main" val="20003"/>
+                    </a:ext>
+                  </a:extLst>
+                </a:gridCol>
+                <a:gridCol w="1630680">
+                  <a:extLst>
+                    <a:ext uri="{9D8B030D-6E8A-4147-A177-3AD203B41FA5}">
+                      <a16:colId xmlns:a16="http://schemas.microsoft.com/office/drawing/2014/main" val="20004"/>
+                    </a:ext>
+                  </a:extLst>
+                </a:gridCol>
               </a:tblGrid>
               <a:tr h="899160">
                 <a:tc>
@@ -8566,6 +8320,11 @@
                   </a:txBody>
                   <a:tcPr anchor="ctr"/>
                 </a:tc>
+                <a:extLst>
+                  <a:ext uri="{0D108BD9-81ED-4DB2-BD59-A6C34878D82A}">
+                    <a16:rowId xmlns:a16="http://schemas.microsoft.com/office/drawing/2014/main" val="10000"/>
+                  </a:ext>
+                </a:extLst>
               </a:tr>
               <a:tr h="499533">
                 <a:tc>
@@ -8652,6 +8411,11 @@
                   </a:txBody>
                   <a:tcPr anchor="ctr"/>
                 </a:tc>
+                <a:extLst>
+                  <a:ext uri="{0D108BD9-81ED-4DB2-BD59-A6C34878D82A}">
+                    <a16:rowId xmlns:a16="http://schemas.microsoft.com/office/drawing/2014/main" val="10001"/>
+                  </a:ext>
+                </a:extLst>
               </a:tr>
               <a:tr h="499533">
                 <a:tc>
@@ -8738,6 +8502,11 @@
                   </a:txBody>
                   <a:tcPr anchor="ctr"/>
                 </a:tc>
+                <a:extLst>
+                  <a:ext uri="{0D108BD9-81ED-4DB2-BD59-A6C34878D82A}">
+                    <a16:rowId xmlns:a16="http://schemas.microsoft.com/office/drawing/2014/main" val="10002"/>
+                  </a:ext>
+                </a:extLst>
               </a:tr>
               <a:tr h="499533">
                 <a:tc>
@@ -8824,6 +8593,11 @@
                   </a:txBody>
                   <a:tcPr anchor="ctr"/>
                 </a:tc>
+                <a:extLst>
+                  <a:ext uri="{0D108BD9-81ED-4DB2-BD59-A6C34878D82A}">
+                    <a16:rowId xmlns:a16="http://schemas.microsoft.com/office/drawing/2014/main" val="10003"/>
+                  </a:ext>
+                </a:extLst>
               </a:tr>
               <a:tr h="899160">
                 <a:tc>
@@ -8910,6 +8684,11 @@
                   </a:txBody>
                   <a:tcPr anchor="ctr"/>
                 </a:tc>
+                <a:extLst>
+                  <a:ext uri="{0D108BD9-81ED-4DB2-BD59-A6C34878D82A}">
+                    <a16:rowId xmlns:a16="http://schemas.microsoft.com/office/drawing/2014/main" val="10004"/>
+                  </a:ext>
+                </a:extLst>
               </a:tr>
               <a:tr h="499533">
                 <a:tc>
@@ -8996,6 +8775,11 @@
                   </a:txBody>
                   <a:tcPr anchor="ctr"/>
                 </a:tc>
+                <a:extLst>
+                  <a:ext uri="{0D108BD9-81ED-4DB2-BD59-A6C34878D82A}">
+                    <a16:rowId xmlns:a16="http://schemas.microsoft.com/office/drawing/2014/main" val="10005"/>
+                  </a:ext>
+                </a:extLst>
               </a:tr>
               <a:tr h="499533">
                 <a:tc>
@@ -9082,6 +8866,11 @@
                   </a:txBody>
                   <a:tcPr anchor="ctr"/>
                 </a:tc>
+                <a:extLst>
+                  <a:ext uri="{0D108BD9-81ED-4DB2-BD59-A6C34878D82A}">
+                    <a16:rowId xmlns:a16="http://schemas.microsoft.com/office/drawing/2014/main" val="10006"/>
+                  </a:ext>
+                </a:extLst>
               </a:tr>
               <a:tr h="499533">
                 <a:tc>
@@ -9149,6 +8938,11 @@
                   </a:txBody>
                   <a:tcPr/>
                 </a:tc>
+                <a:extLst>
+                  <a:ext uri="{0D108BD9-81ED-4DB2-BD59-A6C34878D82A}">
+                    <a16:rowId xmlns:a16="http://schemas.microsoft.com/office/drawing/2014/main" val="10007"/>
+                  </a:ext>
+                </a:extLst>
               </a:tr>
             </a:tbl>
           </a:graphicData>
@@ -9205,7 +8999,7 @@
               <a:tabLst/>
             </a:pPr>
             <a:r>
-              <a:rPr kumimoji="0" lang="en-US" sz="2400" b="1" i="0" u="none" strike="noStrike" cap="none" normalizeH="0" baseline="0" dirty="0" smtClean="0">
+              <a:rPr kumimoji="0" lang="en-US" sz="2400" b="1" i="0" u="none" strike="noStrike" cap="none" normalizeH="0" baseline="0" dirty="0">
                 <a:ln>
                   <a:noFill/>
                 </a:ln>
@@ -9237,7 +9031,7 @@
               <a:tabLst/>
             </a:pPr>
             <a:r>
-              <a:rPr kumimoji="0" lang="en-US" sz="2400" b="0" i="0" u="none" strike="noStrike" cap="none" normalizeH="0" baseline="0" dirty="0" smtClean="0">
+              <a:rPr kumimoji="0" lang="en-US" sz="2400" b="0" i="0" u="none" strike="noStrike" cap="none" normalizeH="0" baseline="0" dirty="0">
                 <a:ln>
                   <a:noFill/>
                 </a:ln>
@@ -9251,7 +9045,7 @@
               <a:t>This is a classroom experiment, </a:t>
             </a:r>
             <a:r>
-              <a:rPr kumimoji="0" lang="en-US" sz="2400" b="1" i="0" u="none" strike="noStrike" cap="none" normalizeH="0" baseline="0" dirty="0" smtClean="0">
+              <a:rPr kumimoji="0" lang="en-US" sz="2400" b="1" i="0" u="none" strike="noStrike" cap="none" normalizeH="0" baseline="0" dirty="0">
                 <a:ln>
                   <a:noFill/>
                 </a:ln>
@@ -9265,7 +9059,7 @@
               <a:t>not a permanent ranking</a:t>
             </a:r>
             <a:r>
-              <a:rPr kumimoji="0" lang="en-US" sz="2400" b="0" i="0" u="none" strike="noStrike" cap="none" normalizeH="0" baseline="0" dirty="0" smtClean="0">
+              <a:rPr kumimoji="0" lang="en-US" sz="2400" b="0" i="0" u="none" strike="noStrike" cap="none" normalizeH="0" baseline="0" dirty="0">
                 <a:ln>
                   <a:noFill/>
                 </a:ln>
@@ -9297,7 +9091,7 @@
               <a:tabLst/>
             </a:pPr>
             <a:r>
-              <a:rPr kumimoji="0" lang="en-US" sz="2400" b="0" i="0" u="none" strike="noStrike" cap="none" normalizeH="0" baseline="0" dirty="0" smtClean="0">
+              <a:rPr kumimoji="0" lang="en-US" sz="2400" b="0" i="0" u="none" strike="noStrike" cap="none" normalizeH="0" baseline="0" dirty="0">
                 <a:ln>
                   <a:noFill/>
                 </a:ln>
@@ -9364,7 +9158,7 @@
               <a:buNone/>
             </a:pPr>
             <a:r>
-              <a:rPr lang="en-US" sz="2800" b="1" u="sng" dirty="0" smtClean="0">
+              <a:rPr lang="en-US" sz="2800" b="1" u="sng" dirty="0">
                 <a:latin typeface="Times New Roman" pitchFamily="18" charset="0"/>
                 <a:cs typeface="Times New Roman" pitchFamily="18" charset="0"/>
               </a:rPr>
@@ -9376,245 +9170,181 @@
               <a:buNone/>
             </a:pPr>
             <a:r>
-              <a:rPr lang="en-US" sz="2800" b="1" u="sng" dirty="0" smtClean="0">
-                <a:latin typeface="Times New Roman" pitchFamily="18" charset="0"/>
-                <a:cs typeface="Times New Roman" pitchFamily="18" charset="0"/>
-              </a:rPr>
-              <a:t>Slide 17 — What Is Temperature</a:t>
-            </a:r>
-            <a:r>
-              <a:rPr lang="en-US" sz="2800" b="1" u="sng" dirty="0" smtClean="0">
-                <a:latin typeface="Times New Roman" pitchFamily="18" charset="0"/>
-                <a:cs typeface="Times New Roman" pitchFamily="18" charset="0"/>
-              </a:rPr>
-              <a:t>?</a:t>
-            </a:r>
-          </a:p>
-          <a:p>
-            <a:pPr>
-              <a:buNone/>
-            </a:pPr>
-            <a:r>
-              <a:rPr lang="en-US" sz="2400" dirty="0" smtClean="0">
-                <a:latin typeface="Times New Roman" pitchFamily="18" charset="0"/>
-                <a:cs typeface="Times New Roman" pitchFamily="18" charset="0"/>
-              </a:rPr>
-              <a:t>Temperature </a:t>
-            </a:r>
-            <a:r>
-              <a:rPr lang="en-US" sz="2400" dirty="0" smtClean="0">
-                <a:latin typeface="Times New Roman" pitchFamily="18" charset="0"/>
-                <a:cs typeface="Times New Roman" pitchFamily="18" charset="0"/>
-              </a:rPr>
-              <a:t>affects the </a:t>
-            </a:r>
-            <a:r>
-              <a:rPr lang="en-US" sz="2400" b="1" dirty="0" smtClean="0">
+              <a:rPr lang="en-US" sz="2800" b="1" u="sng" dirty="0">
+                <a:latin typeface="Times New Roman" pitchFamily="18" charset="0"/>
+                <a:cs typeface="Times New Roman" pitchFamily="18" charset="0"/>
+              </a:rPr>
+              <a:t>Slide 17 — What Is Temperature?</a:t>
+            </a:r>
+          </a:p>
+          <a:p>
+            <a:pPr>
+              <a:buNone/>
+            </a:pPr>
+            <a:r>
+              <a:rPr lang="en-US" sz="2400" dirty="0">
+                <a:latin typeface="Times New Roman" pitchFamily="18" charset="0"/>
+                <a:cs typeface="Times New Roman" pitchFamily="18" charset="0"/>
+              </a:rPr>
+              <a:t>Temperature affects the </a:t>
+            </a:r>
+            <a:r>
+              <a:rPr lang="en-US" sz="2400" b="1" dirty="0">
                 <a:latin typeface="Times New Roman" pitchFamily="18" charset="0"/>
                 <a:cs typeface="Times New Roman" pitchFamily="18" charset="0"/>
               </a:rPr>
               <a:t>randomness/diversity of token selection</a:t>
             </a:r>
             <a:r>
-              <a:rPr lang="en-US" sz="2400" dirty="0" smtClean="0">
-                <a:latin typeface="Times New Roman" pitchFamily="18" charset="0"/>
-                <a:cs typeface="Times New Roman" pitchFamily="18" charset="0"/>
-              </a:rPr>
-              <a:t> during sampling</a:t>
-            </a:r>
-            <a:r>
-              <a:rPr lang="en-US" sz="2400" dirty="0" smtClean="0">
-                <a:latin typeface="Times New Roman" pitchFamily="18" charset="0"/>
-                <a:cs typeface="Times New Roman" pitchFamily="18" charset="0"/>
-              </a:rPr>
-              <a:t>.</a:t>
-            </a:r>
-          </a:p>
-          <a:p>
-            <a:pPr>
-              <a:buNone/>
-            </a:pPr>
-            <a:endParaRPr lang="en-US" sz="2400" dirty="0" smtClean="0">
-              <a:latin typeface="Times New Roman" pitchFamily="18" charset="0"/>
-              <a:cs typeface="Times New Roman" pitchFamily="18" charset="0"/>
-            </a:endParaRPr>
-          </a:p>
-          <a:p>
-            <a:pPr>
-              <a:buNone/>
-            </a:pPr>
-            <a:r>
-              <a:rPr lang="en-US" sz="2400" b="1" dirty="0" smtClean="0">
-                <a:latin typeface="Times New Roman" pitchFamily="18" charset="0"/>
-                <a:cs typeface="Times New Roman" pitchFamily="18" charset="0"/>
-              </a:rPr>
-              <a:t>Low Temperature</a:t>
-            </a:r>
-          </a:p>
-          <a:p>
-            <a:pPr>
-              <a:buNone/>
-            </a:pPr>
-            <a:r>
-              <a:rPr lang="en-US" sz="2400" dirty="0" smtClean="0">
-                <a:latin typeface="Times New Roman" pitchFamily="18" charset="0"/>
-                <a:cs typeface="Times New Roman" pitchFamily="18" charset="0"/>
-              </a:rPr>
-              <a:t>More </a:t>
-            </a:r>
-            <a:r>
-              <a:rPr lang="en-US" sz="2400" dirty="0" smtClean="0">
-                <a:latin typeface="Times New Roman" pitchFamily="18" charset="0"/>
-                <a:cs typeface="Times New Roman" pitchFamily="18" charset="0"/>
-              </a:rPr>
-              <a:t>predictable</a:t>
-            </a:r>
-          </a:p>
-          <a:p>
-            <a:pPr>
-              <a:buNone/>
-            </a:pPr>
-            <a:r>
-              <a:rPr lang="en-US" sz="2400" dirty="0" smtClean="0">
-                <a:latin typeface="Times New Roman" pitchFamily="18" charset="0"/>
-                <a:cs typeface="Times New Roman" pitchFamily="18" charset="0"/>
-              </a:rPr>
-              <a:t> ↓</a:t>
-            </a:r>
-          </a:p>
-          <a:p>
-            <a:pPr>
-              <a:buNone/>
-            </a:pPr>
-            <a:r>
-              <a:rPr lang="en-US" sz="2400" dirty="0" smtClean="0">
-                <a:latin typeface="Times New Roman" pitchFamily="18" charset="0"/>
-                <a:cs typeface="Times New Roman" pitchFamily="18" charset="0"/>
-              </a:rPr>
-              <a:t> </a:t>
-            </a:r>
-            <a:r>
-              <a:rPr lang="en-US" sz="2400" dirty="0" smtClean="0">
-                <a:latin typeface="Times New Roman" pitchFamily="18" charset="0"/>
-                <a:cs typeface="Times New Roman" pitchFamily="18" charset="0"/>
-              </a:rPr>
-              <a:t>More consistent</a:t>
-            </a:r>
-          </a:p>
-          <a:p>
-            <a:pPr>
-              <a:buNone/>
-            </a:pPr>
-            <a:r>
-              <a:rPr lang="en-US" sz="2400" b="1" dirty="0" smtClean="0">
-                <a:latin typeface="Times New Roman" pitchFamily="18" charset="0"/>
-                <a:cs typeface="Times New Roman" pitchFamily="18" charset="0"/>
-              </a:rPr>
-              <a:t>Higher Temperature</a:t>
-            </a:r>
-          </a:p>
-          <a:p>
-            <a:pPr>
-              <a:buNone/>
-            </a:pPr>
-            <a:r>
-              <a:rPr lang="en-US" sz="2400" dirty="0" smtClean="0">
-                <a:latin typeface="Times New Roman" pitchFamily="18" charset="0"/>
-                <a:cs typeface="Times New Roman" pitchFamily="18" charset="0"/>
-              </a:rPr>
-              <a:t>More </a:t>
-            </a:r>
-            <a:r>
-              <a:rPr lang="en-US" sz="2400" dirty="0" smtClean="0">
-                <a:latin typeface="Times New Roman" pitchFamily="18" charset="0"/>
-                <a:cs typeface="Times New Roman" pitchFamily="18" charset="0"/>
-              </a:rPr>
-              <a:t>varied</a:t>
-            </a:r>
-          </a:p>
-          <a:p>
-            <a:pPr>
-              <a:buNone/>
-            </a:pPr>
-            <a:r>
-              <a:rPr lang="en-US" sz="2400" dirty="0" smtClean="0">
-                <a:latin typeface="Times New Roman" pitchFamily="18" charset="0"/>
-                <a:cs typeface="Times New Roman" pitchFamily="18" charset="0"/>
-              </a:rPr>
-              <a:t> </a:t>
-            </a:r>
-            <a:r>
-              <a:rPr lang="en-US" sz="2400" dirty="0" smtClean="0">
-                <a:latin typeface="Times New Roman" pitchFamily="18" charset="0"/>
-                <a:cs typeface="Times New Roman" pitchFamily="18" charset="0"/>
-              </a:rPr>
-              <a:t>↓ </a:t>
-            </a:r>
-            <a:endParaRPr lang="en-US" sz="2400" dirty="0" smtClean="0">
-              <a:latin typeface="Times New Roman" pitchFamily="18" charset="0"/>
-              <a:cs typeface="Times New Roman" pitchFamily="18" charset="0"/>
-            </a:endParaRPr>
-          </a:p>
-          <a:p>
-            <a:pPr>
-              <a:buNone/>
-            </a:pPr>
-            <a:r>
-              <a:rPr lang="en-US" sz="2400" dirty="0" smtClean="0">
-                <a:latin typeface="Times New Roman" pitchFamily="18" charset="0"/>
-                <a:cs typeface="Times New Roman" pitchFamily="18" charset="0"/>
-              </a:rPr>
-              <a:t>More </a:t>
-            </a:r>
-            <a:r>
-              <a:rPr lang="en-US" sz="2400" dirty="0" smtClean="0">
-                <a:latin typeface="Times New Roman" pitchFamily="18" charset="0"/>
-                <a:cs typeface="Times New Roman" pitchFamily="18" charset="0"/>
-              </a:rPr>
-              <a:t>creative / unpredictable</a:t>
-            </a:r>
-          </a:p>
-          <a:p>
-            <a:pPr>
-              <a:buNone/>
-            </a:pPr>
-            <a:r>
-              <a:rPr lang="en-US" sz="2400" b="1" dirty="0" smtClean="0">
-                <a:latin typeface="Times New Roman" pitchFamily="18" charset="0"/>
-                <a:cs typeface="Times New Roman" pitchFamily="18" charset="0"/>
-              </a:rPr>
-              <a:t>Important</a:t>
-            </a:r>
-          </a:p>
-          <a:p>
-            <a:pPr>
-              <a:buNone/>
-            </a:pPr>
-            <a:r>
-              <a:rPr lang="en-US" sz="2400" dirty="0" smtClean="0">
-                <a:latin typeface="Times New Roman" pitchFamily="18" charset="0"/>
-                <a:cs typeface="Times New Roman" pitchFamily="18" charset="0"/>
-              </a:rPr>
-              <a:t>Temperature does </a:t>
-            </a:r>
-            <a:r>
-              <a:rPr lang="en-US" sz="2400" b="1" dirty="0" smtClean="0">
-                <a:latin typeface="Times New Roman" pitchFamily="18" charset="0"/>
-                <a:cs typeface="Times New Roman" pitchFamily="18" charset="0"/>
-              </a:rPr>
-              <a:t>not</a:t>
-            </a:r>
-            <a:r>
-              <a:rPr lang="en-US" sz="2400" dirty="0" smtClean="0">
-                <a:latin typeface="Times New Roman" pitchFamily="18" charset="0"/>
-                <a:cs typeface="Times New Roman" pitchFamily="18" charset="0"/>
-              </a:rPr>
-              <a:t> make a model smarter.</a:t>
-            </a:r>
+              <a:rPr lang="en-US" sz="2400" dirty="0">
+                <a:latin typeface="Times New Roman" pitchFamily="18" charset="0"/>
+                <a:cs typeface="Times New Roman" pitchFamily="18" charset="0"/>
+              </a:rPr>
+              <a:t> during sampling.</a:t>
+            </a:r>
+          </a:p>
+          <a:p>
+            <a:pPr>
+              <a:buNone/>
+            </a:pPr>
             <a:endParaRPr lang="en-US" sz="2400" dirty="0">
               <a:latin typeface="Times New Roman" pitchFamily="18" charset="0"/>
               <a:cs typeface="Times New Roman" pitchFamily="18" charset="0"/>
             </a:endParaRPr>
+          </a:p>
+          <a:p>
+            <a:pPr>
+              <a:buNone/>
+            </a:pPr>
+            <a:r>
+              <a:rPr lang="en-US" sz="2400" b="1" dirty="0">
+                <a:latin typeface="Times New Roman" pitchFamily="18" charset="0"/>
+                <a:cs typeface="Times New Roman" pitchFamily="18" charset="0"/>
+              </a:rPr>
+              <a:t>Low Temperature</a:t>
+            </a:r>
+          </a:p>
+          <a:p>
+            <a:pPr>
+              <a:buNone/>
+            </a:pPr>
+            <a:r>
+              <a:rPr lang="en-US" sz="2400" dirty="0">
+                <a:latin typeface="Times New Roman" pitchFamily="18" charset="0"/>
+                <a:cs typeface="Times New Roman" pitchFamily="18" charset="0"/>
+              </a:rPr>
+              <a:t>More predictable</a:t>
+            </a:r>
+          </a:p>
+          <a:p>
+            <a:pPr>
+              <a:buNone/>
+            </a:pPr>
+            <a:r>
+              <a:rPr lang="en-US" sz="2400" dirty="0">
+                <a:latin typeface="Times New Roman" pitchFamily="18" charset="0"/>
+                <a:cs typeface="Times New Roman" pitchFamily="18" charset="0"/>
+              </a:rPr>
+              <a:t> ↓</a:t>
+            </a:r>
+          </a:p>
+          <a:p>
+            <a:pPr>
+              <a:buNone/>
+            </a:pPr>
+            <a:r>
+              <a:rPr lang="en-US" sz="2400" dirty="0">
+                <a:latin typeface="Times New Roman" pitchFamily="18" charset="0"/>
+                <a:cs typeface="Times New Roman" pitchFamily="18" charset="0"/>
+              </a:rPr>
+              <a:t> More consistent</a:t>
+            </a:r>
+          </a:p>
+          <a:p>
+            <a:pPr>
+              <a:buNone/>
+            </a:pPr>
+            <a:r>
+              <a:rPr lang="en-US" sz="2400" b="1" dirty="0">
+                <a:latin typeface="Times New Roman" pitchFamily="18" charset="0"/>
+                <a:cs typeface="Times New Roman" pitchFamily="18" charset="0"/>
+              </a:rPr>
+              <a:t>Higher Temperature</a:t>
+            </a:r>
+          </a:p>
+          <a:p>
+            <a:pPr>
+              <a:buNone/>
+            </a:pPr>
+            <a:r>
+              <a:rPr lang="en-US" sz="2400" dirty="0">
+                <a:latin typeface="Times New Roman" pitchFamily="18" charset="0"/>
+                <a:cs typeface="Times New Roman" pitchFamily="18" charset="0"/>
+              </a:rPr>
+              <a:t>More varied</a:t>
+            </a:r>
+          </a:p>
+          <a:p>
+            <a:pPr>
+              <a:buNone/>
+            </a:pPr>
+            <a:r>
+              <a:rPr lang="en-US" sz="2400" dirty="0">
+                <a:latin typeface="Times New Roman" pitchFamily="18" charset="0"/>
+                <a:cs typeface="Times New Roman" pitchFamily="18" charset="0"/>
+              </a:rPr>
+              <a:t> ↓ </a:t>
+            </a:r>
+          </a:p>
+          <a:p>
+            <a:pPr>
+              <a:buNone/>
+            </a:pPr>
+            <a:r>
+              <a:rPr lang="en-US" sz="2400" dirty="0">
+                <a:latin typeface="Times New Roman" pitchFamily="18" charset="0"/>
+                <a:cs typeface="Times New Roman" pitchFamily="18" charset="0"/>
+              </a:rPr>
+              <a:t>More creative / unpredictable</a:t>
+            </a:r>
+          </a:p>
+          <a:p>
+            <a:pPr>
+              <a:buNone/>
+            </a:pPr>
+            <a:r>
+              <a:rPr lang="en-US" sz="2400" b="1" dirty="0">
+                <a:latin typeface="Times New Roman" pitchFamily="18" charset="0"/>
+                <a:cs typeface="Times New Roman" pitchFamily="18" charset="0"/>
+              </a:rPr>
+              <a:t>Important</a:t>
+            </a:r>
+          </a:p>
+          <a:p>
+            <a:pPr>
+              <a:buNone/>
+            </a:pPr>
+            <a:r>
+              <a:rPr lang="en-US" sz="2400" dirty="0">
+                <a:latin typeface="Times New Roman" pitchFamily="18" charset="0"/>
+                <a:cs typeface="Times New Roman" pitchFamily="18" charset="0"/>
+              </a:rPr>
+              <a:t>Temperature does </a:t>
+            </a:r>
+            <a:r>
+              <a:rPr lang="en-US" sz="2400" b="1" dirty="0">
+                <a:latin typeface="Times New Roman" pitchFamily="18" charset="0"/>
+                <a:cs typeface="Times New Roman" pitchFamily="18" charset="0"/>
+              </a:rPr>
+              <a:t>not</a:t>
+            </a:r>
+            <a:r>
+              <a:rPr lang="en-US" sz="2400" dirty="0">
+                <a:latin typeface="Times New Roman" pitchFamily="18" charset="0"/>
+                <a:cs typeface="Times New Roman" pitchFamily="18" charset="0"/>
+              </a:rPr>
+              <a:t> make a model smarter.</a:t>
+            </a:r>
           </a:p>
         </p:txBody>
       </p:sp>
@@ -9669,26 +9399,19 @@
               <a:buNone/>
             </a:pPr>
             <a:r>
-              <a:rPr lang="en-US" sz="2800" b="1" u="sng" dirty="0" smtClean="0">
-                <a:latin typeface="Times New Roman" pitchFamily="18" charset="0"/>
-                <a:cs typeface="Times New Roman" pitchFamily="18" charset="0"/>
-              </a:rPr>
-              <a:t>PART  7 </a:t>
-            </a:r>
-            <a:r>
-              <a:rPr lang="en-US" sz="2800" b="1" u="sng" dirty="0" smtClean="0">
-                <a:latin typeface="Times New Roman" pitchFamily="18" charset="0"/>
-                <a:cs typeface="Times New Roman" pitchFamily="18" charset="0"/>
-              </a:rPr>
-              <a:t>— CODING COMPARISON</a:t>
-            </a:r>
-          </a:p>
-          <a:p>
-            <a:pPr>
-              <a:buNone/>
-            </a:pPr>
-            <a:r>
-              <a:rPr lang="en-US" sz="2800" b="1" u="sng" dirty="0" smtClean="0">
+              <a:rPr lang="en-US" sz="2800" b="1" u="sng" dirty="0">
+                <a:latin typeface="Times New Roman" pitchFamily="18" charset="0"/>
+                <a:cs typeface="Times New Roman" pitchFamily="18" charset="0"/>
+              </a:rPr>
+              <a:t>PART  7 — CODING COMPARISON</a:t>
+            </a:r>
+          </a:p>
+          <a:p>
+            <a:pPr>
+              <a:buNone/>
+            </a:pPr>
+            <a:r>
+              <a:rPr lang="en-US" sz="2800" b="1" u="sng" dirty="0">
                 <a:latin typeface="Times New Roman" pitchFamily="18" charset="0"/>
                 <a:cs typeface="Times New Roman" pitchFamily="18" charset="0"/>
               </a:rPr>
@@ -9700,7 +9423,7 @@
               <a:buNone/>
             </a:pPr>
             <a:r>
-              <a:rPr lang="en-US" sz="2400" dirty="0" smtClean="0">
+              <a:rPr lang="en-US" sz="2400" dirty="0">
                 <a:latin typeface="Times New Roman" pitchFamily="18" charset="0"/>
                 <a:cs typeface="Times New Roman" pitchFamily="18" charset="0"/>
               </a:rPr>
@@ -9712,13 +9435,13 @@
               <a:buNone/>
             </a:pPr>
             <a:r>
-              <a:rPr lang="en-US" sz="2400" b="1" dirty="0" smtClean="0">
+              <a:rPr lang="en-US" sz="2400" b="1" dirty="0">
                 <a:latin typeface="Times New Roman" pitchFamily="18" charset="0"/>
                 <a:cs typeface="Times New Roman" pitchFamily="18" charset="0"/>
               </a:rPr>
               <a:t>"Write a Python program to read student marks and calculate grade. Handle invalid marks."</a:t>
             </a:r>
-            <a:endParaRPr lang="en-US" sz="2400" dirty="0" smtClean="0">
+            <a:endParaRPr lang="en-US" sz="2400" dirty="0">
               <a:latin typeface="Times New Roman" pitchFamily="18" charset="0"/>
               <a:cs typeface="Times New Roman" pitchFamily="18" charset="0"/>
             </a:endParaRPr>
@@ -9728,30 +9451,16 @@
               <a:buNone/>
             </a:pPr>
             <a:r>
-              <a:rPr lang="en-US" sz="2400" dirty="0" smtClean="0">
-                <a:latin typeface="Times New Roman" pitchFamily="18" charset="0"/>
-                <a:cs typeface="Times New Roman" pitchFamily="18" charset="0"/>
-              </a:rPr>
-              <a:t>C</a:t>
-            </a:r>
-            <a:r>
-              <a:rPr lang="en-US" sz="2400" dirty="0" smtClean="0">
-                <a:latin typeface="Times New Roman" pitchFamily="18" charset="0"/>
-                <a:cs typeface="Times New Roman" pitchFamily="18" charset="0"/>
-              </a:rPr>
-              <a:t>ompare</a:t>
-            </a:r>
-            <a:r>
-              <a:rPr lang="en-US" sz="2400" dirty="0" smtClean="0">
-                <a:latin typeface="Times New Roman" pitchFamily="18" charset="0"/>
-                <a:cs typeface="Times New Roman" pitchFamily="18" charset="0"/>
-              </a:rPr>
-              <a:t>:</a:t>
-            </a:r>
-          </a:p>
-          <a:p>
-            <a:r>
-              <a:rPr lang="en-US" sz="2400" dirty="0" smtClean="0">
+              <a:rPr lang="en-US" sz="2400" dirty="0">
+                <a:latin typeface="Times New Roman" pitchFamily="18" charset="0"/>
+                <a:cs typeface="Times New Roman" pitchFamily="18" charset="0"/>
+              </a:rPr>
+              <a:t>Compare:</a:t>
+            </a:r>
+          </a:p>
+          <a:p>
+            <a:r>
+              <a:rPr lang="en-US" sz="2400" dirty="0">
                 <a:latin typeface="Times New Roman" pitchFamily="18" charset="0"/>
                 <a:cs typeface="Times New Roman" pitchFamily="18" charset="0"/>
               </a:rPr>
@@ -9760,7 +9469,7 @@
           </a:p>
           <a:p>
             <a:r>
-              <a:rPr lang="en-US" sz="2400" dirty="0" smtClean="0">
+              <a:rPr lang="en-US" sz="2400" dirty="0">
                 <a:latin typeface="Times New Roman" pitchFamily="18" charset="0"/>
                 <a:cs typeface="Times New Roman" pitchFamily="18" charset="0"/>
               </a:rPr>
@@ -9769,7 +9478,7 @@
           </a:p>
           <a:p>
             <a:r>
-              <a:rPr lang="en-US" sz="2400" dirty="0" smtClean="0">
+              <a:rPr lang="en-US" sz="2400" dirty="0">
                 <a:latin typeface="Times New Roman" pitchFamily="18" charset="0"/>
                 <a:cs typeface="Times New Roman" pitchFamily="18" charset="0"/>
               </a:rPr>
@@ -9778,7 +9487,7 @@
           </a:p>
           <a:p>
             <a:r>
-              <a:rPr lang="en-US" sz="2400" dirty="0" smtClean="0">
+              <a:rPr lang="en-US" sz="2400" dirty="0">
                 <a:latin typeface="Times New Roman" pitchFamily="18" charset="0"/>
                 <a:cs typeface="Times New Roman" pitchFamily="18" charset="0"/>
               </a:rPr>
@@ -9787,42 +9496,31 @@
           </a:p>
           <a:p>
             <a:r>
-              <a:rPr lang="en-US" sz="2400" dirty="0" smtClean="0">
-                <a:latin typeface="Times New Roman" pitchFamily="18" charset="0"/>
-                <a:cs typeface="Times New Roman" pitchFamily="18" charset="0"/>
-              </a:rPr>
-              <a:t>Edge </a:t>
-            </a:r>
-            <a:r>
-              <a:rPr lang="en-US" sz="2400" dirty="0" smtClean="0">
-                <a:latin typeface="Times New Roman" pitchFamily="18" charset="0"/>
-                <a:cs typeface="Times New Roman" pitchFamily="18" charset="0"/>
-              </a:rPr>
-              <a:t>cases</a:t>
-            </a:r>
-          </a:p>
-          <a:p>
-            <a:pPr>
-              <a:buNone/>
-            </a:pPr>
-            <a:r>
-              <a:rPr lang="en-US" sz="2400" dirty="0" smtClean="0">
+              <a:rPr lang="en-US" sz="2400" dirty="0">
+                <a:latin typeface="Times New Roman" pitchFamily="18" charset="0"/>
+                <a:cs typeface="Times New Roman" pitchFamily="18" charset="0"/>
+              </a:rPr>
+              <a:t>Edge cases</a:t>
+            </a:r>
+          </a:p>
+          <a:p>
+            <a:pPr>
+              <a:buNone/>
+            </a:pPr>
+            <a:r>
+              <a:rPr lang="en-US" sz="2400" dirty="0">
                 <a:latin typeface="Times New Roman" pitchFamily="18" charset="0"/>
                 <a:cs typeface="Times New Roman" pitchFamily="18" charset="0"/>
               </a:rPr>
               <a:t> </a:t>
             </a:r>
-            <a:endParaRPr lang="en-US" sz="2400" dirty="0" smtClean="0">
-              <a:latin typeface="Times New Roman" pitchFamily="18" charset="0"/>
-              <a:cs typeface="Times New Roman" pitchFamily="18" charset="0"/>
-            </a:endParaRPr>
-          </a:p>
-          <a:p>
-            <a:pPr>
-              <a:buNone/>
-            </a:pPr>
-            <a:r>
-              <a:rPr lang="en-US" sz="2400" b="1" dirty="0" smtClean="0">
+          </a:p>
+          <a:p>
+            <a:pPr>
+              <a:buNone/>
+            </a:pPr>
+            <a:r>
+              <a:rPr lang="en-US" sz="2400" b="1" dirty="0">
                 <a:latin typeface="Times New Roman" pitchFamily="18" charset="0"/>
                 <a:cs typeface="Times New Roman" pitchFamily="18" charset="0"/>
               </a:rPr>
@@ -9834,7 +9532,7 @@
               <a:buNone/>
             </a:pPr>
             <a:r>
-              <a:rPr lang="en-US" sz="2400" dirty="0" smtClean="0">
+              <a:rPr lang="en-US" sz="2400" dirty="0">
                 <a:latin typeface="Times New Roman" pitchFamily="18" charset="0"/>
                 <a:cs typeface="Times New Roman" pitchFamily="18" charset="0"/>
               </a:rPr>
@@ -9903,7 +9601,7 @@
               <a:buNone/>
             </a:pPr>
             <a:r>
-              <a:rPr lang="en-US" sz="2800" b="1" u="sng" dirty="0" smtClean="0">
+              <a:rPr lang="en-US" sz="2800" b="1" u="sng" dirty="0">
                 <a:latin typeface="Times New Roman" pitchFamily="18" charset="0"/>
                 <a:cs typeface="Times New Roman" pitchFamily="18" charset="0"/>
               </a:rPr>
@@ -9915,7 +9613,7 @@
               <a:buNone/>
             </a:pPr>
             <a:r>
-              <a:rPr lang="en-US" sz="2400" dirty="0" smtClean="0">
+              <a:rPr lang="en-US" sz="2400" dirty="0">
                 <a:latin typeface="Times New Roman" pitchFamily="18" charset="0"/>
                 <a:cs typeface="Times New Roman" pitchFamily="18" charset="0"/>
               </a:rPr>
@@ -9927,7 +9625,7 @@
               <a:buNone/>
             </a:pPr>
             <a:r>
-              <a:rPr lang="en-US" sz="2400" dirty="0" smtClean="0">
+              <a:rPr lang="en-US" sz="2400" dirty="0">
                 <a:latin typeface="Times New Roman" pitchFamily="18" charset="0"/>
                 <a:cs typeface="Times New Roman" pitchFamily="18" charset="0"/>
               </a:rPr>
@@ -9939,205 +9637,169 @@
               <a:buNone/>
             </a:pPr>
             <a:r>
-              <a:rPr lang="en-US" sz="2400" b="1" dirty="0" smtClean="0">
-                <a:latin typeface="Times New Roman" pitchFamily="18" charset="0"/>
-                <a:cs typeface="Times New Roman" pitchFamily="18" charset="0"/>
-              </a:rPr>
-              <a:t>		"</a:t>
-            </a:r>
-            <a:r>
-              <a:rPr lang="en-US" sz="2400" b="1" dirty="0" smtClean="0">
-                <a:latin typeface="Times New Roman" pitchFamily="18" charset="0"/>
-                <a:cs typeface="Times New Roman" pitchFamily="18" charset="0"/>
-              </a:rPr>
-              <a:t>Review this Python code. Find bugs, edge cases and security problems. Do not rewrite it yet</a:t>
-            </a:r>
-            <a:r>
-              <a:rPr lang="en-US" sz="2400" b="1" dirty="0" smtClean="0">
-                <a:latin typeface="Times New Roman" pitchFamily="18" charset="0"/>
-                <a:cs typeface="Times New Roman" pitchFamily="18" charset="0"/>
-              </a:rPr>
-              <a:t>.“</a:t>
-            </a:r>
-          </a:p>
-          <a:p>
-            <a:pPr>
-              <a:buNone/>
-            </a:pPr>
-            <a:endParaRPr lang="en-US" sz="2400" dirty="0" smtClean="0">
-              <a:latin typeface="Times New Roman" pitchFamily="18" charset="0"/>
-              <a:cs typeface="Times New Roman" pitchFamily="18" charset="0"/>
-            </a:endParaRPr>
-          </a:p>
-          <a:p>
-            <a:pPr>
-              <a:buNone/>
-            </a:pPr>
-            <a:r>
-              <a:rPr lang="en-US" sz="2400" dirty="0" smtClean="0">
-                <a:latin typeface="Times New Roman" pitchFamily="18" charset="0"/>
-                <a:cs typeface="Times New Roman" pitchFamily="18" charset="0"/>
-              </a:rPr>
-              <a:t>Then:</a:t>
-            </a:r>
-          </a:p>
-          <a:p>
-            <a:pPr>
-              <a:buNone/>
-            </a:pPr>
-            <a:r>
-              <a:rPr lang="en-US" sz="2400" b="1" dirty="0" smtClean="0">
-                <a:latin typeface="Times New Roman" pitchFamily="18" charset="0"/>
-                <a:cs typeface="Times New Roman" pitchFamily="18" charset="0"/>
-              </a:rPr>
-              <a:t>"Now improve the code."</a:t>
-            </a:r>
-            <a:endParaRPr lang="en-US" sz="2400" dirty="0" smtClean="0">
-              <a:latin typeface="Times New Roman" pitchFamily="18" charset="0"/>
-              <a:cs typeface="Times New Roman" pitchFamily="18" charset="0"/>
-            </a:endParaRPr>
-          </a:p>
-          <a:p>
-            <a:pPr>
-              <a:buNone/>
-            </a:pPr>
-            <a:r>
-              <a:rPr lang="en-US" sz="2400" b="1" dirty="0" smtClean="0">
-                <a:latin typeface="Times New Roman" pitchFamily="18" charset="0"/>
-                <a:cs typeface="Times New Roman" pitchFamily="18" charset="0"/>
-              </a:rPr>
-              <a:t>Industry Workflow</a:t>
-            </a:r>
-          </a:p>
-          <a:p>
-            <a:pPr>
-              <a:buNone/>
-            </a:pPr>
-            <a:r>
-              <a:rPr lang="en-US" sz="2400" dirty="0" smtClean="0">
-                <a:latin typeface="Times New Roman" pitchFamily="18" charset="0"/>
-                <a:cs typeface="Times New Roman" pitchFamily="18" charset="0"/>
-              </a:rPr>
-              <a:t>Generate</a:t>
-            </a:r>
-          </a:p>
-          <a:p>
-            <a:pPr>
-              <a:buNone/>
-            </a:pPr>
-            <a:r>
-              <a:rPr lang="en-US" sz="2400" dirty="0" smtClean="0">
-                <a:latin typeface="Times New Roman" pitchFamily="18" charset="0"/>
-                <a:cs typeface="Times New Roman" pitchFamily="18" charset="0"/>
-              </a:rPr>
-              <a:t> </a:t>
-            </a:r>
-            <a:r>
-              <a:rPr lang="en-US" sz="2400" dirty="0" smtClean="0">
-                <a:latin typeface="Times New Roman" pitchFamily="18" charset="0"/>
-                <a:cs typeface="Times New Roman" pitchFamily="18" charset="0"/>
-              </a:rPr>
-              <a:t>↓ </a:t>
-            </a:r>
-            <a:endParaRPr lang="en-US" sz="2400" dirty="0" smtClean="0">
-              <a:latin typeface="Times New Roman" pitchFamily="18" charset="0"/>
-              <a:cs typeface="Times New Roman" pitchFamily="18" charset="0"/>
-            </a:endParaRPr>
-          </a:p>
-          <a:p>
-            <a:pPr>
-              <a:buNone/>
-            </a:pPr>
-            <a:r>
-              <a:rPr lang="en-US" sz="2400" dirty="0" smtClean="0">
-                <a:latin typeface="Times New Roman" pitchFamily="18" charset="0"/>
-                <a:cs typeface="Times New Roman" pitchFamily="18" charset="0"/>
-              </a:rPr>
-              <a:t>Test </a:t>
-            </a:r>
-          </a:p>
-          <a:p>
-            <a:pPr>
-              <a:buNone/>
-            </a:pPr>
-            <a:r>
-              <a:rPr lang="en-US" sz="2400" dirty="0" smtClean="0">
-                <a:latin typeface="Times New Roman" pitchFamily="18" charset="0"/>
-                <a:cs typeface="Times New Roman" pitchFamily="18" charset="0"/>
-              </a:rPr>
-              <a:t>↓ </a:t>
-            </a:r>
-          </a:p>
-          <a:p>
-            <a:pPr>
-              <a:buNone/>
-            </a:pPr>
-            <a:r>
-              <a:rPr lang="en-US" sz="2400" dirty="0" smtClean="0">
-                <a:latin typeface="Times New Roman" pitchFamily="18" charset="0"/>
-                <a:cs typeface="Times New Roman" pitchFamily="18" charset="0"/>
-              </a:rPr>
-              <a:t>Review </a:t>
-            </a:r>
-          </a:p>
-          <a:p>
-            <a:pPr>
-              <a:buNone/>
-            </a:pPr>
-            <a:r>
-              <a:rPr lang="en-US" sz="2400" dirty="0" smtClean="0">
-                <a:latin typeface="Times New Roman" pitchFamily="18" charset="0"/>
-                <a:cs typeface="Times New Roman" pitchFamily="18" charset="0"/>
-              </a:rPr>
-              <a:t>↓ </a:t>
-            </a:r>
-          </a:p>
-          <a:p>
-            <a:pPr>
-              <a:buNone/>
-            </a:pPr>
-            <a:r>
-              <a:rPr lang="en-US" sz="2400" dirty="0" smtClean="0">
-                <a:latin typeface="Times New Roman" pitchFamily="18" charset="0"/>
-                <a:cs typeface="Times New Roman" pitchFamily="18" charset="0"/>
-              </a:rPr>
-              <a:t>Improve </a:t>
-            </a:r>
-          </a:p>
-          <a:p>
-            <a:pPr>
-              <a:buNone/>
-            </a:pPr>
-            <a:r>
-              <a:rPr lang="en-US" sz="2400" dirty="0" smtClean="0">
-                <a:latin typeface="Times New Roman" pitchFamily="18" charset="0"/>
-                <a:cs typeface="Times New Roman" pitchFamily="18" charset="0"/>
-              </a:rPr>
-              <a:t>↓ </a:t>
-            </a:r>
-          </a:p>
-          <a:p>
-            <a:pPr>
-              <a:buNone/>
-            </a:pPr>
-            <a:r>
-              <a:rPr lang="en-US" sz="2400" dirty="0" smtClean="0">
-                <a:latin typeface="Times New Roman" pitchFamily="18" charset="0"/>
-                <a:cs typeface="Times New Roman" pitchFamily="18" charset="0"/>
-              </a:rPr>
-              <a:t>Test </a:t>
-            </a:r>
-            <a:r>
-              <a:rPr lang="en-US" sz="2400" dirty="0" smtClean="0">
-                <a:latin typeface="Times New Roman" pitchFamily="18" charset="0"/>
-                <a:cs typeface="Times New Roman" pitchFamily="18" charset="0"/>
-              </a:rPr>
-              <a:t>Again</a:t>
-            </a:r>
+              <a:rPr lang="en-US" sz="2400" b="1" dirty="0">
+                <a:latin typeface="Times New Roman" pitchFamily="18" charset="0"/>
+                <a:cs typeface="Times New Roman" pitchFamily="18" charset="0"/>
+              </a:rPr>
+              <a:t>		"Review this Python code. Find bugs, edge cases and security problems. Do not rewrite it yet.“</a:t>
+            </a:r>
+          </a:p>
+          <a:p>
+            <a:pPr>
+              <a:buNone/>
+            </a:pPr>
             <a:endParaRPr lang="en-US" sz="2400" dirty="0">
               <a:latin typeface="Times New Roman" pitchFamily="18" charset="0"/>
               <a:cs typeface="Times New Roman" pitchFamily="18" charset="0"/>
             </a:endParaRPr>
+          </a:p>
+          <a:p>
+            <a:pPr>
+              <a:buNone/>
+            </a:pPr>
+            <a:r>
+              <a:rPr lang="en-US" sz="2400" dirty="0">
+                <a:latin typeface="Times New Roman" pitchFamily="18" charset="0"/>
+                <a:cs typeface="Times New Roman" pitchFamily="18" charset="0"/>
+              </a:rPr>
+              <a:t>Then:</a:t>
+            </a:r>
+          </a:p>
+          <a:p>
+            <a:pPr>
+              <a:buNone/>
+            </a:pPr>
+            <a:r>
+              <a:rPr lang="en-US" sz="2400" b="1" dirty="0">
+                <a:latin typeface="Times New Roman" pitchFamily="18" charset="0"/>
+                <a:cs typeface="Times New Roman" pitchFamily="18" charset="0"/>
+              </a:rPr>
+              <a:t>"Now improve the code."</a:t>
+            </a:r>
+            <a:endParaRPr lang="en-US" sz="2400" dirty="0">
+              <a:latin typeface="Times New Roman" pitchFamily="18" charset="0"/>
+              <a:cs typeface="Times New Roman" pitchFamily="18" charset="0"/>
+            </a:endParaRPr>
+          </a:p>
+          <a:p>
+            <a:pPr>
+              <a:buNone/>
+            </a:pPr>
+            <a:r>
+              <a:rPr lang="en-US" sz="2400" b="1" dirty="0">
+                <a:latin typeface="Times New Roman" pitchFamily="18" charset="0"/>
+                <a:cs typeface="Times New Roman" pitchFamily="18" charset="0"/>
+              </a:rPr>
+              <a:t>Industry Workflow</a:t>
+            </a:r>
+          </a:p>
+          <a:p>
+            <a:pPr>
+              <a:buNone/>
+            </a:pPr>
+            <a:r>
+              <a:rPr lang="en-US" sz="2400" dirty="0">
+                <a:latin typeface="Times New Roman" pitchFamily="18" charset="0"/>
+                <a:cs typeface="Times New Roman" pitchFamily="18" charset="0"/>
+              </a:rPr>
+              <a:t>Generate</a:t>
+            </a:r>
+          </a:p>
+          <a:p>
+            <a:pPr>
+              <a:buNone/>
+            </a:pPr>
+            <a:r>
+              <a:rPr lang="en-US" sz="2400" dirty="0">
+                <a:latin typeface="Times New Roman" pitchFamily="18" charset="0"/>
+                <a:cs typeface="Times New Roman" pitchFamily="18" charset="0"/>
+              </a:rPr>
+              <a:t> ↓ </a:t>
+            </a:r>
+          </a:p>
+          <a:p>
+            <a:pPr>
+              <a:buNone/>
+            </a:pPr>
+            <a:r>
+              <a:rPr lang="en-US" sz="2400" dirty="0">
+                <a:latin typeface="Times New Roman" pitchFamily="18" charset="0"/>
+                <a:cs typeface="Times New Roman" pitchFamily="18" charset="0"/>
+              </a:rPr>
+              <a:t>Test </a:t>
+            </a:r>
+          </a:p>
+          <a:p>
+            <a:pPr>
+              <a:buNone/>
+            </a:pPr>
+            <a:r>
+              <a:rPr lang="en-US" sz="2400" dirty="0">
+                <a:latin typeface="Times New Roman" pitchFamily="18" charset="0"/>
+                <a:cs typeface="Times New Roman" pitchFamily="18" charset="0"/>
+              </a:rPr>
+              <a:t>↓ </a:t>
+            </a:r>
+          </a:p>
+          <a:p>
+            <a:pPr>
+              <a:buNone/>
+            </a:pPr>
+            <a:r>
+              <a:rPr lang="en-US" sz="2400" dirty="0">
+                <a:latin typeface="Times New Roman" pitchFamily="18" charset="0"/>
+                <a:cs typeface="Times New Roman" pitchFamily="18" charset="0"/>
+              </a:rPr>
+              <a:t>Review </a:t>
+            </a:r>
+          </a:p>
+          <a:p>
+            <a:pPr>
+              <a:buNone/>
+            </a:pPr>
+            <a:r>
+              <a:rPr lang="en-US" sz="2400" dirty="0">
+                <a:latin typeface="Times New Roman" pitchFamily="18" charset="0"/>
+                <a:cs typeface="Times New Roman" pitchFamily="18" charset="0"/>
+              </a:rPr>
+              <a:t>↓ </a:t>
+            </a:r>
+          </a:p>
+          <a:p>
+            <a:pPr>
+              <a:buNone/>
+            </a:pPr>
+            <a:r>
+              <a:rPr lang="en-US" sz="2400" dirty="0">
+                <a:latin typeface="Times New Roman" pitchFamily="18" charset="0"/>
+                <a:cs typeface="Times New Roman" pitchFamily="18" charset="0"/>
+              </a:rPr>
+              <a:t>Improve </a:t>
+            </a:r>
+          </a:p>
+          <a:p>
+            <a:pPr>
+              <a:buNone/>
+            </a:pPr>
+            <a:r>
+              <a:rPr lang="en-US" sz="2400" dirty="0">
+                <a:latin typeface="Times New Roman" pitchFamily="18" charset="0"/>
+                <a:cs typeface="Times New Roman" pitchFamily="18" charset="0"/>
+              </a:rPr>
+              <a:t>↓ </a:t>
+            </a:r>
+          </a:p>
+          <a:p>
+            <a:pPr>
+              <a:buNone/>
+            </a:pPr>
+            <a:r>
+              <a:rPr lang="en-US" sz="2400" dirty="0">
+                <a:latin typeface="Times New Roman" pitchFamily="18" charset="0"/>
+                <a:cs typeface="Times New Roman" pitchFamily="18" charset="0"/>
+              </a:rPr>
+              <a:t>Test Again</a:t>
+            </a:r>
           </a:p>
         </p:txBody>
       </p:sp>
@@ -10192,25 +9854,18 @@
               <a:buNone/>
             </a:pPr>
             <a:r>
-              <a:rPr lang="en-US" sz="2800" b="1" u="sng" dirty="0" smtClean="0">
-                <a:latin typeface="Times New Roman" pitchFamily="18" charset="0"/>
-                <a:cs typeface="Times New Roman" pitchFamily="18" charset="0"/>
-              </a:rPr>
-              <a:t>PART 9 — MODEL </a:t>
-            </a:r>
-            <a:r>
-              <a:rPr lang="en-US" sz="2800" b="1" u="sng" dirty="0" smtClean="0">
-                <a:latin typeface="Times New Roman" pitchFamily="18" charset="0"/>
-                <a:cs typeface="Times New Roman" pitchFamily="18" charset="0"/>
-              </a:rPr>
-              <a:t>SELECTION</a:t>
-            </a:r>
-          </a:p>
-          <a:p>
-            <a:pPr>
-              <a:buNone/>
-            </a:pPr>
-            <a:endParaRPr lang="en-US" sz="2800" b="1" u="sng" dirty="0" smtClean="0">
+              <a:rPr lang="en-US" sz="2800" b="1" u="sng" dirty="0">
+                <a:latin typeface="Times New Roman" pitchFamily="18" charset="0"/>
+                <a:cs typeface="Times New Roman" pitchFamily="18" charset="0"/>
+              </a:rPr>
+              <a:t>PART 9 — MODEL SELECTION</a:t>
+            </a:r>
+          </a:p>
+          <a:p>
+            <a:pPr>
+              <a:buNone/>
+            </a:pPr>
+            <a:endParaRPr lang="en-US" sz="2800" b="1" u="sng" dirty="0">
               <a:latin typeface="Times New Roman" pitchFamily="18" charset="0"/>
               <a:cs typeface="Times New Roman" pitchFamily="18" charset="0"/>
             </a:endParaRPr>
@@ -10220,25 +9875,18 @@
               <a:buNone/>
             </a:pPr>
             <a:r>
-              <a:rPr lang="en-US" sz="2400" b="1" dirty="0" smtClean="0">
-                <a:latin typeface="Times New Roman" pitchFamily="18" charset="0"/>
-                <a:cs typeface="Times New Roman" pitchFamily="18" charset="0"/>
-              </a:rPr>
-              <a:t>Slide 25 — Which Model Would You Choose</a:t>
-            </a:r>
-            <a:r>
-              <a:rPr lang="en-US" sz="2400" b="1" dirty="0" smtClean="0">
-                <a:latin typeface="Times New Roman" pitchFamily="18" charset="0"/>
-                <a:cs typeface="Times New Roman" pitchFamily="18" charset="0"/>
-              </a:rPr>
-              <a:t>?</a:t>
-            </a:r>
-          </a:p>
-          <a:p>
-            <a:pPr>
-              <a:buNone/>
-            </a:pPr>
-            <a:endParaRPr lang="en-US" sz="2400" b="1" dirty="0" smtClean="0">
+              <a:rPr lang="en-US" sz="2400" b="1" dirty="0">
+                <a:latin typeface="Times New Roman" pitchFamily="18" charset="0"/>
+                <a:cs typeface="Times New Roman" pitchFamily="18" charset="0"/>
+              </a:rPr>
+              <a:t>Slide 25 — Which Model Would You Choose?</a:t>
+            </a:r>
+          </a:p>
+          <a:p>
+            <a:pPr>
+              <a:buNone/>
+            </a:pPr>
+            <a:endParaRPr lang="en-US" sz="2400" b="1" dirty="0">
               <a:latin typeface="Times New Roman" pitchFamily="18" charset="0"/>
               <a:cs typeface="Times New Roman" pitchFamily="18" charset="0"/>
             </a:endParaRPr>
@@ -10248,7 +9896,7 @@
               <a:buNone/>
             </a:pPr>
             <a:r>
-              <a:rPr lang="en-US" sz="2400" b="1" dirty="0" smtClean="0">
+              <a:rPr lang="en-US" sz="2400" b="1" dirty="0">
                 <a:latin typeface="Times New Roman" pitchFamily="18" charset="0"/>
                 <a:cs typeface="Times New Roman" pitchFamily="18" charset="0"/>
               </a:rPr>
@@ -10260,7 +9908,7 @@
               <a:buNone/>
             </a:pPr>
             <a:r>
-              <a:rPr lang="en-US" sz="2400" dirty="0" smtClean="0">
+              <a:rPr lang="en-US" sz="2400" dirty="0">
                 <a:latin typeface="Times New Roman" pitchFamily="18" charset="0"/>
                 <a:cs typeface="Times New Roman" pitchFamily="18" charset="0"/>
               </a:rPr>
@@ -10272,7 +9920,7 @@
               <a:buNone/>
             </a:pPr>
             <a:r>
-              <a:rPr lang="en-US" sz="2400" b="1" dirty="0" smtClean="0">
+              <a:rPr lang="en-US" sz="2400" b="1" dirty="0">
                 <a:latin typeface="Times New Roman" pitchFamily="18" charset="0"/>
                 <a:cs typeface="Times New Roman" pitchFamily="18" charset="0"/>
               </a:rPr>
@@ -10284,7 +9932,7 @@
               <a:buNone/>
             </a:pPr>
             <a:r>
-              <a:rPr lang="en-US" sz="2400" dirty="0" smtClean="0">
+              <a:rPr lang="en-US" sz="2400" dirty="0">
                 <a:latin typeface="Times New Roman" pitchFamily="18" charset="0"/>
                 <a:cs typeface="Times New Roman" pitchFamily="18" charset="0"/>
               </a:rPr>
@@ -10296,7 +9944,7 @@
               <a:buNone/>
             </a:pPr>
             <a:r>
-              <a:rPr lang="en-US" sz="2400" b="1" dirty="0" smtClean="0">
+              <a:rPr lang="en-US" sz="2400" b="1" dirty="0">
                 <a:latin typeface="Times New Roman" pitchFamily="18" charset="0"/>
                 <a:cs typeface="Times New Roman" pitchFamily="18" charset="0"/>
               </a:rPr>
@@ -10308,23 +9956,12 @@
               <a:buNone/>
             </a:pPr>
             <a:r>
-              <a:rPr lang="en-US" sz="2400" dirty="0" smtClean="0">
-                <a:latin typeface="Times New Roman" pitchFamily="18" charset="0"/>
-                <a:cs typeface="Times New Roman" pitchFamily="18" charset="0"/>
-              </a:rPr>
-              <a:t>Build a coding assistant</a:t>
-            </a:r>
-            <a:r>
-              <a:rPr lang="en-US" sz="2400" dirty="0" smtClean="0">
-                <a:latin typeface="Times New Roman" pitchFamily="18" charset="0"/>
-                <a:cs typeface="Times New Roman" pitchFamily="18" charset="0"/>
-              </a:rPr>
-              <a:t>.</a:t>
-            </a:r>
-            <a:endParaRPr lang="en-US" sz="2400" dirty="0" smtClean="0">
-              <a:latin typeface="Times New Roman" pitchFamily="18" charset="0"/>
-              <a:cs typeface="Times New Roman" pitchFamily="18" charset="0"/>
-            </a:endParaRPr>
+              <a:rPr lang="en-US" sz="2400" dirty="0">
+                <a:latin typeface="Times New Roman" pitchFamily="18" charset="0"/>
+                <a:cs typeface="Times New Roman" pitchFamily="18" charset="0"/>
+              </a:rPr>
+              <a:t>Build a coding assistant.</a:t>
+            </a:r>
           </a:p>
         </p:txBody>
       </p:sp>
@@ -10379,7 +10016,7 @@
               <a:buNone/>
             </a:pPr>
             <a:r>
-              <a:rPr lang="en-US" sz="2400" b="1" dirty="0" smtClean="0">
+              <a:rPr lang="en-US" sz="2400" b="1" dirty="0">
                 <a:latin typeface="Times New Roman" pitchFamily="18" charset="0"/>
                 <a:cs typeface="Times New Roman" pitchFamily="18" charset="0"/>
               </a:rPr>
@@ -10391,7 +10028,7 @@
               <a:buNone/>
             </a:pPr>
             <a:r>
-              <a:rPr lang="en-US" sz="2400" dirty="0" smtClean="0">
+              <a:rPr lang="en-US" sz="2400" dirty="0">
                 <a:latin typeface="Times New Roman" pitchFamily="18" charset="0"/>
                 <a:cs typeface="Times New Roman" pitchFamily="18" charset="0"/>
               </a:rPr>
@@ -10403,7 +10040,7 @@
               <a:buNone/>
             </a:pPr>
             <a:r>
-              <a:rPr lang="en-US" sz="2400" b="1" dirty="0" smtClean="0">
+              <a:rPr lang="en-US" sz="2400" b="1" dirty="0">
                 <a:latin typeface="Times New Roman" pitchFamily="18" charset="0"/>
                 <a:cs typeface="Times New Roman" pitchFamily="18" charset="0"/>
               </a:rPr>
@@ -10415,7 +10052,7 @@
               <a:buNone/>
             </a:pPr>
             <a:r>
-              <a:rPr lang="en-US" sz="2400" dirty="0" smtClean="0">
+              <a:rPr lang="en-US" sz="2400" dirty="0">
                 <a:latin typeface="Times New Roman" pitchFamily="18" charset="0"/>
                 <a:cs typeface="Times New Roman" pitchFamily="18" charset="0"/>
               </a:rPr>
@@ -10427,7 +10064,7 @@
               <a:buNone/>
             </a:pPr>
             <a:r>
-              <a:rPr lang="en-US" sz="2400" b="1" dirty="0" smtClean="0">
+              <a:rPr lang="en-US" sz="2400" b="1" dirty="0">
                 <a:latin typeface="Times New Roman" pitchFamily="18" charset="0"/>
                 <a:cs typeface="Times New Roman" pitchFamily="18" charset="0"/>
               </a:rPr>
@@ -10439,25 +10076,18 @@
               <a:buNone/>
             </a:pPr>
             <a:r>
-              <a:rPr lang="en-US" sz="2400" dirty="0" smtClean="0">
-                <a:latin typeface="Times New Roman" pitchFamily="18" charset="0"/>
-                <a:cs typeface="Times New Roman" pitchFamily="18" charset="0"/>
-              </a:rPr>
-              <a:t>Create multilingual content</a:t>
-            </a:r>
-            <a:r>
-              <a:rPr lang="en-US" sz="2400" dirty="0" smtClean="0">
-                <a:latin typeface="Times New Roman" pitchFamily="18" charset="0"/>
-                <a:cs typeface="Times New Roman" pitchFamily="18" charset="0"/>
-              </a:rPr>
-              <a:t>.</a:t>
-            </a:r>
-          </a:p>
-          <a:p>
-            <a:pPr>
-              <a:buNone/>
-            </a:pPr>
-            <a:endParaRPr lang="en-IN" sz="2400" dirty="0" smtClean="0">
+              <a:rPr lang="en-US" sz="2400" dirty="0">
+                <a:latin typeface="Times New Roman" pitchFamily="18" charset="0"/>
+                <a:cs typeface="Times New Roman" pitchFamily="18" charset="0"/>
+              </a:rPr>
+              <a:t>Create multilingual content.</a:t>
+            </a:r>
+          </a:p>
+          <a:p>
+            <a:pPr>
+              <a:buNone/>
+            </a:pPr>
+            <a:endParaRPr lang="en-IN" sz="2400" dirty="0">
               <a:latin typeface="Times New Roman" pitchFamily="18" charset="0"/>
               <a:cs typeface="Times New Roman" pitchFamily="18" charset="0"/>
             </a:endParaRPr>
@@ -10466,54 +10096,36 @@
             <a:pPr>
               <a:buNone/>
             </a:pPr>
-            <a:endParaRPr lang="en-US" sz="2400" dirty="0" smtClean="0">
-              <a:latin typeface="Times New Roman" pitchFamily="18" charset="0"/>
-              <a:cs typeface="Times New Roman" pitchFamily="18" charset="0"/>
-            </a:endParaRPr>
-          </a:p>
-          <a:p>
-            <a:pPr>
-              <a:buNone/>
-            </a:pPr>
-            <a:r>
-              <a:rPr lang="en-US" sz="2400" dirty="0" smtClean="0">
-                <a:latin typeface="Times New Roman" pitchFamily="18" charset="0"/>
-                <a:cs typeface="Times New Roman" pitchFamily="18" charset="0"/>
-              </a:rPr>
-              <a:t>C</a:t>
-            </a:r>
-            <a:r>
-              <a:rPr lang="en-US" sz="2400" dirty="0" smtClean="0">
-                <a:latin typeface="Times New Roman" pitchFamily="18" charset="0"/>
-                <a:cs typeface="Times New Roman" pitchFamily="18" charset="0"/>
-              </a:rPr>
-              <a:t>hoose </a:t>
-            </a:r>
-            <a:r>
-              <a:rPr lang="en-US" sz="2400" dirty="0" smtClean="0">
-                <a:latin typeface="Times New Roman" pitchFamily="18" charset="0"/>
-                <a:cs typeface="Times New Roman" pitchFamily="18" charset="0"/>
-              </a:rPr>
-              <a:t>a model and </a:t>
-            </a:r>
-            <a:r>
-              <a:rPr lang="en-US" sz="2400" b="1" dirty="0" smtClean="0">
-                <a:latin typeface="Times New Roman" pitchFamily="18" charset="0"/>
-                <a:cs typeface="Times New Roman" pitchFamily="18" charset="0"/>
-              </a:rPr>
-              <a:t>justify their choice</a:t>
-            </a:r>
-            <a:r>
-              <a:rPr lang="en-US" sz="2400" dirty="0" smtClean="0">
-                <a:latin typeface="Times New Roman" pitchFamily="18" charset="0"/>
-                <a:cs typeface="Times New Roman" pitchFamily="18" charset="0"/>
-              </a:rPr>
-              <a:t>.</a:t>
-            </a:r>
             <a:endParaRPr lang="en-US" sz="2400" dirty="0">
               <a:latin typeface="Times New Roman" pitchFamily="18" charset="0"/>
               <a:cs typeface="Times New Roman" pitchFamily="18" charset="0"/>
             </a:endParaRPr>
+          </a:p>
+          <a:p>
+            <a:pPr>
+              <a:buNone/>
+            </a:pPr>
+            <a:r>
+              <a:rPr lang="en-US" sz="2400" dirty="0">
+                <a:latin typeface="Times New Roman" pitchFamily="18" charset="0"/>
+                <a:cs typeface="Times New Roman" pitchFamily="18" charset="0"/>
+              </a:rPr>
+              <a:t>Choose a model and </a:t>
+            </a:r>
+            <a:r>
+              <a:rPr lang="en-US" sz="2400" b="1" dirty="0">
+                <a:latin typeface="Times New Roman" pitchFamily="18" charset="0"/>
+                <a:cs typeface="Times New Roman" pitchFamily="18" charset="0"/>
+              </a:rPr>
+              <a:t>justify their choice</a:t>
+            </a:r>
+            <a:r>
+              <a:rPr lang="en-US" sz="2400" dirty="0">
+                <a:latin typeface="Times New Roman" pitchFamily="18" charset="0"/>
+                <a:cs typeface="Times New Roman" pitchFamily="18" charset="0"/>
+              </a:rPr>
+              <a:t>.</a:t>
+            </a:r>
           </a:p>
         </p:txBody>
       </p:sp>
@@ -10568,25 +10180,18 @@
               <a:buNone/>
             </a:pPr>
             <a:r>
-              <a:rPr lang="en-US" sz="2400" b="1" u="sng" dirty="0" smtClean="0">
-                <a:latin typeface="Times New Roman" pitchFamily="18" charset="0"/>
-                <a:cs typeface="Times New Roman" pitchFamily="18" charset="0"/>
-              </a:rPr>
-              <a:t>Slide 26 — The 6-Question </a:t>
-            </a:r>
-            <a:r>
-              <a:rPr lang="en-US" sz="2400" b="1" u="sng" dirty="0" smtClean="0">
-                <a:latin typeface="Times New Roman" pitchFamily="18" charset="0"/>
-                <a:cs typeface="Times New Roman" pitchFamily="18" charset="0"/>
-              </a:rPr>
-              <a:t>Framework</a:t>
-            </a:r>
-          </a:p>
-          <a:p>
-            <a:pPr>
-              <a:buNone/>
-            </a:pPr>
-            <a:endParaRPr lang="en-US" sz="2400" b="1" u="sng" dirty="0" smtClean="0">
+              <a:rPr lang="en-US" sz="2400" b="1" u="sng" dirty="0">
+                <a:latin typeface="Times New Roman" pitchFamily="18" charset="0"/>
+                <a:cs typeface="Times New Roman" pitchFamily="18" charset="0"/>
+              </a:rPr>
+              <a:t>Slide 26 — The 6-Question Framework</a:t>
+            </a:r>
+          </a:p>
+          <a:p>
+            <a:pPr>
+              <a:buNone/>
+            </a:pPr>
+            <a:endParaRPr lang="en-US" sz="2400" b="1" u="sng" dirty="0">
               <a:latin typeface="Times New Roman" pitchFamily="18" charset="0"/>
               <a:cs typeface="Times New Roman" pitchFamily="18" charset="0"/>
             </a:endParaRPr>
@@ -10596,25 +10201,18 @@
               <a:buNone/>
             </a:pPr>
             <a:r>
-              <a:rPr lang="en-US" sz="2400" dirty="0" smtClean="0">
-                <a:latin typeface="Times New Roman" pitchFamily="18" charset="0"/>
-                <a:cs typeface="Times New Roman" pitchFamily="18" charset="0"/>
-              </a:rPr>
-              <a:t>Before selecting an LLM, ask</a:t>
-            </a:r>
-            <a:r>
-              <a:rPr lang="en-US" sz="2400" dirty="0" smtClean="0">
-                <a:latin typeface="Times New Roman" pitchFamily="18" charset="0"/>
-                <a:cs typeface="Times New Roman" pitchFamily="18" charset="0"/>
-              </a:rPr>
-              <a:t>:</a:t>
-            </a:r>
-          </a:p>
-          <a:p>
-            <a:pPr>
-              <a:buNone/>
-            </a:pPr>
-            <a:endParaRPr lang="en-US" sz="2400" dirty="0" smtClean="0">
+              <a:rPr lang="en-US" sz="2400" dirty="0">
+                <a:latin typeface="Times New Roman" pitchFamily="18" charset="0"/>
+                <a:cs typeface="Times New Roman" pitchFamily="18" charset="0"/>
+              </a:rPr>
+              <a:t>Before selecting an LLM, ask:</a:t>
+            </a:r>
+          </a:p>
+          <a:p>
+            <a:pPr>
+              <a:buNone/>
+            </a:pPr>
+            <a:endParaRPr lang="en-US" sz="2400" dirty="0">
               <a:latin typeface="Times New Roman" pitchFamily="18" charset="0"/>
               <a:cs typeface="Times New Roman" pitchFamily="18" charset="0"/>
             </a:endParaRPr>
@@ -10624,7 +10222,7 @@
               <a:buNone/>
             </a:pPr>
             <a:r>
-              <a:rPr lang="en-US" sz="2400" b="1" dirty="0" smtClean="0">
+              <a:rPr lang="en-US" sz="2400" b="1" dirty="0">
                 <a:latin typeface="Times New Roman" pitchFamily="18" charset="0"/>
                 <a:cs typeface="Times New Roman" pitchFamily="18" charset="0"/>
               </a:rPr>
@@ -10636,7 +10234,7 @@
               <a:buNone/>
             </a:pPr>
             <a:r>
-              <a:rPr lang="en-US" sz="2400" b="1" dirty="0" smtClean="0">
+              <a:rPr lang="en-US" sz="2400" b="1" dirty="0">
                 <a:latin typeface="Times New Roman" pitchFamily="18" charset="0"/>
                 <a:cs typeface="Times New Roman" pitchFamily="18" charset="0"/>
               </a:rPr>
@@ -10648,7 +10246,7 @@
               <a:buNone/>
             </a:pPr>
             <a:r>
-              <a:rPr lang="en-US" sz="2400" b="1" dirty="0" smtClean="0">
+              <a:rPr lang="en-US" sz="2400" b="1" dirty="0">
                 <a:latin typeface="Times New Roman" pitchFamily="18" charset="0"/>
                 <a:cs typeface="Times New Roman" pitchFamily="18" charset="0"/>
               </a:rPr>
@@ -10660,7 +10258,7 @@
               <a:buNone/>
             </a:pPr>
             <a:r>
-              <a:rPr lang="en-US" sz="2400" b="1" dirty="0" smtClean="0">
+              <a:rPr lang="en-US" sz="2400" b="1" dirty="0">
                 <a:latin typeface="Times New Roman" pitchFamily="18" charset="0"/>
                 <a:cs typeface="Times New Roman" pitchFamily="18" charset="0"/>
               </a:rPr>
@@ -10672,7 +10270,7 @@
               <a:buNone/>
             </a:pPr>
             <a:r>
-              <a:rPr lang="en-US" sz="2400" b="1" dirty="0" smtClean="0">
+              <a:rPr lang="en-US" sz="2400" b="1" dirty="0">
                 <a:latin typeface="Times New Roman" pitchFamily="18" charset="0"/>
                 <a:cs typeface="Times New Roman" pitchFamily="18" charset="0"/>
               </a:rPr>
@@ -10684,7 +10282,7 @@
               <a:buNone/>
             </a:pPr>
             <a:r>
-              <a:rPr lang="en-US" sz="2400" b="1" dirty="0" smtClean="0">
+              <a:rPr lang="en-US" sz="2400" b="1" dirty="0">
                 <a:latin typeface="Times New Roman" pitchFamily="18" charset="0"/>
                 <a:cs typeface="Times New Roman" pitchFamily="18" charset="0"/>
               </a:rPr>
@@ -10753,7 +10351,7 @@
               <a:buNone/>
             </a:pPr>
             <a:r>
-              <a:rPr lang="en-US" sz="2800" b="1" u="sng" dirty="0" smtClean="0">
+              <a:rPr lang="en-US" sz="2800" b="1" u="sng" dirty="0">
                 <a:latin typeface="Times New Roman" pitchFamily="18" charset="0"/>
                 <a:cs typeface="Times New Roman" pitchFamily="18" charset="0"/>
               </a:rPr>
@@ -10765,25 +10363,18 @@
               <a:buNone/>
             </a:pPr>
             <a:r>
-              <a:rPr lang="en-US" sz="2800" b="1" u="sng" dirty="0" smtClean="0">
-                <a:latin typeface="Times New Roman" pitchFamily="18" charset="0"/>
-                <a:cs typeface="Times New Roman" pitchFamily="18" charset="0"/>
-              </a:rPr>
-              <a:t>Slide 27 — LLM ≠ </a:t>
-            </a:r>
-            <a:r>
-              <a:rPr lang="en-US" sz="2800" b="1" u="sng" dirty="0" smtClean="0">
-                <a:latin typeface="Times New Roman" pitchFamily="18" charset="0"/>
-                <a:cs typeface="Times New Roman" pitchFamily="18" charset="0"/>
-              </a:rPr>
-              <a:t>Application</a:t>
-            </a:r>
-          </a:p>
-          <a:p>
-            <a:pPr>
-              <a:buNone/>
-            </a:pPr>
-            <a:endParaRPr lang="en-US" sz="2800" b="1" u="sng" dirty="0" smtClean="0">
+              <a:rPr lang="en-US" sz="2800" b="1" u="sng" dirty="0">
+                <a:latin typeface="Times New Roman" pitchFamily="18" charset="0"/>
+                <a:cs typeface="Times New Roman" pitchFamily="18" charset="0"/>
+              </a:rPr>
+              <a:t>Slide 27 — LLM ≠ Application</a:t>
+            </a:r>
+          </a:p>
+          <a:p>
+            <a:pPr>
+              <a:buNone/>
+            </a:pPr>
+            <a:endParaRPr lang="en-US" sz="2800" b="1" u="sng" dirty="0">
               <a:latin typeface="Times New Roman" pitchFamily="18" charset="0"/>
               <a:cs typeface="Times New Roman" pitchFamily="18" charset="0"/>
             </a:endParaRPr>
@@ -10793,25 +10384,18 @@
               <a:buNone/>
             </a:pPr>
             <a:r>
-              <a:rPr lang="en-US" sz="2400" dirty="0" smtClean="0">
-                <a:latin typeface="Times New Roman" pitchFamily="18" charset="0"/>
-                <a:cs typeface="Times New Roman" pitchFamily="18" charset="0"/>
-              </a:rPr>
-              <a:t>A model alone isn't the entire AI application</a:t>
-            </a:r>
-            <a:r>
-              <a:rPr lang="en-US" sz="2400" dirty="0" smtClean="0">
-                <a:latin typeface="Times New Roman" pitchFamily="18" charset="0"/>
-                <a:cs typeface="Times New Roman" pitchFamily="18" charset="0"/>
-              </a:rPr>
-              <a:t>.</a:t>
-            </a:r>
-          </a:p>
-          <a:p>
-            <a:pPr>
-              <a:buNone/>
-            </a:pPr>
-            <a:endParaRPr lang="en-US" sz="2400" dirty="0" smtClean="0">
+              <a:rPr lang="en-US" sz="2400" dirty="0">
+                <a:latin typeface="Times New Roman" pitchFamily="18" charset="0"/>
+                <a:cs typeface="Times New Roman" pitchFamily="18" charset="0"/>
+              </a:rPr>
+              <a:t>A model alone isn't the entire AI application.</a:t>
+            </a:r>
+          </a:p>
+          <a:p>
+            <a:pPr>
+              <a:buNone/>
+            </a:pPr>
+            <a:endParaRPr lang="en-US" sz="2400" dirty="0">
               <a:latin typeface="Times New Roman" pitchFamily="18" charset="0"/>
               <a:cs typeface="Times New Roman" pitchFamily="18" charset="0"/>
             </a:endParaRPr>
@@ -10821,13 +10405,42 @@
               <a:buNone/>
             </a:pPr>
             <a:r>
-              <a:rPr lang="en-US" sz="2400" dirty="0" smtClean="0">
+              <a:rPr lang="en-US" sz="2400" dirty="0">
                 <a:latin typeface="Times New Roman" pitchFamily="18" charset="0"/>
                 <a:cs typeface="Times New Roman" pitchFamily="18" charset="0"/>
               </a:rPr>
               <a:t>LLM + Prompt + Data + Tools + Application Logic + User Interface </a:t>
             </a:r>
-            <a:endParaRPr lang="en-US" sz="2400" dirty="0" smtClean="0">
+          </a:p>
+          <a:p>
+            <a:pPr>
+              <a:buNone/>
+            </a:pPr>
+            <a:r>
+              <a:rPr lang="en-US" sz="2400" dirty="0">
+                <a:latin typeface="Times New Roman" pitchFamily="18" charset="0"/>
+                <a:cs typeface="Times New Roman" pitchFamily="18" charset="0"/>
+              </a:rPr>
+              <a:t>↓ </a:t>
+            </a:r>
+          </a:p>
+          <a:p>
+            <a:pPr>
+              <a:buNone/>
+            </a:pPr>
+            <a:r>
+              <a:rPr lang="en-US" sz="2400" dirty="0">
+                <a:latin typeface="Times New Roman" pitchFamily="18" charset="0"/>
+                <a:cs typeface="Times New Roman" pitchFamily="18" charset="0"/>
+              </a:rPr>
+              <a:t>AI Application</a:t>
+            </a:r>
+          </a:p>
+          <a:p>
+            <a:pPr>
+              <a:buNone/>
+            </a:pPr>
+            <a:endParaRPr lang="en-US" sz="2400" dirty="0">
               <a:latin typeface="Times New Roman" pitchFamily="18" charset="0"/>
               <a:cs typeface="Times New Roman" pitchFamily="18" charset="0"/>
             </a:endParaRPr>
@@ -10837,40 +10450,7 @@
               <a:buNone/>
             </a:pPr>
             <a:r>
-              <a:rPr lang="en-US" sz="2400" dirty="0" smtClean="0">
-                <a:latin typeface="Times New Roman" pitchFamily="18" charset="0"/>
-                <a:cs typeface="Times New Roman" pitchFamily="18" charset="0"/>
-              </a:rPr>
-              <a:t>↓ </a:t>
-            </a:r>
-          </a:p>
-          <a:p>
-            <a:pPr>
-              <a:buNone/>
-            </a:pPr>
-            <a:r>
-              <a:rPr lang="en-US" sz="2400" dirty="0" smtClean="0">
-                <a:latin typeface="Times New Roman" pitchFamily="18" charset="0"/>
-                <a:cs typeface="Times New Roman" pitchFamily="18" charset="0"/>
-              </a:rPr>
-              <a:t>AI Application</a:t>
-            </a:r>
-          </a:p>
-          <a:p>
-            <a:pPr>
-              <a:buNone/>
-            </a:pPr>
-            <a:endParaRPr lang="en-US" sz="2400" dirty="0" smtClean="0">
-              <a:latin typeface="Times New Roman" pitchFamily="18" charset="0"/>
-              <a:cs typeface="Times New Roman" pitchFamily="18" charset="0"/>
-            </a:endParaRPr>
-          </a:p>
-          <a:p>
-            <a:pPr>
-              <a:buNone/>
-            </a:pPr>
-            <a:r>
-              <a:rPr lang="en-US" sz="2400" dirty="0" smtClean="0">
+              <a:rPr lang="en-US" sz="2400" dirty="0">
                 <a:latin typeface="Times New Roman" pitchFamily="18" charset="0"/>
                 <a:cs typeface="Times New Roman" pitchFamily="18" charset="0"/>
               </a:rPr>
@@ -10939,7 +10519,7 @@
               <a:buNone/>
             </a:pPr>
             <a:r>
-              <a:rPr lang="en-US" sz="2400" b="1" dirty="0" smtClean="0">
+              <a:rPr lang="en-US" sz="2400" b="1" dirty="0">
                 <a:latin typeface="Times New Roman" pitchFamily="18" charset="0"/>
                 <a:cs typeface="Times New Roman" pitchFamily="18" charset="0"/>
               </a:rPr>
@@ -10951,7 +10531,7 @@
               <a:buNone/>
             </a:pPr>
             <a:r>
-              <a:rPr lang="en-US" sz="2400" dirty="0" smtClean="0">
+              <a:rPr lang="en-US" sz="2400" dirty="0">
                 <a:latin typeface="Times New Roman" pitchFamily="18" charset="0"/>
                 <a:cs typeface="Times New Roman" pitchFamily="18" charset="0"/>
               </a:rPr>
@@ -10963,7 +10543,7 @@
               <a:buNone/>
             </a:pPr>
             <a:r>
-              <a:rPr lang="en-US" sz="2400" dirty="0" smtClean="0">
+              <a:rPr lang="en-US" sz="2400" dirty="0">
                 <a:latin typeface="Times New Roman" pitchFamily="18" charset="0"/>
                 <a:cs typeface="Times New Roman" pitchFamily="18" charset="0"/>
               </a:rPr>
@@ -10975,37 +10555,19 @@
               <a:buNone/>
             </a:pPr>
             <a:r>
-              <a:rPr lang="en-US" sz="2400" dirty="0" smtClean="0">
-                <a:latin typeface="Times New Roman" pitchFamily="18" charset="0"/>
-                <a:cs typeface="Times New Roman" pitchFamily="18" charset="0"/>
-              </a:rPr>
-              <a:t>	</a:t>
-            </a:r>
-            <a:r>
-              <a:rPr lang="en-US" sz="2400" dirty="0" smtClean="0">
-                <a:latin typeface="Times New Roman" pitchFamily="18" charset="0"/>
-                <a:cs typeface="Times New Roman" pitchFamily="18" charset="0"/>
-              </a:rPr>
-              <a:t> </a:t>
-            </a:r>
-            <a:r>
-              <a:rPr lang="en-US" sz="2400" dirty="0" smtClean="0">
-                <a:latin typeface="Times New Roman" pitchFamily="18" charset="0"/>
-                <a:cs typeface="Times New Roman" pitchFamily="18" charset="0"/>
-              </a:rPr>
-              <a:t>Application </a:t>
-            </a:r>
-            <a:endParaRPr lang="en-US" sz="2400" dirty="0" smtClean="0">
-              <a:latin typeface="Times New Roman" pitchFamily="18" charset="0"/>
-              <a:cs typeface="Times New Roman" pitchFamily="18" charset="0"/>
-            </a:endParaRPr>
-          </a:p>
-          <a:p>
-            <a:pPr>
-              <a:buNone/>
-            </a:pPr>
-            <a:r>
-              <a:rPr lang="en-US" sz="2400" dirty="0" smtClean="0">
+              <a:rPr lang="en-US" sz="2400" dirty="0">
+                <a:latin typeface="Times New Roman" pitchFamily="18" charset="0"/>
+                <a:cs typeface="Times New Roman" pitchFamily="18" charset="0"/>
+              </a:rPr>
+              <a:t>	 Application </a:t>
+            </a:r>
+          </a:p>
+          <a:p>
+            <a:pPr>
+              <a:buNone/>
+            </a:pPr>
+            <a:r>
+              <a:rPr lang="en-US" sz="2400" dirty="0">
                 <a:latin typeface="Times New Roman" pitchFamily="18" charset="0"/>
                 <a:cs typeface="Times New Roman" pitchFamily="18" charset="0"/>
               </a:rPr>
@@ -11017,114 +10579,60 @@
               <a:buNone/>
             </a:pPr>
             <a:r>
-              <a:rPr lang="en-US" sz="2400" dirty="0" smtClean="0">
-                <a:latin typeface="Times New Roman" pitchFamily="18" charset="0"/>
-                <a:cs typeface="Times New Roman" pitchFamily="18" charset="0"/>
-              </a:rPr>
-              <a:t>	</a:t>
-            </a:r>
-            <a:r>
-              <a:rPr lang="en-US" sz="2400" dirty="0" smtClean="0">
-                <a:latin typeface="Times New Roman" pitchFamily="18" charset="0"/>
-                <a:cs typeface="Times New Roman" pitchFamily="18" charset="0"/>
-              </a:rPr>
-              <a:t> </a:t>
-            </a:r>
-            <a:r>
-              <a:rPr lang="en-US" sz="2400" dirty="0" smtClean="0">
-                <a:latin typeface="Times New Roman" pitchFamily="18" charset="0"/>
-                <a:cs typeface="Times New Roman" pitchFamily="18" charset="0"/>
-              </a:rPr>
-              <a:t>LLM </a:t>
-            </a:r>
-            <a:endParaRPr lang="en-US" sz="2400" dirty="0" smtClean="0">
-              <a:latin typeface="Times New Roman" pitchFamily="18" charset="0"/>
-              <a:cs typeface="Times New Roman" pitchFamily="18" charset="0"/>
-            </a:endParaRPr>
-          </a:p>
-          <a:p>
-            <a:pPr>
-              <a:buNone/>
-            </a:pPr>
-            <a:r>
-              <a:rPr lang="en-US" sz="2400" dirty="0" smtClean="0">
-                <a:latin typeface="Times New Roman" pitchFamily="18" charset="0"/>
-                <a:cs typeface="Times New Roman" pitchFamily="18" charset="0"/>
-              </a:rPr>
-              <a:t>	</a:t>
-            </a:r>
-            <a:r>
-              <a:rPr lang="en-US" sz="2400" dirty="0" smtClean="0">
-                <a:latin typeface="Times New Roman" pitchFamily="18" charset="0"/>
-                <a:cs typeface="Times New Roman" pitchFamily="18" charset="0"/>
-              </a:rPr>
-              <a:t>↓ </a:t>
-            </a:r>
-          </a:p>
-          <a:p>
-            <a:pPr>
-              <a:buNone/>
-            </a:pPr>
-            <a:r>
-              <a:rPr lang="en-US" sz="2400" dirty="0" smtClean="0">
-                <a:latin typeface="Times New Roman" pitchFamily="18" charset="0"/>
-                <a:cs typeface="Times New Roman" pitchFamily="18" charset="0"/>
-              </a:rPr>
-              <a:t>	</a:t>
-            </a:r>
-            <a:r>
-              <a:rPr lang="en-US" sz="2400" dirty="0" smtClean="0">
-                <a:latin typeface="Times New Roman" pitchFamily="18" charset="0"/>
-                <a:cs typeface="Times New Roman" pitchFamily="18" charset="0"/>
-              </a:rPr>
-              <a:t>Skills </a:t>
-            </a:r>
-            <a:r>
-              <a:rPr lang="en-US" sz="2400" dirty="0" smtClean="0">
-                <a:latin typeface="Times New Roman" pitchFamily="18" charset="0"/>
-                <a:cs typeface="Times New Roman" pitchFamily="18" charset="0"/>
-              </a:rPr>
-              <a:t>Analysis </a:t>
-            </a:r>
-            <a:endParaRPr lang="en-US" sz="2400" dirty="0" smtClean="0">
-              <a:latin typeface="Times New Roman" pitchFamily="18" charset="0"/>
-              <a:cs typeface="Times New Roman" pitchFamily="18" charset="0"/>
-            </a:endParaRPr>
-          </a:p>
-          <a:p>
-            <a:pPr>
-              <a:buNone/>
-            </a:pPr>
-            <a:r>
-              <a:rPr lang="en-US" sz="2400" dirty="0" smtClean="0">
-                <a:latin typeface="Times New Roman" pitchFamily="18" charset="0"/>
-                <a:cs typeface="Times New Roman" pitchFamily="18" charset="0"/>
-              </a:rPr>
-              <a:t>	</a:t>
-            </a:r>
-            <a:r>
-              <a:rPr lang="en-US" sz="2400" dirty="0" smtClean="0">
-                <a:latin typeface="Times New Roman" pitchFamily="18" charset="0"/>
-                <a:cs typeface="Times New Roman" pitchFamily="18" charset="0"/>
-              </a:rPr>
-              <a:t>↓ </a:t>
-            </a:r>
-          </a:p>
-          <a:p>
-            <a:pPr>
-              <a:buNone/>
-            </a:pPr>
-            <a:r>
-              <a:rPr lang="en-US" sz="2400" dirty="0" smtClean="0">
+              <a:rPr lang="en-US" sz="2400" dirty="0">
+                <a:latin typeface="Times New Roman" pitchFamily="18" charset="0"/>
+                <a:cs typeface="Times New Roman" pitchFamily="18" charset="0"/>
+              </a:rPr>
+              <a:t>	 LLM </a:t>
+            </a:r>
+          </a:p>
+          <a:p>
+            <a:pPr>
+              <a:buNone/>
+            </a:pPr>
+            <a:r>
+              <a:rPr lang="en-US" sz="2400" dirty="0">
+                <a:latin typeface="Times New Roman" pitchFamily="18" charset="0"/>
+                <a:cs typeface="Times New Roman" pitchFamily="18" charset="0"/>
+              </a:rPr>
+              <a:t>	↓ </a:t>
+            </a:r>
+          </a:p>
+          <a:p>
+            <a:pPr>
+              <a:buNone/>
+            </a:pPr>
+            <a:r>
+              <a:rPr lang="en-US" sz="2400" dirty="0">
+                <a:latin typeface="Times New Roman" pitchFamily="18" charset="0"/>
+                <a:cs typeface="Times New Roman" pitchFamily="18" charset="0"/>
+              </a:rPr>
+              <a:t>	Skills Analysis </a:t>
+            </a:r>
+          </a:p>
+          <a:p>
+            <a:pPr>
+              <a:buNone/>
+            </a:pPr>
+            <a:r>
+              <a:rPr lang="en-US" sz="2400" dirty="0">
+                <a:latin typeface="Times New Roman" pitchFamily="18" charset="0"/>
+                <a:cs typeface="Times New Roman" pitchFamily="18" charset="0"/>
+              </a:rPr>
+              <a:t>	↓ </a:t>
+            </a:r>
+          </a:p>
+          <a:p>
+            <a:pPr>
+              <a:buNone/>
+            </a:pPr>
+            <a:r>
+              <a:rPr lang="en-US" sz="2400" dirty="0">
                 <a:latin typeface="Times New Roman" pitchFamily="18" charset="0"/>
                 <a:cs typeface="Times New Roman" pitchFamily="18" charset="0"/>
               </a:rPr>
               <a:t>Recommendations</a:t>
             </a:r>
-            <a:endParaRPr lang="en-US" sz="2400" dirty="0" smtClean="0">
-              <a:latin typeface="Times New Roman" pitchFamily="18" charset="0"/>
-              <a:cs typeface="Times New Roman" pitchFamily="18" charset="0"/>
-            </a:endParaRPr>
           </a:p>
           <a:p>
             <a:endParaRPr lang="en-US" sz="2400" dirty="0"/>
@@ -11182,25 +10690,18 @@
               <a:buNone/>
             </a:pPr>
             <a:r>
-              <a:rPr lang="en-US" sz="2400" b="1" dirty="0" smtClean="0">
-                <a:latin typeface="Times New Roman" pitchFamily="18" charset="0"/>
-                <a:cs typeface="Times New Roman" pitchFamily="18" charset="0"/>
-              </a:rPr>
-              <a:t>AI Customer </a:t>
-            </a:r>
-            <a:r>
-              <a:rPr lang="en-US" sz="2400" b="1" dirty="0" smtClean="0">
-                <a:latin typeface="Times New Roman" pitchFamily="18" charset="0"/>
-                <a:cs typeface="Times New Roman" pitchFamily="18" charset="0"/>
-              </a:rPr>
-              <a:t>Support</a:t>
-            </a:r>
-          </a:p>
-          <a:p>
-            <a:pPr>
-              <a:buNone/>
-            </a:pPr>
-            <a:endParaRPr lang="en-US" sz="2400" b="1" dirty="0" smtClean="0">
+              <a:rPr lang="en-US" sz="2400" b="1" dirty="0">
+                <a:latin typeface="Times New Roman" pitchFamily="18" charset="0"/>
+                <a:cs typeface="Times New Roman" pitchFamily="18" charset="0"/>
+              </a:rPr>
+              <a:t>AI Customer Support</a:t>
+            </a:r>
+          </a:p>
+          <a:p>
+            <a:pPr>
+              <a:buNone/>
+            </a:pPr>
+            <a:endParaRPr lang="en-US" sz="2400" b="1" dirty="0">
               <a:latin typeface="Times New Roman" pitchFamily="18" charset="0"/>
               <a:cs typeface="Times New Roman" pitchFamily="18" charset="0"/>
             </a:endParaRPr>
@@ -11210,23 +10711,19 @@
               <a:buNone/>
             </a:pPr>
             <a:r>
-              <a:rPr lang="en-US" sz="2400" dirty="0" smtClean="0">
+              <a:rPr lang="en-US" sz="2400" dirty="0">
                 <a:latin typeface="Times New Roman" pitchFamily="18" charset="0"/>
                 <a:cs typeface="Times New Roman" pitchFamily="18" charset="0"/>
               </a:rPr>
               <a:t>Customer </a:t>
             </a:r>
-            <a:endParaRPr lang="en-US" sz="2400" dirty="0" smtClean="0">
-              <a:latin typeface="Times New Roman" pitchFamily="18" charset="0"/>
-              <a:cs typeface="Times New Roman" pitchFamily="18" charset="0"/>
-            </a:endParaRPr>
-          </a:p>
-          <a:p>
-            <a:pPr>
-              <a:buNone/>
-            </a:pPr>
-            <a:r>
-              <a:rPr lang="en-US" sz="2400" dirty="0" smtClean="0">
+          </a:p>
+          <a:p>
+            <a:pPr>
+              <a:buNone/>
+            </a:pPr>
+            <a:r>
+              <a:rPr lang="en-US" sz="2400" dirty="0">
                 <a:latin typeface="Times New Roman" pitchFamily="18" charset="0"/>
                 <a:cs typeface="Times New Roman" pitchFamily="18" charset="0"/>
               </a:rPr>
@@ -11238,7 +10735,7 @@
               <a:buNone/>
             </a:pPr>
             <a:r>
-              <a:rPr lang="en-US" sz="2400" dirty="0" smtClean="0">
+              <a:rPr lang="en-US" sz="2400" dirty="0">
                 <a:latin typeface="Times New Roman" pitchFamily="18" charset="0"/>
                 <a:cs typeface="Times New Roman" pitchFamily="18" charset="0"/>
               </a:rPr>
@@ -11250,7 +10747,7 @@
               <a:buNone/>
             </a:pPr>
             <a:r>
-              <a:rPr lang="en-US" sz="2400" dirty="0" smtClean="0">
+              <a:rPr lang="en-US" sz="2400" dirty="0">
                 <a:latin typeface="Times New Roman" pitchFamily="18" charset="0"/>
                 <a:cs typeface="Times New Roman" pitchFamily="18" charset="0"/>
               </a:rPr>
@@ -11262,30 +10759,19 @@
               <a:buNone/>
             </a:pPr>
             <a:r>
-              <a:rPr lang="en-US" sz="2400" dirty="0" smtClean="0">
-                <a:latin typeface="Times New Roman" pitchFamily="18" charset="0"/>
-                <a:cs typeface="Times New Roman" pitchFamily="18" charset="0"/>
-              </a:rPr>
-              <a:t>Knowledge </a:t>
-            </a:r>
-            <a:r>
-              <a:rPr lang="en-US" sz="2400" dirty="0" smtClean="0">
-                <a:latin typeface="Times New Roman" pitchFamily="18" charset="0"/>
-                <a:cs typeface="Times New Roman" pitchFamily="18" charset="0"/>
-              </a:rPr>
-              <a:t>Base </a:t>
-            </a:r>
-            <a:endParaRPr lang="en-US" sz="2400" dirty="0" smtClean="0">
-              <a:latin typeface="Times New Roman" pitchFamily="18" charset="0"/>
-              <a:cs typeface="Times New Roman" pitchFamily="18" charset="0"/>
-            </a:endParaRPr>
-          </a:p>
-          <a:p>
-            <a:pPr>
-              <a:buNone/>
-            </a:pPr>
-            <a:r>
-              <a:rPr lang="en-US" sz="2400" dirty="0" smtClean="0">
+              <a:rPr lang="en-US" sz="2400" dirty="0">
+                <a:latin typeface="Times New Roman" pitchFamily="18" charset="0"/>
+                <a:cs typeface="Times New Roman" pitchFamily="18" charset="0"/>
+              </a:rPr>
+              <a:t>Knowledge Base </a:t>
+            </a:r>
+          </a:p>
+          <a:p>
+            <a:pPr>
+              <a:buNone/>
+            </a:pPr>
+            <a:r>
+              <a:rPr lang="en-US" sz="2400" dirty="0">
                 <a:latin typeface="Times New Roman" pitchFamily="18" charset="0"/>
                 <a:cs typeface="Times New Roman" pitchFamily="18" charset="0"/>
               </a:rPr>
@@ -11297,7 +10783,7 @@
               <a:buNone/>
             </a:pPr>
             <a:r>
-              <a:rPr lang="en-US" sz="2400" dirty="0" smtClean="0">
+              <a:rPr lang="en-US" sz="2400" dirty="0">
                 <a:latin typeface="Times New Roman" pitchFamily="18" charset="0"/>
                 <a:cs typeface="Times New Roman" pitchFamily="18" charset="0"/>
               </a:rPr>
@@ -11309,7 +10795,7 @@
               <a:buNone/>
             </a:pPr>
             <a:r>
-              <a:rPr lang="en-US" sz="2400" dirty="0" smtClean="0">
+              <a:rPr lang="en-US" sz="2400" dirty="0">
                 <a:latin typeface="Times New Roman" pitchFamily="18" charset="0"/>
                 <a:cs typeface="Times New Roman" pitchFamily="18" charset="0"/>
               </a:rPr>
@@ -11321,16 +10807,12 @@
               <a:buNone/>
             </a:pPr>
             <a:r>
-              <a:rPr lang="en-US" sz="2400" dirty="0" smtClean="0">
+              <a:rPr lang="en-US" sz="2400" dirty="0">
                 <a:latin typeface="Times New Roman" pitchFamily="18" charset="0"/>
                 <a:cs typeface="Times New Roman" pitchFamily="18" charset="0"/>
               </a:rPr>
               <a:t>Response</a:t>
             </a:r>
-            <a:endParaRPr lang="en-US" sz="2400" dirty="0" smtClean="0">
-              <a:latin typeface="Times New Roman" pitchFamily="18" charset="0"/>
-              <a:cs typeface="Times New Roman" pitchFamily="18" charset="0"/>
-            </a:endParaRPr>
           </a:p>
           <a:p>
             <a:endParaRPr lang="en-US" sz="2400" dirty="0"/>
@@ -11388,7 +10870,7 @@
               <a:buNone/>
             </a:pPr>
             <a:r>
-              <a:rPr lang="en-US" sz="2400" b="1" dirty="0" smtClean="0">
+              <a:rPr lang="en-US" sz="2400" b="1" dirty="0">
                 <a:latin typeface="Times New Roman" pitchFamily="18" charset="0"/>
                 <a:cs typeface="Times New Roman" pitchFamily="18" charset="0"/>
               </a:rPr>
@@ -11399,14 +10881,14 @@
             <a:pPr>
               <a:buNone/>
             </a:pPr>
-            <a:endParaRPr lang="en-US" sz="2400" b="1" dirty="0" smtClean="0">
+            <a:endParaRPr lang="en-US" sz="2400" b="1" dirty="0">
               <a:latin typeface="Times New Roman" pitchFamily="18" charset="0"/>
               <a:cs typeface="Times New Roman" pitchFamily="18" charset="0"/>
             </a:endParaRPr>
           </a:p>
           <a:p>
             <a:r>
-              <a:rPr lang="en-US" sz="2400" dirty="0" smtClean="0">
+              <a:rPr lang="en-US" sz="2400" dirty="0">
                 <a:latin typeface="Times New Roman" pitchFamily="18" charset="0"/>
                 <a:cs typeface="Times New Roman" pitchFamily="18" charset="0"/>
               </a:rPr>
@@ -11415,7 +10897,7 @@
           </a:p>
           <a:p>
             <a:r>
-              <a:rPr lang="en-US" sz="2400" dirty="0" smtClean="0">
+              <a:rPr lang="en-US" sz="2400" dirty="0">
                 <a:latin typeface="Times New Roman" pitchFamily="18" charset="0"/>
                 <a:cs typeface="Times New Roman" pitchFamily="18" charset="0"/>
               </a:rPr>
@@ -11424,7 +10906,7 @@
           </a:p>
           <a:p>
             <a:r>
-              <a:rPr lang="en-US" sz="2400" dirty="0" smtClean="0">
+              <a:rPr lang="en-US" sz="2400" dirty="0">
                 <a:latin typeface="Times New Roman" pitchFamily="18" charset="0"/>
                 <a:cs typeface="Times New Roman" pitchFamily="18" charset="0"/>
               </a:rPr>
@@ -11433,7 +10915,7 @@
           </a:p>
           <a:p>
             <a:r>
-              <a:rPr lang="en-US" sz="2400" dirty="0" smtClean="0">
+              <a:rPr lang="en-US" sz="2400" dirty="0">
                 <a:latin typeface="Times New Roman" pitchFamily="18" charset="0"/>
                 <a:cs typeface="Times New Roman" pitchFamily="18" charset="0"/>
               </a:rPr>
@@ -11442,7 +10924,7 @@
           </a:p>
           <a:p>
             <a:r>
-              <a:rPr lang="en-US" sz="2400" dirty="0" smtClean="0">
+              <a:rPr lang="en-US" sz="2400" dirty="0">
                 <a:latin typeface="Times New Roman" pitchFamily="18" charset="0"/>
                 <a:cs typeface="Times New Roman" pitchFamily="18" charset="0"/>
               </a:rPr>
@@ -11451,16 +10933,12 @@
           </a:p>
           <a:p>
             <a:r>
-              <a:rPr lang="en-US" sz="2400" dirty="0" smtClean="0">
+              <a:rPr lang="en-US" sz="2400" dirty="0">
                 <a:latin typeface="Times New Roman" pitchFamily="18" charset="0"/>
                 <a:cs typeface="Times New Roman" pitchFamily="18" charset="0"/>
               </a:rPr>
               <a:t>Select an appropriate model for a task</a:t>
             </a:r>
-            <a:endParaRPr lang="en-US" sz="2400" dirty="0">
-              <a:latin typeface="Times New Roman" pitchFamily="18" charset="0"/>
-              <a:cs typeface="Times New Roman" pitchFamily="18" charset="0"/>
-            </a:endParaRPr>
           </a:p>
         </p:txBody>
       </p:sp>
@@ -11541,7 +11019,7 @@
               <a:buNone/>
               <a:tabLst/>
             </a:pPr>
-            <a:endParaRPr kumimoji="0" lang="en-US" sz="2800" b="1" i="0" u="sng" strike="noStrike" cap="none" normalizeH="0" baseline="0" dirty="0" smtClean="0">
+            <a:endParaRPr kumimoji="0" lang="en-US" sz="2800" b="1" i="0" u="sng" strike="noStrike" cap="none" normalizeH="0" baseline="0" dirty="0">
               <a:ln>
                 <a:noFill/>
               </a:ln>
@@ -11571,7 +11049,7 @@
               <a:tabLst/>
             </a:pPr>
             <a:r>
-              <a:rPr kumimoji="0" lang="en-US" sz="2800" b="1" i="0" u="sng" strike="noStrike" cap="none" normalizeH="0" baseline="0" dirty="0" smtClean="0">
+              <a:rPr kumimoji="0" lang="en-US" sz="2800" b="1" i="0" u="sng" strike="noStrike" cap="none" normalizeH="0" baseline="0" dirty="0">
                 <a:ln>
                   <a:noFill/>
                 </a:ln>
@@ -11602,7 +11080,7 @@
               <a:buNone/>
               <a:tabLst/>
             </a:pPr>
-            <a:endParaRPr kumimoji="0" lang="en-IN" sz="2800" b="1" i="0" u="sng" strike="noStrike" cap="none" normalizeH="0" baseline="0" dirty="0" smtClean="0">
+            <a:endParaRPr kumimoji="0" lang="en-IN" sz="2800" b="1" i="0" u="sng" strike="noStrike" cap="none" normalizeH="0" baseline="0" dirty="0">
               <a:ln>
                 <a:noFill/>
               </a:ln>
@@ -11631,7 +11109,7 @@
               <a:buNone/>
               <a:tabLst/>
             </a:pPr>
-            <a:endParaRPr lang="en-IN" sz="2800" b="1" u="sng" dirty="0" smtClean="0">
+            <a:endParaRPr lang="en-IN" sz="2800" b="1" u="sng" dirty="0">
               <a:latin typeface="Times New Roman" pitchFamily="18" charset="0"/>
               <a:cs typeface="Times New Roman" pitchFamily="18" charset="0"/>
             </a:endParaRPr>
@@ -11653,7 +11131,7 @@
               <a:buNone/>
               <a:tabLst/>
             </a:pPr>
-            <a:endParaRPr kumimoji="0" lang="en-US" sz="2800" b="1" i="0" u="sng" strike="noStrike" cap="none" normalizeH="0" baseline="0" dirty="0" smtClean="0">
+            <a:endParaRPr kumimoji="0" lang="en-US" sz="2800" b="1" i="0" u="sng" strike="noStrike" cap="none" normalizeH="0" baseline="0" dirty="0">
               <a:ln>
                 <a:noFill/>
               </a:ln>
@@ -11683,7 +11161,7 @@
               <a:tabLst/>
             </a:pPr>
             <a:r>
-              <a:rPr kumimoji="0" lang="en-US" sz="2400" b="1" i="0" u="none" strike="noStrike" cap="none" normalizeH="0" baseline="0" dirty="0" smtClean="0">
+              <a:rPr kumimoji="0" lang="en-US" sz="2400" b="1" i="0" u="none" strike="noStrike" cap="none" normalizeH="0" baseline="0" dirty="0">
                 <a:ln>
                   <a:noFill/>
                 </a:ln>
@@ -11714,7 +11192,7 @@
               <a:buNone/>
               <a:tabLst/>
             </a:pPr>
-            <a:endParaRPr lang="en-IN" sz="2400" b="1" dirty="0" smtClean="0">
+            <a:endParaRPr lang="en-IN" sz="2400" b="1" dirty="0">
               <a:latin typeface="Times New Roman" pitchFamily="18" charset="0"/>
               <a:cs typeface="Times New Roman" pitchFamily="18" charset="0"/>
             </a:endParaRPr>
@@ -11736,7 +11214,7 @@
               <a:buNone/>
               <a:tabLst/>
             </a:pPr>
-            <a:endParaRPr kumimoji="0" lang="en-IN" sz="2400" b="1" i="0" u="none" strike="noStrike" cap="none" normalizeH="0" baseline="0" dirty="0" smtClean="0">
+            <a:endParaRPr kumimoji="0" lang="en-IN" sz="2400" b="1" i="0" u="none" strike="noStrike" cap="none" normalizeH="0" baseline="0" dirty="0">
               <a:ln>
                 <a:noFill/>
               </a:ln>
@@ -11765,7 +11243,7 @@
               <a:buNone/>
               <a:tabLst/>
             </a:pPr>
-            <a:endParaRPr kumimoji="0" lang="en-US" sz="2400" b="1" i="0" u="none" strike="noStrike" cap="none" normalizeH="0" baseline="0" dirty="0" smtClean="0">
+            <a:endParaRPr kumimoji="0" lang="en-US" sz="2400" b="1" i="0" u="none" strike="noStrike" cap="none" normalizeH="0" baseline="0" dirty="0">
               <a:ln>
                 <a:noFill/>
               </a:ln>
@@ -11795,7 +11273,7 @@
               <a:tabLst/>
             </a:pPr>
             <a:r>
-              <a:rPr kumimoji="0" lang="en-US" sz="2400" b="0" i="0" u="none" strike="noStrike" cap="none" normalizeH="0" baseline="0" dirty="0" smtClean="0">
+              <a:rPr kumimoji="0" lang="en-US" sz="2400" b="0" i="0" u="none" strike="noStrike" cap="none" normalizeH="0" baseline="0" dirty="0">
                 <a:ln>
                   <a:noFill/>
                 </a:ln>
@@ -11827,7 +11305,7 @@
               <a:tabLst/>
             </a:pPr>
             <a:r>
-              <a:rPr kumimoji="0" lang="en-US" sz="2400" b="0" i="0" u="none" strike="noStrike" cap="none" normalizeH="0" baseline="0" dirty="0" smtClean="0">
+              <a:rPr kumimoji="0" lang="en-US" sz="2400" b="0" i="0" u="none" strike="noStrike" cap="none" normalizeH="0" baseline="0" dirty="0">
                 <a:ln>
                   <a:noFill/>
                 </a:ln>
@@ -11859,7 +11337,7 @@
               <a:tabLst/>
             </a:pPr>
             <a:r>
-              <a:rPr kumimoji="0" lang="en-US" sz="2400" b="0" i="0" u="none" strike="noStrike" cap="none" normalizeH="0" baseline="0" dirty="0" smtClean="0">
+              <a:rPr kumimoji="0" lang="en-US" sz="2400" b="0" i="0" u="none" strike="noStrike" cap="none" normalizeH="0" baseline="0" dirty="0">
                 <a:ln>
                   <a:noFill/>
                 </a:ln>
@@ -11891,7 +11369,7 @@
               <a:tabLst/>
             </a:pPr>
             <a:r>
-              <a:rPr kumimoji="0" lang="en-US" sz="2400" b="0" i="0" u="none" strike="noStrike" cap="none" normalizeH="0" baseline="0" dirty="0" smtClean="0">
+              <a:rPr kumimoji="0" lang="en-US" sz="2400" b="0" i="0" u="none" strike="noStrike" cap="none" normalizeH="0" baseline="0" dirty="0">
                 <a:ln>
                   <a:noFill/>
                 </a:ln>
@@ -11923,7 +11401,7 @@
               <a:tabLst/>
             </a:pPr>
             <a:r>
-              <a:rPr kumimoji="0" lang="en-US" sz="2400" b="0" i="0" u="none" strike="noStrike" cap="none" normalizeH="0" baseline="0" dirty="0" smtClean="0">
+              <a:rPr kumimoji="0" lang="en-US" sz="2400" b="0" i="0" u="none" strike="noStrike" cap="none" normalizeH="0" baseline="0" dirty="0">
                 <a:ln>
                   <a:noFill/>
                 </a:ln>
@@ -11955,7 +11433,7 @@
               <a:tabLst/>
             </a:pPr>
             <a:r>
-              <a:rPr kumimoji="0" lang="en-US" sz="2400" b="0" i="0" u="none" strike="noStrike" cap="none" normalizeH="0" baseline="0" dirty="0" smtClean="0">
+              <a:rPr kumimoji="0" lang="en-US" sz="2400" b="0" i="0" u="none" strike="noStrike" cap="none" normalizeH="0" baseline="0" dirty="0">
                 <a:ln>
                   <a:noFill/>
                 </a:ln>
@@ -11987,7 +11465,7 @@
               <a:tabLst/>
             </a:pPr>
             <a:r>
-              <a:rPr kumimoji="0" lang="en-US" sz="2400" b="0" i="0" u="none" strike="noStrike" cap="none" normalizeH="0" baseline="0" dirty="0" smtClean="0">
+              <a:rPr kumimoji="0" lang="en-US" sz="2400" b="0" i="0" u="none" strike="noStrike" cap="none" normalizeH="0" baseline="0" dirty="0">
                 <a:ln>
                   <a:noFill/>
                 </a:ln>
@@ -12019,7 +11497,7 @@
               <a:tabLst/>
             </a:pPr>
             <a:r>
-              <a:rPr kumimoji="0" lang="en-US" sz="2400" b="0" i="0" u="none" strike="noStrike" cap="none" normalizeH="0" baseline="0" dirty="0" smtClean="0">
+              <a:rPr kumimoji="0" lang="en-US" sz="2400" b="0" i="0" u="none" strike="noStrike" cap="none" normalizeH="0" baseline="0" dirty="0">
                 <a:ln>
                   <a:noFill/>
                 </a:ln>
@@ -12051,7 +11529,7 @@
               <a:tabLst/>
             </a:pPr>
             <a:r>
-              <a:rPr kumimoji="0" lang="en-US" sz="2400" b="0" i="0" u="none" strike="noStrike" cap="none" normalizeH="0" baseline="0" dirty="0" smtClean="0">
+              <a:rPr kumimoji="0" lang="en-US" sz="2400" b="0" i="0" u="none" strike="noStrike" cap="none" normalizeH="0" baseline="0" dirty="0">
                 <a:ln>
                   <a:noFill/>
                 </a:ln>
@@ -12072,13 +11550,6 @@
   <p:clrMapOvr>
     <a:masterClrMapping/>
   </p:clrMapOvr>
-  <p:timing>
-    <p:tnLst>
-      <p:par>
-        <p:cTn id="1" dur="indefinite" restart="never" nodeType="tmRoot"/>
-      </p:par>
-    </p:tnLst>
-  </p:timing>
 </p:sld>
 </file>
 
@@ -12133,18 +11604,11 @@
               <a:buNone/>
             </a:pPr>
             <a:r>
-              <a:rPr lang="en-US" sz="2400" b="1" dirty="0" smtClean="0">
-                <a:latin typeface="Times New Roman" pitchFamily="18" charset="0"/>
-                <a:cs typeface="Times New Roman" pitchFamily="18" charset="0"/>
-              </a:rPr>
-              <a:t>Industry </a:t>
-            </a:r>
-            <a:r>
-              <a:rPr lang="en-US" sz="2400" b="1" dirty="0" smtClean="0">
-                <a:latin typeface="Times New Roman" pitchFamily="18" charset="0"/>
-                <a:cs typeface="Times New Roman" pitchFamily="18" charset="0"/>
-              </a:rPr>
-              <a:t>Skill</a:t>
+              <a:rPr lang="en-US" sz="2400" b="1" dirty="0">
+                <a:latin typeface="Times New Roman" pitchFamily="18" charset="0"/>
+                <a:cs typeface="Times New Roman" pitchFamily="18" charset="0"/>
+              </a:rPr>
+              <a:t>Industry Skill</a:t>
             </a:r>
           </a:p>
           <a:p>
@@ -12159,7 +11623,7 @@
               <a:buSzTx/>
               <a:buNone/>
             </a:pPr>
-            <a:endParaRPr lang="en-US" sz="2400" b="1" dirty="0" smtClean="0">
+            <a:endParaRPr lang="en-US" sz="2400" b="1" dirty="0">
               <a:latin typeface="Times New Roman" pitchFamily="18" charset="0"/>
               <a:cs typeface="Times New Roman" pitchFamily="18" charset="0"/>
             </a:endParaRPr>
@@ -12177,18 +11641,11 @@
               <a:buNone/>
             </a:pPr>
             <a:r>
-              <a:rPr lang="en-US" sz="2400" dirty="0" smtClean="0">
-                <a:latin typeface="Times New Roman" pitchFamily="18" charset="0"/>
-                <a:cs typeface="Times New Roman" pitchFamily="18" charset="0"/>
-              </a:rPr>
-              <a:t>Students should understand</a:t>
-            </a:r>
-            <a:r>
-              <a:rPr lang="en-US" sz="2400" dirty="0" smtClean="0">
-                <a:latin typeface="Times New Roman" pitchFamily="18" charset="0"/>
-                <a:cs typeface="Times New Roman" pitchFamily="18" charset="0"/>
-              </a:rPr>
-              <a:t>:</a:t>
+              <a:rPr lang="en-US" sz="2400" dirty="0">
+                <a:latin typeface="Times New Roman" pitchFamily="18" charset="0"/>
+                <a:cs typeface="Times New Roman" pitchFamily="18" charset="0"/>
+              </a:rPr>
+              <a:t>Students should understand:</a:t>
             </a:r>
           </a:p>
           <a:p>
@@ -12203,7 +11660,7 @@
               <a:buSzTx/>
               <a:buNone/>
             </a:pPr>
-            <a:endParaRPr lang="en-US" sz="2400" dirty="0" smtClean="0">
+            <a:endParaRPr lang="en-US" sz="2400" dirty="0">
               <a:latin typeface="Times New Roman" pitchFamily="18" charset="0"/>
               <a:cs typeface="Times New Roman" pitchFamily="18" charset="0"/>
             </a:endParaRPr>
@@ -12222,7 +11679,7 @@
               <a:buChar char="•"/>
             </a:pPr>
             <a:r>
-              <a:rPr lang="en-US" sz="2400" dirty="0" smtClean="0">
+              <a:rPr lang="en-US" sz="2400" dirty="0">
                 <a:latin typeface="Times New Roman" pitchFamily="18" charset="0"/>
                 <a:cs typeface="Times New Roman" pitchFamily="18" charset="0"/>
               </a:rPr>
@@ -12243,7 +11700,7 @@
               <a:buChar char="•"/>
             </a:pPr>
             <a:r>
-              <a:rPr lang="en-US" sz="2400" dirty="0" smtClean="0">
+              <a:rPr lang="en-US" sz="2400" dirty="0">
                 <a:latin typeface="Times New Roman" pitchFamily="18" charset="0"/>
                 <a:cs typeface="Times New Roman" pitchFamily="18" charset="0"/>
               </a:rPr>
@@ -12264,7 +11721,7 @@
               <a:buChar char="•"/>
             </a:pPr>
             <a:r>
-              <a:rPr lang="en-US" sz="2400" dirty="0" smtClean="0">
+              <a:rPr lang="en-US" sz="2400" dirty="0">
                 <a:latin typeface="Times New Roman" pitchFamily="18" charset="0"/>
                 <a:cs typeface="Times New Roman" pitchFamily="18" charset="0"/>
               </a:rPr>
@@ -12285,7 +11742,7 @@
               <a:buChar char="•"/>
             </a:pPr>
             <a:r>
-              <a:rPr lang="en-US" sz="2400" dirty="0" smtClean="0">
+              <a:rPr lang="en-US" sz="2400" dirty="0">
                 <a:latin typeface="Times New Roman" pitchFamily="18" charset="0"/>
                 <a:cs typeface="Times New Roman" pitchFamily="18" charset="0"/>
               </a:rPr>
@@ -12306,7 +11763,7 @@
               <a:buChar char="•"/>
             </a:pPr>
             <a:r>
-              <a:rPr lang="en-US" sz="2400" dirty="0" smtClean="0">
+              <a:rPr lang="en-US" sz="2400" dirty="0">
                 <a:latin typeface="Times New Roman" pitchFamily="18" charset="0"/>
                 <a:cs typeface="Times New Roman" pitchFamily="18" charset="0"/>
               </a:rPr>
@@ -12327,7 +11784,7 @@
               <a:buChar char="•"/>
             </a:pPr>
             <a:r>
-              <a:rPr lang="en-US" sz="2400" dirty="0" smtClean="0">
+              <a:rPr lang="en-US" sz="2400" dirty="0">
                 <a:latin typeface="Times New Roman" pitchFamily="18" charset="0"/>
                 <a:cs typeface="Times New Roman" pitchFamily="18" charset="0"/>
               </a:rPr>
@@ -12348,7 +11805,7 @@
               <a:buChar char="•"/>
             </a:pPr>
             <a:r>
-              <a:rPr lang="en-US" sz="2400" dirty="0" smtClean="0">
+              <a:rPr lang="en-US" sz="2400" dirty="0">
                 <a:latin typeface="Times New Roman" pitchFamily="18" charset="0"/>
                 <a:cs typeface="Times New Roman" pitchFamily="18" charset="0"/>
               </a:rPr>
@@ -12369,7 +11826,7 @@
               <a:buChar char="•"/>
             </a:pPr>
             <a:r>
-              <a:rPr lang="en-US" sz="2400" dirty="0" smtClean="0">
+              <a:rPr lang="en-US" sz="2400" dirty="0">
                 <a:latin typeface="Times New Roman" pitchFamily="18" charset="0"/>
                 <a:cs typeface="Times New Roman" pitchFamily="18" charset="0"/>
               </a:rPr>
@@ -12388,7 +11845,7 @@
               <a:buSzTx/>
               <a:buNone/>
             </a:pPr>
-            <a:endParaRPr lang="en-US" sz="2400" dirty="0" smtClean="0">
+            <a:endParaRPr lang="en-US" sz="2400" dirty="0">
               <a:latin typeface="Times New Roman" pitchFamily="18" charset="0"/>
               <a:cs typeface="Times New Roman" pitchFamily="18" charset="0"/>
             </a:endParaRPr>
@@ -12446,7 +11903,7 @@
               <a:buNone/>
             </a:pPr>
             <a:r>
-              <a:rPr lang="en-US" sz="3000" b="1" u="sng" dirty="0" smtClean="0">
+              <a:rPr lang="en-US" sz="3000" b="1" u="sng" dirty="0">
                 <a:latin typeface="Times New Roman" pitchFamily="18" charset="0"/>
                 <a:cs typeface="Times New Roman" pitchFamily="18" charset="0"/>
               </a:rPr>
@@ -12458,7 +11915,7 @@
               <a:buNone/>
             </a:pPr>
             <a:r>
-              <a:rPr lang="en-US" sz="2600" b="1" dirty="0" smtClean="0">
+              <a:rPr lang="en-US" sz="2600" b="1" dirty="0">
                 <a:latin typeface="Times New Roman" pitchFamily="18" charset="0"/>
                 <a:cs typeface="Times New Roman" pitchFamily="18" charset="0"/>
               </a:rPr>
@@ -12470,7 +11927,7 @@
               <a:buNone/>
             </a:pPr>
             <a:r>
-              <a:rPr lang="en-US" sz="2600" dirty="0" smtClean="0">
+              <a:rPr lang="en-US" sz="2600" dirty="0">
                 <a:latin typeface="Times New Roman" pitchFamily="18" charset="0"/>
                 <a:cs typeface="Times New Roman" pitchFamily="18" charset="0"/>
               </a:rPr>
@@ -12482,7 +11939,7 @@
               <a:buNone/>
             </a:pPr>
             <a:r>
-              <a:rPr lang="en-US" sz="2600" b="1" dirty="0" smtClean="0">
+              <a:rPr lang="en-US" sz="2600" b="1" dirty="0">
                 <a:latin typeface="Times New Roman" pitchFamily="18" charset="0"/>
                 <a:cs typeface="Times New Roman" pitchFamily="18" charset="0"/>
               </a:rPr>
@@ -12494,21 +11951,21 @@
               <a:buNone/>
             </a:pPr>
             <a:r>
-              <a:rPr lang="en-US" sz="2600" dirty="0" smtClean="0">
+              <a:rPr lang="en-US" sz="2600" dirty="0">
                 <a:latin typeface="Times New Roman" pitchFamily="18" charset="0"/>
                 <a:cs typeface="Times New Roman" pitchFamily="18" charset="0"/>
               </a:rPr>
               <a:t>LLM family associated with </a:t>
             </a:r>
             <a:r>
-              <a:rPr lang="en-US" sz="2600" dirty="0" err="1" smtClean="0">
+              <a:rPr lang="en-US" sz="2600" dirty="0" err="1">
                 <a:latin typeface="Times New Roman" pitchFamily="18" charset="0"/>
                 <a:cs typeface="Times New Roman" pitchFamily="18" charset="0"/>
               </a:rPr>
               <a:t>Anthropic</a:t>
             </a:r>
             <a:r>
-              <a:rPr lang="en-US" sz="2600" dirty="0" smtClean="0">
+              <a:rPr lang="en-US" sz="2600" dirty="0">
                 <a:latin typeface="Times New Roman" pitchFamily="18" charset="0"/>
                 <a:cs typeface="Times New Roman" pitchFamily="18" charset="0"/>
               </a:rPr>
@@ -12520,7 +11977,7 @@
               <a:buNone/>
             </a:pPr>
             <a:r>
-              <a:rPr lang="en-US" sz="2600" b="1" dirty="0" smtClean="0">
+              <a:rPr lang="en-US" sz="2600" b="1" dirty="0">
                 <a:latin typeface="Times New Roman" pitchFamily="18" charset="0"/>
                 <a:cs typeface="Times New Roman" pitchFamily="18" charset="0"/>
               </a:rPr>
@@ -12532,7 +11989,7 @@
               <a:buNone/>
             </a:pPr>
             <a:r>
-              <a:rPr lang="en-US" sz="2600" dirty="0" smtClean="0">
+              <a:rPr lang="en-US" sz="2600" dirty="0">
                 <a:latin typeface="Times New Roman" pitchFamily="18" charset="0"/>
                 <a:cs typeface="Times New Roman" pitchFamily="18" charset="0"/>
               </a:rPr>
@@ -12544,7 +12001,7 @@
               <a:buNone/>
             </a:pPr>
             <a:r>
-              <a:rPr lang="en-US" sz="2600" b="1" dirty="0" smtClean="0">
+              <a:rPr lang="en-US" sz="2600" b="1" dirty="0">
                 <a:latin typeface="Times New Roman" pitchFamily="18" charset="0"/>
                 <a:cs typeface="Times New Roman" pitchFamily="18" charset="0"/>
               </a:rPr>
@@ -12556,7 +12013,7 @@
               <a:buNone/>
             </a:pPr>
             <a:r>
-              <a:rPr lang="en-US" sz="2600" dirty="0" smtClean="0">
+              <a:rPr lang="en-US" sz="2600" dirty="0">
                 <a:latin typeface="Times New Roman" pitchFamily="18" charset="0"/>
                 <a:cs typeface="Times New Roman" pitchFamily="18" charset="0"/>
               </a:rPr>
@@ -12568,7 +12025,7 @@
               <a:buNone/>
             </a:pPr>
             <a:r>
-              <a:rPr lang="en-US" sz="2600" b="1" dirty="0" smtClean="0">
+              <a:rPr lang="en-US" sz="2600" b="1" dirty="0">
                 <a:latin typeface="Times New Roman" pitchFamily="18" charset="0"/>
                 <a:cs typeface="Times New Roman" pitchFamily="18" charset="0"/>
               </a:rPr>
@@ -12580,7 +12037,7 @@
               <a:buNone/>
             </a:pPr>
             <a:r>
-              <a:rPr lang="en-US" sz="2600" dirty="0" smtClean="0">
+              <a:rPr lang="en-US" sz="2600" dirty="0">
                 <a:latin typeface="Times New Roman" pitchFamily="18" charset="0"/>
                 <a:cs typeface="Times New Roman" pitchFamily="18" charset="0"/>
               </a:rPr>
@@ -12649,7 +12106,7 @@
               <a:buNone/>
             </a:pPr>
             <a:r>
-              <a:rPr lang="en-US" sz="2400" b="1" dirty="0" smtClean="0">
+              <a:rPr lang="en-US" sz="2400" b="1" dirty="0">
                 <a:latin typeface="Times New Roman" pitchFamily="18" charset="0"/>
                 <a:cs typeface="Times New Roman" pitchFamily="18" charset="0"/>
               </a:rPr>
@@ -12661,32 +12118,25 @@
               <a:buNone/>
             </a:pPr>
             <a:r>
-              <a:rPr lang="en-US" sz="2400" dirty="0" err="1" smtClean="0">
+              <a:rPr lang="en-US" sz="2400" dirty="0" err="1">
                 <a:latin typeface="Times New Roman" pitchFamily="18" charset="0"/>
                 <a:cs typeface="Times New Roman" pitchFamily="18" charset="0"/>
               </a:rPr>
               <a:t>Alibaba's</a:t>
             </a:r>
             <a:r>
-              <a:rPr lang="en-US" sz="2400" dirty="0" smtClean="0">
-                <a:latin typeface="Times New Roman" pitchFamily="18" charset="0"/>
-                <a:cs typeface="Times New Roman" pitchFamily="18" charset="0"/>
-              </a:rPr>
-              <a:t> model family with multilingual, coding, reasoning and multimodal variants</a:t>
-            </a:r>
-            <a:r>
-              <a:rPr lang="en-US" sz="2400" dirty="0" smtClean="0">
-                <a:latin typeface="Times New Roman" pitchFamily="18" charset="0"/>
-                <a:cs typeface="Times New Roman" pitchFamily="18" charset="0"/>
-              </a:rPr>
-              <a:t>.</a:t>
-            </a:r>
-          </a:p>
-          <a:p>
-            <a:pPr>
-              <a:buNone/>
-            </a:pPr>
-            <a:endParaRPr lang="en-US" sz="2400" dirty="0" smtClean="0">
+              <a:rPr lang="en-US" sz="2400" dirty="0">
+                <a:latin typeface="Times New Roman" pitchFamily="18" charset="0"/>
+                <a:cs typeface="Times New Roman" pitchFamily="18" charset="0"/>
+              </a:rPr>
+              <a:t> model family with multilingual, coding, reasoning and multimodal variants.</a:t>
+            </a:r>
+          </a:p>
+          <a:p>
+            <a:pPr>
+              <a:buNone/>
+            </a:pPr>
+            <a:endParaRPr lang="en-US" sz="2400" dirty="0">
               <a:latin typeface="Times New Roman" pitchFamily="18" charset="0"/>
               <a:cs typeface="Times New Roman" pitchFamily="18" charset="0"/>
             </a:endParaRPr>
@@ -12696,25 +12146,18 @@
               <a:buNone/>
             </a:pPr>
             <a:r>
-              <a:rPr lang="en-US" sz="2400" b="1" dirty="0" smtClean="0">
-                <a:latin typeface="Times New Roman" pitchFamily="18" charset="0"/>
-                <a:cs typeface="Times New Roman" pitchFamily="18" charset="0"/>
-              </a:rPr>
-              <a:t>Most </a:t>
-            </a:r>
-            <a:r>
-              <a:rPr lang="en-US" sz="2400" b="1" dirty="0" smtClean="0">
-                <a:latin typeface="Times New Roman" pitchFamily="18" charset="0"/>
-                <a:cs typeface="Times New Roman" pitchFamily="18" charset="0"/>
-              </a:rPr>
-              <a:t>Important</a:t>
-            </a:r>
-          </a:p>
-          <a:p>
-            <a:pPr>
-              <a:buNone/>
-            </a:pPr>
-            <a:endParaRPr lang="en-US" sz="2400" b="1" dirty="0" smtClean="0">
+              <a:rPr lang="en-US" sz="2400" b="1" dirty="0">
+                <a:latin typeface="Times New Roman" pitchFamily="18" charset="0"/>
+                <a:cs typeface="Times New Roman" pitchFamily="18" charset="0"/>
+              </a:rPr>
+              <a:t>Most Important</a:t>
+            </a:r>
+          </a:p>
+          <a:p>
+            <a:pPr>
+              <a:buNone/>
+            </a:pPr>
+            <a:endParaRPr lang="en-US" sz="2400" b="1" dirty="0">
               <a:latin typeface="Times New Roman" pitchFamily="18" charset="0"/>
               <a:cs typeface="Times New Roman" pitchFamily="18" charset="0"/>
             </a:endParaRPr>
@@ -12724,13 +12167,13 @@
               <a:buNone/>
             </a:pPr>
             <a:r>
-              <a:rPr lang="en-US" sz="2400" b="1" dirty="0" smtClean="0">
+              <a:rPr lang="en-US" sz="2400" b="1" dirty="0">
                 <a:latin typeface="Times New Roman" pitchFamily="18" charset="0"/>
                 <a:cs typeface="Times New Roman" pitchFamily="18" charset="0"/>
               </a:rPr>
               <a:t>Models evolve rapidly. Learn the concepts and evaluation skills, not just today's model rankings.</a:t>
             </a:r>
-            <a:endParaRPr lang="en-US" sz="2400" dirty="0" smtClean="0">
+            <a:endParaRPr lang="en-US" sz="2400" dirty="0">
               <a:latin typeface="Times New Roman" pitchFamily="18" charset="0"/>
               <a:cs typeface="Times New Roman" pitchFamily="18" charset="0"/>
             </a:endParaRPr>
@@ -12791,25 +12234,18 @@
               <a:buNone/>
             </a:pPr>
             <a:r>
-              <a:rPr lang="en-US" sz="2400" b="1" dirty="0" smtClean="0">
-                <a:latin typeface="Times New Roman" pitchFamily="18" charset="0"/>
-                <a:cs typeface="Times New Roman" pitchFamily="18" charset="0"/>
-              </a:rPr>
-              <a:t>Slide 32 — Exit </a:t>
-            </a:r>
-            <a:r>
-              <a:rPr lang="en-US" sz="2400" b="1" dirty="0" smtClean="0">
-                <a:latin typeface="Times New Roman" pitchFamily="18" charset="0"/>
-                <a:cs typeface="Times New Roman" pitchFamily="18" charset="0"/>
-              </a:rPr>
-              <a:t>Quiz</a:t>
-            </a:r>
-          </a:p>
-          <a:p>
-            <a:pPr>
-              <a:buNone/>
-            </a:pPr>
-            <a:endParaRPr lang="en-US" sz="2400" b="1" dirty="0" smtClean="0">
+              <a:rPr lang="en-US" sz="2400" b="1" dirty="0">
+                <a:latin typeface="Times New Roman" pitchFamily="18" charset="0"/>
+                <a:cs typeface="Times New Roman" pitchFamily="18" charset="0"/>
+              </a:rPr>
+              <a:t>Slide 32 — Exit Quiz</a:t>
+            </a:r>
+          </a:p>
+          <a:p>
+            <a:pPr>
+              <a:buNone/>
+            </a:pPr>
+            <a:endParaRPr lang="en-US" sz="2400" b="1" dirty="0">
               <a:latin typeface="Times New Roman" pitchFamily="18" charset="0"/>
               <a:cs typeface="Times New Roman" pitchFamily="18" charset="0"/>
             </a:endParaRPr>
@@ -12819,7 +12255,7 @@
               <a:buNone/>
             </a:pPr>
             <a:r>
-              <a:rPr lang="en-US" sz="2400" b="1" dirty="0" smtClean="0">
+              <a:rPr lang="en-US" sz="2400" b="1" dirty="0">
                 <a:latin typeface="Times New Roman" pitchFamily="18" charset="0"/>
                 <a:cs typeface="Times New Roman" pitchFamily="18" charset="0"/>
               </a:rPr>
@@ -12831,7 +12267,7 @@
               <a:buNone/>
             </a:pPr>
             <a:r>
-              <a:rPr lang="en-US" sz="2400" dirty="0" smtClean="0">
+              <a:rPr lang="en-US" sz="2400" dirty="0">
                 <a:latin typeface="Times New Roman" pitchFamily="18" charset="0"/>
                 <a:cs typeface="Times New Roman" pitchFamily="18" charset="0"/>
               </a:rPr>
@@ -12843,7 +12279,7 @@
               <a:buNone/>
             </a:pPr>
             <a:r>
-              <a:rPr lang="en-US" sz="2400" b="1" dirty="0" smtClean="0">
+              <a:rPr lang="en-US" sz="2400" b="1" dirty="0">
                 <a:latin typeface="Times New Roman" pitchFamily="18" charset="0"/>
                 <a:cs typeface="Times New Roman" pitchFamily="18" charset="0"/>
               </a:rPr>
@@ -12855,7 +12291,7 @@
               <a:buNone/>
             </a:pPr>
             <a:r>
-              <a:rPr lang="en-US" sz="2400" dirty="0" smtClean="0">
+              <a:rPr lang="en-US" sz="2400" dirty="0">
                 <a:latin typeface="Times New Roman" pitchFamily="18" charset="0"/>
                 <a:cs typeface="Times New Roman" pitchFamily="18" charset="0"/>
               </a:rPr>
@@ -12867,7 +12303,7 @@
               <a:buNone/>
             </a:pPr>
             <a:r>
-              <a:rPr lang="en-US" sz="2400" b="1" dirty="0" smtClean="0">
+              <a:rPr lang="en-US" sz="2400" b="1" dirty="0">
                 <a:latin typeface="Times New Roman" pitchFamily="18" charset="0"/>
                 <a:cs typeface="Times New Roman" pitchFamily="18" charset="0"/>
               </a:rPr>
@@ -12879,7 +12315,7 @@
               <a:buNone/>
             </a:pPr>
             <a:r>
-              <a:rPr lang="en-US" sz="2400" dirty="0" smtClean="0">
+              <a:rPr lang="en-US" sz="2400" dirty="0">
                 <a:latin typeface="Times New Roman" pitchFamily="18" charset="0"/>
                 <a:cs typeface="Times New Roman" pitchFamily="18" charset="0"/>
               </a:rPr>
@@ -12891,7 +12327,7 @@
               <a:buNone/>
             </a:pPr>
             <a:r>
-              <a:rPr lang="en-US" sz="2400" b="1" dirty="0" smtClean="0">
+              <a:rPr lang="en-US" sz="2400" b="1" dirty="0">
                 <a:latin typeface="Times New Roman" pitchFamily="18" charset="0"/>
                 <a:cs typeface="Times New Roman" pitchFamily="18" charset="0"/>
               </a:rPr>
@@ -12903,7 +12339,7 @@
               <a:buNone/>
             </a:pPr>
             <a:r>
-              <a:rPr lang="en-US" sz="2400" dirty="0" smtClean="0">
+              <a:rPr lang="en-US" sz="2400" dirty="0">
                 <a:latin typeface="Times New Roman" pitchFamily="18" charset="0"/>
                 <a:cs typeface="Times New Roman" pitchFamily="18" charset="0"/>
               </a:rPr>
@@ -12915,7 +12351,7 @@
               <a:buNone/>
             </a:pPr>
             <a:r>
-              <a:rPr lang="en-US" sz="2400" b="1" dirty="0" smtClean="0">
+              <a:rPr lang="en-US" sz="2400" b="1" dirty="0">
                 <a:latin typeface="Times New Roman" pitchFamily="18" charset="0"/>
                 <a:cs typeface="Times New Roman" pitchFamily="18" charset="0"/>
               </a:rPr>
@@ -12927,7 +12363,7 @@
               <a:buNone/>
             </a:pPr>
             <a:r>
-              <a:rPr lang="en-US" sz="2400" dirty="0" smtClean="0">
+              <a:rPr lang="en-US" sz="2400" dirty="0">
                 <a:latin typeface="Times New Roman" pitchFamily="18" charset="0"/>
                 <a:cs typeface="Times New Roman" pitchFamily="18" charset="0"/>
               </a:rPr>
@@ -12996,7 +12432,7 @@
               <a:buNone/>
             </a:pPr>
             <a:r>
-              <a:rPr lang="en-US" sz="2400" b="1" dirty="0" smtClean="0">
+              <a:rPr lang="en-US" sz="2400" b="1" dirty="0">
                 <a:latin typeface="Times New Roman" pitchFamily="18" charset="0"/>
                 <a:cs typeface="Times New Roman" pitchFamily="18" charset="0"/>
               </a:rPr>
@@ -13008,25 +12444,18 @@
               <a:buNone/>
             </a:pPr>
             <a:r>
-              <a:rPr lang="en-US" sz="2400" dirty="0" smtClean="0">
-                <a:latin typeface="Times New Roman" pitchFamily="18" charset="0"/>
-                <a:cs typeface="Times New Roman" pitchFamily="18" charset="0"/>
-              </a:rPr>
-              <a:t>What factors should an AI engineer consider before choosing a model</a:t>
-            </a:r>
-            <a:r>
-              <a:rPr lang="en-US" sz="2400" dirty="0" smtClean="0">
-                <a:latin typeface="Times New Roman" pitchFamily="18" charset="0"/>
-                <a:cs typeface="Times New Roman" pitchFamily="18" charset="0"/>
-              </a:rPr>
-              <a:t>?</a:t>
-            </a:r>
-          </a:p>
-          <a:p>
-            <a:pPr>
-              <a:buNone/>
-            </a:pPr>
-            <a:endParaRPr lang="en-US" sz="2400" dirty="0" smtClean="0">
+              <a:rPr lang="en-US" sz="2400" dirty="0">
+                <a:latin typeface="Times New Roman" pitchFamily="18" charset="0"/>
+                <a:cs typeface="Times New Roman" pitchFamily="18" charset="0"/>
+              </a:rPr>
+              <a:t>What factors should an AI engineer consider before choosing a model?</a:t>
+            </a:r>
+          </a:p>
+          <a:p>
+            <a:pPr>
+              <a:buNone/>
+            </a:pPr>
+            <a:endParaRPr lang="en-US" sz="2400" dirty="0">
               <a:latin typeface="Times New Roman" pitchFamily="18" charset="0"/>
               <a:cs typeface="Times New Roman" pitchFamily="18" charset="0"/>
             </a:endParaRPr>
@@ -13036,7 +12465,7 @@
               <a:buNone/>
             </a:pPr>
             <a:r>
-              <a:rPr lang="en-US" sz="2400" b="1" dirty="0" smtClean="0">
+              <a:rPr lang="en-US" sz="2400" b="1" dirty="0">
                 <a:latin typeface="Times New Roman" pitchFamily="18" charset="0"/>
                 <a:cs typeface="Times New Roman" pitchFamily="18" charset="0"/>
               </a:rPr>
@@ -13048,25 +12477,18 @@
               <a:buNone/>
             </a:pPr>
             <a:r>
-              <a:rPr lang="en-US" sz="2400" dirty="0" smtClean="0">
-                <a:latin typeface="Times New Roman" pitchFamily="18" charset="0"/>
-                <a:cs typeface="Times New Roman" pitchFamily="18" charset="0"/>
-              </a:rPr>
-              <a:t>Why should generated code be tested</a:t>
-            </a:r>
-            <a:r>
-              <a:rPr lang="en-US" sz="2400" dirty="0" smtClean="0">
-                <a:latin typeface="Times New Roman" pitchFamily="18" charset="0"/>
-                <a:cs typeface="Times New Roman" pitchFamily="18" charset="0"/>
-              </a:rPr>
-              <a:t>?</a:t>
-            </a:r>
-          </a:p>
-          <a:p>
-            <a:pPr>
-              <a:buNone/>
-            </a:pPr>
-            <a:endParaRPr lang="en-US" sz="2400" dirty="0" smtClean="0">
+              <a:rPr lang="en-US" sz="2400" dirty="0">
+                <a:latin typeface="Times New Roman" pitchFamily="18" charset="0"/>
+                <a:cs typeface="Times New Roman" pitchFamily="18" charset="0"/>
+              </a:rPr>
+              <a:t>Why should generated code be tested?</a:t>
+            </a:r>
+          </a:p>
+          <a:p>
+            <a:pPr>
+              <a:buNone/>
+            </a:pPr>
+            <a:endParaRPr lang="en-US" sz="2400" dirty="0">
               <a:latin typeface="Times New Roman" pitchFamily="18" charset="0"/>
               <a:cs typeface="Times New Roman" pitchFamily="18" charset="0"/>
             </a:endParaRPr>
@@ -13076,7 +12498,7 @@
               <a:buNone/>
             </a:pPr>
             <a:r>
-              <a:rPr lang="en-US" sz="2400" b="1" dirty="0" smtClean="0">
+              <a:rPr lang="en-US" sz="2400" b="1" dirty="0">
                 <a:latin typeface="Times New Roman" pitchFamily="18" charset="0"/>
                 <a:cs typeface="Times New Roman" pitchFamily="18" charset="0"/>
               </a:rPr>
@@ -13088,7 +12510,7 @@
               <a:buNone/>
             </a:pPr>
             <a:r>
-              <a:rPr lang="en-US" sz="2400" dirty="0" smtClean="0">
+              <a:rPr lang="en-US" sz="2400" dirty="0">
                 <a:latin typeface="Times New Roman" pitchFamily="18" charset="0"/>
                 <a:cs typeface="Times New Roman" pitchFamily="18" charset="0"/>
               </a:rPr>
@@ -13097,69 +12519,6 @@
           </a:p>
           <a:p>
             <a:endParaRPr lang="en-US" sz="2400" dirty="0"/>
-          </a:p>
-        </p:txBody>
-      </p:sp>
-    </p:spTree>
-  </p:cSld>
-  <p:clrMapOvr>
-    <a:masterClrMapping/>
-  </p:clrMapOvr>
-</p:sld>
-</file>
-
-<file path=ppt/slides/slide46.xml><?xml version="1.0" encoding="utf-8"?>
-<p:sld xmlns:a="http://schemas.openxmlformats.org/drawingml/2006/main" xmlns:r="http://schemas.openxmlformats.org/officeDocument/2006/relationships" xmlns:p="http://schemas.openxmlformats.org/presentationml/2006/main">
-  <p:cSld>
-    <p:spTree>
-      <p:nvGrpSpPr>
-        <p:cNvPr id="1" name=""/>
-        <p:cNvGrpSpPr/>
-        <p:nvPr/>
-      </p:nvGrpSpPr>
-      <p:grpSpPr>
-        <a:xfrm>
-          <a:off x="0" y="0"/>
-          <a:ext cx="0" cy="0"/>
-          <a:chOff x="0" y="0"/>
-          <a:chExt cx="0" cy="0"/>
-        </a:xfrm>
-      </p:grpSpPr>
-      <p:sp>
-        <p:nvSpPr>
-          <p:cNvPr id="2" name="Title 1"/>
-          <p:cNvSpPr>
-            <a:spLocks noGrp="1"/>
-          </p:cNvSpPr>
-          <p:nvPr>
-            <p:ph type="title"/>
-          </p:nvPr>
-        </p:nvSpPr>
-        <p:spPr/>
-        <p:txBody>
-          <a:bodyPr/>
-          <a:lstStyle/>
-          <a:p>
-            <a:endParaRPr lang="en-US"/>
-          </a:p>
-        </p:txBody>
-      </p:sp>
-      <p:sp>
-        <p:nvSpPr>
-          <p:cNvPr id="3" name="Content Placeholder 2"/>
-          <p:cNvSpPr>
-            <a:spLocks noGrp="1"/>
-          </p:cNvSpPr>
-          <p:nvPr>
-            <p:ph idx="1"/>
-          </p:nvPr>
-        </p:nvSpPr>
-        <p:spPr/>
-        <p:txBody>
-          <a:bodyPr/>
-          <a:lstStyle/>
-          <a:p>
-            <a:endParaRPr lang="en-US"/>
           </a:p>
         </p:txBody>
       </p:sp>
@@ -13214,7 +12573,7 @@
               <a:buNone/>
             </a:pPr>
             <a:r>
-              <a:rPr lang="en-US" sz="2800" b="1" u="sng" dirty="0" smtClean="0">
+              <a:rPr lang="en-US" sz="2800" b="1" u="sng" dirty="0">
                 <a:latin typeface="Times New Roman" pitchFamily="18" charset="0"/>
                 <a:cs typeface="Times New Roman" pitchFamily="18" charset="0"/>
               </a:rPr>
@@ -13226,7 +12585,7 @@
               <a:buNone/>
             </a:pPr>
             <a:r>
-              <a:rPr lang="en-US" sz="2800" b="1" u="sng" dirty="0" smtClean="0">
+              <a:rPr lang="en-US" sz="2800" b="1" u="sng" dirty="0">
                 <a:latin typeface="Times New Roman" pitchFamily="18" charset="0"/>
                 <a:cs typeface="Times New Roman" pitchFamily="18" charset="0"/>
               </a:rPr>
@@ -13237,7 +12596,7 @@
             <a:pPr>
               <a:buNone/>
             </a:pPr>
-            <a:endParaRPr lang="en-US" sz="2800" b="1" u="sng" dirty="0" smtClean="0">
+            <a:endParaRPr lang="en-US" sz="2800" b="1" u="sng" dirty="0">
               <a:latin typeface="Times New Roman" pitchFamily="18" charset="0"/>
               <a:cs typeface="Times New Roman" pitchFamily="18" charset="0"/>
             </a:endParaRPr>
@@ -13247,7 +12606,7 @@
               <a:buNone/>
             </a:pPr>
             <a:r>
-              <a:rPr lang="en-US" sz="2400" b="1" dirty="0" smtClean="0">
+              <a:rPr lang="en-US" sz="2400" b="1" dirty="0">
                 <a:latin typeface="Times New Roman" pitchFamily="18" charset="0"/>
                 <a:cs typeface="Times New Roman" pitchFamily="18" charset="0"/>
               </a:rPr>
@@ -13258,7 +12617,7 @@
             <a:pPr>
               <a:buNone/>
             </a:pPr>
-            <a:endParaRPr lang="en-US" sz="2400" dirty="0" smtClean="0">
+            <a:endParaRPr lang="en-US" sz="2400" dirty="0">
               <a:latin typeface="Times New Roman" pitchFamily="18" charset="0"/>
               <a:cs typeface="Times New Roman" pitchFamily="18" charset="0"/>
             </a:endParaRPr>
@@ -13268,7 +12627,7 @@
               <a:buNone/>
             </a:pPr>
             <a:r>
-              <a:rPr lang="en-US" sz="2400" dirty="0" smtClean="0">
+              <a:rPr lang="en-US" sz="2400" dirty="0">
                 <a:latin typeface="Times New Roman" pitchFamily="18" charset="0"/>
                 <a:cs typeface="Times New Roman" pitchFamily="18" charset="0"/>
               </a:rPr>
@@ -13280,13 +12639,13 @@
               <a:buNone/>
             </a:pPr>
             <a:r>
-              <a:rPr lang="en-US" sz="2400" dirty="0" smtClean="0">
+              <a:rPr lang="en-US" sz="2400" dirty="0">
                 <a:latin typeface="Times New Roman" pitchFamily="18" charset="0"/>
                 <a:cs typeface="Times New Roman" pitchFamily="18" charset="0"/>
               </a:rPr>
               <a:t>🟢 Yes         🔴 No</a:t>
             </a:r>
-            <a:endParaRPr lang="en-US" sz="2000" dirty="0" smtClean="0">
+            <a:endParaRPr lang="en-US" sz="2000" dirty="0">
               <a:latin typeface="Times New Roman" pitchFamily="18" charset="0"/>
               <a:cs typeface="Times New Roman" pitchFamily="18" charset="0"/>
             </a:endParaRPr>
@@ -13378,7 +12737,7 @@
               <a:tabLst/>
             </a:pPr>
             <a:r>
-              <a:rPr kumimoji="0" lang="en-US" sz="2400" b="0" i="0" u="none" strike="noStrike" cap="none" normalizeH="0" baseline="0" dirty="0" smtClean="0">
+              <a:rPr kumimoji="0" lang="en-US" sz="2400" b="0" i="0" u="none" strike="noStrike" cap="none" normalizeH="0" baseline="0" dirty="0">
                 <a:ln>
                   <a:noFill/>
                 </a:ln>
@@ -13409,7 +12768,7 @@
               <a:buNone/>
               <a:tabLst/>
             </a:pPr>
-            <a:endParaRPr kumimoji="0" lang="en-US" sz="2400" b="0" i="0" u="none" strike="noStrike" cap="none" normalizeH="0" baseline="0" dirty="0" smtClean="0">
+            <a:endParaRPr kumimoji="0" lang="en-US" sz="2400" b="0" i="0" u="none" strike="noStrike" cap="none" normalizeH="0" baseline="0" dirty="0">
               <a:ln>
                 <a:noFill/>
               </a:ln>
@@ -13439,7 +12798,7 @@
               <a:tabLst/>
             </a:pPr>
             <a:r>
-              <a:rPr kumimoji="0" lang="en-US" sz="2400" b="0" i="0" u="none" strike="noStrike" cap="none" normalizeH="0" baseline="0" dirty="0" smtClean="0">
+              <a:rPr kumimoji="0" lang="en-US" sz="2400" b="0" i="0" u="none" strike="noStrike" cap="none" normalizeH="0" baseline="0" dirty="0">
                 <a:ln>
                   <a:noFill/>
                 </a:ln>
@@ -13471,7 +12830,7 @@
               <a:tabLst/>
             </a:pPr>
             <a:r>
-              <a:rPr kumimoji="0" lang="en-US" sz="2400" b="0" i="0" u="none" strike="noStrike" cap="none" normalizeH="0" baseline="0" dirty="0" smtClean="0">
+              <a:rPr kumimoji="0" lang="en-US" sz="2400" b="0" i="0" u="none" strike="noStrike" cap="none" normalizeH="0" baseline="0" dirty="0">
                 <a:ln>
                   <a:noFill/>
                 </a:ln>
@@ -13502,7 +12861,7 @@
               <a:buNone/>
               <a:tabLst/>
             </a:pPr>
-            <a:endParaRPr lang="en-US" sz="2400" dirty="0" smtClean="0">
+            <a:endParaRPr lang="en-US" sz="2400" dirty="0">
               <a:latin typeface="Times New Roman" pitchFamily="18" charset="0"/>
               <a:cs typeface="Times New Roman" pitchFamily="18" charset="0"/>
             </a:endParaRPr>
@@ -13524,7 +12883,7 @@
               <a:buNone/>
               <a:tabLst/>
             </a:pPr>
-            <a:endParaRPr kumimoji="0" lang="en-US" sz="2400" b="0" i="0" u="none" strike="noStrike" cap="none" normalizeH="0" baseline="0" dirty="0" smtClean="0">
+            <a:endParaRPr kumimoji="0" lang="en-US" sz="2400" b="0" i="0" u="none" strike="noStrike" cap="none" normalizeH="0" baseline="0" dirty="0">
               <a:ln>
                 <a:noFill/>
               </a:ln>
@@ -13554,7 +12913,7 @@
               <a:tabLst/>
             </a:pPr>
             <a:r>
-              <a:rPr kumimoji="0" lang="en-US" sz="2400" b="0" i="0" u="none" strike="noStrike" cap="none" normalizeH="0" baseline="0" dirty="0" smtClean="0">
+              <a:rPr kumimoji="0" lang="en-US" sz="2400" b="0" i="0" u="none" strike="noStrike" cap="none" normalizeH="0" baseline="0" dirty="0">
                 <a:ln>
                   <a:noFill/>
                 </a:ln>
@@ -13586,7 +12945,7 @@
               <a:tabLst/>
             </a:pPr>
             <a:r>
-              <a:rPr kumimoji="0" lang="en-US" sz="2400" b="0" i="0" u="none" strike="noStrike" cap="none" normalizeH="0" baseline="0" dirty="0" smtClean="0">
+              <a:rPr kumimoji="0" lang="en-US" sz="2400" b="0" i="0" u="none" strike="noStrike" cap="none" normalizeH="0" baseline="0" dirty="0">
                 <a:ln>
                   <a:noFill/>
                 </a:ln>
@@ -13618,7 +12977,7 @@
               <a:tabLst/>
             </a:pPr>
             <a:r>
-              <a:rPr kumimoji="0" lang="en-US" sz="2400" b="0" i="0" u="none" strike="noStrike" cap="none" normalizeH="0" baseline="0" dirty="0" smtClean="0">
+              <a:rPr kumimoji="0" lang="en-US" sz="2400" b="0" i="0" u="none" strike="noStrike" cap="none" normalizeH="0" baseline="0" dirty="0">
                 <a:ln>
                   <a:noFill/>
                 </a:ln>
@@ -13650,7 +13009,7 @@
               <a:tabLst/>
             </a:pPr>
             <a:r>
-              <a:rPr kumimoji="0" lang="en-US" sz="2400" b="0" i="0" u="none" strike="noStrike" cap="none" normalizeH="0" baseline="0" dirty="0" smtClean="0">
+              <a:rPr kumimoji="0" lang="en-US" sz="2400" b="0" i="0" u="none" strike="noStrike" cap="none" normalizeH="0" baseline="0" dirty="0">
                 <a:ln>
                   <a:noFill/>
                 </a:ln>
@@ -13682,7 +13041,7 @@
               <a:tabLst/>
             </a:pPr>
             <a:r>
-              <a:rPr kumimoji="0" lang="en-US" sz="2400" b="0" i="0" u="none" strike="noStrike" cap="none" normalizeH="0" baseline="0" dirty="0" smtClean="0">
+              <a:rPr kumimoji="0" lang="en-US" sz="2400" b="0" i="0" u="none" strike="noStrike" cap="none" normalizeH="0" baseline="0" dirty="0">
                 <a:ln>
                   <a:noFill/>
                 </a:ln>
@@ -13703,13 +13062,6 @@
   <p:clrMapOvr>
     <a:masterClrMapping/>
   </p:clrMapOvr>
-  <p:timing>
-    <p:tnLst>
-      <p:par>
-        <p:cTn id="1" dur="indefinite" restart="never" nodeType="tmRoot"/>
-      </p:par>
-    </p:tnLst>
-  </p:timing>
 </p:sld>
 </file>
 
@@ -13756,7 +13108,7 @@
               <a:buNone/>
             </a:pPr>
             <a:r>
-              <a:rPr lang="en-US" sz="4000" b="1" u="sng" dirty="0" smtClean="0">
+              <a:rPr lang="en-US" sz="4000" b="1" u="sng" dirty="0">
                 <a:latin typeface="Times New Roman" pitchFamily="18" charset="0"/>
                 <a:cs typeface="Times New Roman" pitchFamily="18" charset="0"/>
               </a:rPr>
@@ -13768,7 +13120,7 @@
               <a:buNone/>
             </a:pPr>
             <a:r>
-              <a:rPr lang="en-US" sz="4000" b="1" u="sng" dirty="0" smtClean="0">
+              <a:rPr lang="en-US" sz="4000" b="1" u="sng" dirty="0">
                 <a:latin typeface="Times New Roman" pitchFamily="18" charset="0"/>
                 <a:cs typeface="Times New Roman" pitchFamily="18" charset="0"/>
               </a:rPr>
@@ -13779,7 +13131,7 @@
             <a:pPr>
               <a:buNone/>
             </a:pPr>
-            <a:endParaRPr lang="en-US" sz="3400" dirty="0" smtClean="0">
+            <a:endParaRPr lang="en-US" sz="3400" dirty="0">
               <a:latin typeface="Times New Roman" pitchFamily="18" charset="0"/>
               <a:cs typeface="Times New Roman" pitchFamily="18" charset="0"/>
             </a:endParaRPr>
@@ -13789,14 +13141,14 @@
               <a:buNone/>
             </a:pPr>
             <a:r>
-              <a:rPr lang="en-US" sz="3400" dirty="0" smtClean="0">
+              <a:rPr lang="en-US" sz="3400" dirty="0">
                 <a:latin typeface="Times New Roman" pitchFamily="18" charset="0"/>
                 <a:cs typeface="Times New Roman" pitchFamily="18" charset="0"/>
               </a:rPr>
               <a:t>				</a:t>
             </a:r>
             <a:r>
-              <a:rPr lang="en-US" sz="2800" dirty="0" smtClean="0">
+              <a:rPr lang="en-US" sz="2800" dirty="0">
                 <a:latin typeface="Times New Roman" pitchFamily="18" charset="0"/>
                 <a:cs typeface="Times New Roman" pitchFamily="18" charset="0"/>
               </a:rPr>
@@ -13807,7 +13159,7 @@
             <a:pPr>
               <a:buNone/>
             </a:pPr>
-            <a:endParaRPr lang="en-US" sz="2800" dirty="0" smtClean="0">
+            <a:endParaRPr lang="en-US" sz="2800" dirty="0">
               <a:latin typeface="Times New Roman" pitchFamily="18" charset="0"/>
               <a:cs typeface="Times New Roman" pitchFamily="18" charset="0"/>
             </a:endParaRPr>
@@ -13817,7 +13169,7 @@
               <a:buNone/>
             </a:pPr>
             <a:r>
-              <a:rPr lang="en-US" sz="2800" b="1" dirty="0" smtClean="0">
+              <a:rPr lang="en-US" sz="2800" b="1" dirty="0">
                 <a:latin typeface="Times New Roman" pitchFamily="18" charset="0"/>
                 <a:cs typeface="Times New Roman" pitchFamily="18" charset="0"/>
               </a:rPr>
@@ -13826,7 +13178,7 @@
           </a:p>
           <a:p>
             <a:r>
-              <a:rPr lang="en-US" sz="2800" dirty="0" smtClean="0">
+              <a:rPr lang="en-US" sz="2800" dirty="0">
                 <a:latin typeface="Times New Roman" pitchFamily="18" charset="0"/>
                 <a:cs typeface="Times New Roman" pitchFamily="18" charset="0"/>
               </a:rPr>
@@ -13835,7 +13187,7 @@
           </a:p>
           <a:p>
             <a:r>
-              <a:rPr lang="en-US" sz="2800" dirty="0" smtClean="0">
+              <a:rPr lang="en-US" sz="2800" dirty="0">
                 <a:latin typeface="Times New Roman" pitchFamily="18" charset="0"/>
                 <a:cs typeface="Times New Roman" pitchFamily="18" charset="0"/>
               </a:rPr>
@@ -13844,7 +13196,7 @@
           </a:p>
           <a:p>
             <a:r>
-              <a:rPr lang="en-US" sz="2800" dirty="0" smtClean="0">
+              <a:rPr lang="en-US" sz="2800" dirty="0">
                 <a:latin typeface="Times New Roman" pitchFamily="18" charset="0"/>
                 <a:cs typeface="Times New Roman" pitchFamily="18" charset="0"/>
               </a:rPr>
@@ -13853,7 +13205,7 @@
           </a:p>
           <a:p>
             <a:r>
-              <a:rPr lang="en-US" sz="2800" dirty="0" smtClean="0">
+              <a:rPr lang="en-US" sz="2800" dirty="0">
                 <a:latin typeface="Times New Roman" pitchFamily="18" charset="0"/>
                 <a:cs typeface="Times New Roman" pitchFamily="18" charset="0"/>
               </a:rPr>
@@ -13862,7 +13214,7 @@
           </a:p>
           <a:p>
             <a:r>
-              <a:rPr lang="en-US" sz="2800" dirty="0" smtClean="0">
+              <a:rPr lang="en-US" sz="2800" dirty="0">
                 <a:latin typeface="Times New Roman" pitchFamily="18" charset="0"/>
                 <a:cs typeface="Times New Roman" pitchFamily="18" charset="0"/>
               </a:rPr>
@@ -13871,7 +13223,7 @@
           </a:p>
           <a:p>
             <a:r>
-              <a:rPr lang="en-US" sz="2800" dirty="0" smtClean="0">
+              <a:rPr lang="en-US" sz="2800" dirty="0">
                 <a:latin typeface="Times New Roman" pitchFamily="18" charset="0"/>
                 <a:cs typeface="Times New Roman" pitchFamily="18" charset="0"/>
               </a:rPr>
@@ -13880,7 +13232,7 @@
           </a:p>
           <a:p>
             <a:r>
-              <a:rPr lang="en-US" sz="2800" dirty="0" smtClean="0">
+              <a:rPr lang="en-US" sz="2800" dirty="0">
                 <a:latin typeface="Times New Roman" pitchFamily="18" charset="0"/>
                 <a:cs typeface="Times New Roman" pitchFamily="18" charset="0"/>
               </a:rPr>
@@ -13889,7 +13241,7 @@
           </a:p>
           <a:p>
             <a:r>
-              <a:rPr lang="en-US" sz="2800" dirty="0" smtClean="0">
+              <a:rPr lang="en-US" sz="2800" dirty="0">
                 <a:latin typeface="Times New Roman" pitchFamily="18" charset="0"/>
                 <a:cs typeface="Times New Roman" pitchFamily="18" charset="0"/>
               </a:rPr>
@@ -13949,7 +13301,7 @@
               <a:buNone/>
             </a:pPr>
             <a:r>
-              <a:rPr lang="en-US" sz="2400" b="1" dirty="0" smtClean="0">
+              <a:rPr lang="en-US" sz="2400" b="1" dirty="0">
                 <a:latin typeface="Times New Roman" pitchFamily="18" charset="0"/>
                 <a:cs typeface="Times New Roman" pitchFamily="18" charset="0"/>
               </a:rPr>
@@ -13960,26 +13312,22 @@
             <a:pPr>
               <a:buNone/>
             </a:pPr>
-            <a:endParaRPr lang="en-US" sz="2400" dirty="0" smtClean="0">
-              <a:latin typeface="Times New Roman" pitchFamily="18" charset="0"/>
-              <a:cs typeface="Times New Roman" pitchFamily="18" charset="0"/>
-            </a:endParaRPr>
-          </a:p>
-          <a:p>
-            <a:pPr>
-              <a:buNone/>
-            </a:pPr>
-            <a:r>
-              <a:rPr lang="en-US" sz="2400" dirty="0" smtClean="0">
-                <a:latin typeface="Times New Roman" pitchFamily="18" charset="0"/>
-                <a:cs typeface="Times New Roman" pitchFamily="18" charset="0"/>
-              </a:rPr>
-              <a:t>An LLM is a model. A chatbot is an application/interface built around a model and additional systems.</a:t>
-            </a:r>
             <a:endParaRPr lang="en-US" sz="2400" dirty="0">
               <a:latin typeface="Times New Roman" pitchFamily="18" charset="0"/>
               <a:cs typeface="Times New Roman" pitchFamily="18" charset="0"/>
             </a:endParaRPr>
+          </a:p>
+          <a:p>
+            <a:pPr>
+              <a:buNone/>
+            </a:pPr>
+            <a:r>
+              <a:rPr lang="en-US" sz="2400" dirty="0">
+                <a:latin typeface="Times New Roman" pitchFamily="18" charset="0"/>
+                <a:cs typeface="Times New Roman" pitchFamily="18" charset="0"/>
+              </a:rPr>
+              <a:t>An LLM is a model. A chatbot is an application/interface built around a model and additional systems.</a:t>
+            </a:r>
           </a:p>
         </p:txBody>
       </p:sp>
@@ -14034,7 +13382,7 @@
               <a:buNone/>
             </a:pPr>
             <a:r>
-              <a:rPr lang="en-US" sz="2800" b="1" u="sng" dirty="0" smtClean="0">
+              <a:rPr lang="en-US" sz="2800" b="1" u="sng" dirty="0">
                 <a:latin typeface="Times New Roman" pitchFamily="18" charset="0"/>
                 <a:cs typeface="Times New Roman" pitchFamily="18" charset="0"/>
               </a:rPr>
@@ -14046,7 +13394,7 @@
               <a:buNone/>
             </a:pPr>
             <a:r>
-              <a:rPr lang="en-US" sz="2800" b="1" u="sng" dirty="0" smtClean="0">
+              <a:rPr lang="en-US" sz="2800" b="1" u="sng" dirty="0">
                 <a:latin typeface="Times New Roman" pitchFamily="18" charset="0"/>
                 <a:cs typeface="Times New Roman" pitchFamily="18" charset="0"/>
               </a:rPr>
@@ -14057,7 +13405,7 @@
             <a:pPr>
               <a:buNone/>
             </a:pPr>
-            <a:endParaRPr lang="en-US" sz="2600" dirty="0" smtClean="0">
+            <a:endParaRPr lang="en-US" sz="2600" dirty="0">
               <a:latin typeface="Times New Roman" pitchFamily="18" charset="0"/>
               <a:cs typeface="Times New Roman" pitchFamily="18" charset="0"/>
             </a:endParaRPr>
@@ -14067,7 +13415,7 @@
               <a:buNone/>
             </a:pPr>
             <a:r>
-              <a:rPr lang="en-US" sz="2600" dirty="0" smtClean="0">
+              <a:rPr lang="en-US" sz="2600" dirty="0">
                 <a:latin typeface="Times New Roman" pitchFamily="18" charset="0"/>
                 <a:cs typeface="Times New Roman" pitchFamily="18" charset="0"/>
               </a:rPr>
@@ -14079,7 +13427,7 @@
               <a:buNone/>
             </a:pPr>
             <a:r>
-              <a:rPr lang="en-US" sz="2600" b="1" dirty="0" smtClean="0">
+              <a:rPr lang="en-US" sz="2600" b="1" dirty="0">
                 <a:latin typeface="Times New Roman" pitchFamily="18" charset="0"/>
                 <a:cs typeface="Times New Roman" pitchFamily="18" charset="0"/>
               </a:rPr>
@@ -14091,7 +13439,7 @@
               <a:buNone/>
             </a:pPr>
             <a:r>
-              <a:rPr lang="en-US" sz="2600" dirty="0" smtClean="0">
+              <a:rPr lang="en-US" sz="2600" dirty="0">
                 <a:latin typeface="Times New Roman" pitchFamily="18" charset="0"/>
                 <a:cs typeface="Times New Roman" pitchFamily="18" charset="0"/>
               </a:rPr>
@@ -14103,7 +13451,7 @@
               <a:buNone/>
             </a:pPr>
             <a:r>
-              <a:rPr lang="en-US" sz="2600" b="1" dirty="0" smtClean="0">
+              <a:rPr lang="en-US" sz="2600" b="1" dirty="0">
                 <a:latin typeface="Times New Roman" pitchFamily="18" charset="0"/>
                 <a:cs typeface="Times New Roman" pitchFamily="18" charset="0"/>
               </a:rPr>
@@ -14115,20 +13463,20 @@
               <a:buNone/>
             </a:pPr>
             <a:r>
-              <a:rPr lang="en-US" sz="2600" dirty="0" smtClean="0">
+              <a:rPr lang="en-US" sz="2600" dirty="0">
                 <a:latin typeface="Times New Roman" pitchFamily="18" charset="0"/>
                 <a:cs typeface="Times New Roman" pitchFamily="18" charset="0"/>
               </a:rPr>
               <a:t>Associated with </a:t>
             </a:r>
             <a:r>
-              <a:rPr lang="en-US" sz="2600" dirty="0" err="1" smtClean="0">
+              <a:rPr lang="en-US" sz="2600" dirty="0" err="1">
                 <a:latin typeface="Times New Roman" pitchFamily="18" charset="0"/>
                 <a:cs typeface="Times New Roman" pitchFamily="18" charset="0"/>
               </a:rPr>
               <a:t>Anthropic</a:t>
             </a:r>
-            <a:endParaRPr lang="en-US" sz="2600" dirty="0" smtClean="0">
+            <a:endParaRPr lang="en-US" sz="2600" dirty="0">
               <a:latin typeface="Times New Roman" pitchFamily="18" charset="0"/>
               <a:cs typeface="Times New Roman" pitchFamily="18" charset="0"/>
             </a:endParaRPr>
@@ -14138,7 +13486,7 @@
               <a:buNone/>
             </a:pPr>
             <a:r>
-              <a:rPr lang="en-US" sz="2600" b="1" dirty="0" smtClean="0">
+              <a:rPr lang="en-US" sz="2600" b="1" dirty="0">
                 <a:latin typeface="Times New Roman" pitchFamily="18" charset="0"/>
                 <a:cs typeface="Times New Roman" pitchFamily="18" charset="0"/>
               </a:rPr>
@@ -14150,7 +13498,7 @@
               <a:buNone/>
             </a:pPr>
             <a:r>
-              <a:rPr lang="en-US" sz="2600" dirty="0" smtClean="0">
+              <a:rPr lang="en-US" sz="2600" dirty="0">
                 <a:latin typeface="Times New Roman" pitchFamily="18" charset="0"/>
                 <a:cs typeface="Times New Roman" pitchFamily="18" charset="0"/>
               </a:rPr>
@@ -14162,7 +13510,7 @@
               <a:buNone/>
             </a:pPr>
             <a:r>
-              <a:rPr lang="en-US" sz="2600" b="1" dirty="0" smtClean="0">
+              <a:rPr lang="en-US" sz="2600" b="1" dirty="0">
                 <a:latin typeface="Times New Roman" pitchFamily="18" charset="0"/>
                 <a:cs typeface="Times New Roman" pitchFamily="18" charset="0"/>
               </a:rPr>
@@ -14174,7 +13522,7 @@
               <a:buNone/>
             </a:pPr>
             <a:r>
-              <a:rPr lang="en-US" sz="2600" dirty="0" smtClean="0">
+              <a:rPr lang="en-US" sz="2600" dirty="0">
                 <a:latin typeface="Times New Roman" pitchFamily="18" charset="0"/>
                 <a:cs typeface="Times New Roman" pitchFamily="18" charset="0"/>
               </a:rPr>
